--- a/OWASP_Top_10_2025_Presentacion.pptx
+++ b/OWASP_Top_10_2025_Presentacion.pptx
@@ -3151,8 +3151,8 @@
         </p:nvSpPr>
         <p:spPr>
           <a:xfrm>
-            <a:off x="731520" y="1645920"/>
-            <a:ext cx="137160" cy="3474720"/>
+            <a:off x="731520" y="1188720"/>
+            <a:ext cx="109728" cy="4389120"/>
           </a:xfrm>
           <a:prstGeom prst="rect">
             <a:avLst/>
@@ -3194,8 +3194,8 @@
         </p:nvSpPr>
         <p:spPr>
           <a:xfrm>
-            <a:off x="1097280" y="1463040"/>
-            <a:ext cx="10058400" cy="2011680"/>
+            <a:off x="1097280" y="1097280"/>
+            <a:ext cx="10241280" cy="2011680"/>
           </a:xfrm>
           <a:prstGeom prst="rect">
             <a:avLst/>
@@ -3209,14 +3209,14 @@
           <a:lstStyle/>
           <a:p>
             <a:pPr>
-              <a:defRPr sz="4400" b="1">
+              <a:defRPr sz="4600" b="1">
                 <a:solidFill>
                   <a:srgbClr val="F1F5F9"/>
                 </a:solidFill>
               </a:defRPr>
             </a:pPr>
             <a:r>
-              <a:t>OWASP Top 10: 2025</a:t>
+              <a:t>OWASP Top 10:2025</a:t>
             </a:r>
           </a:p>
           <a:p>
@@ -3231,13 +3231,13 @@
               </a:defRPr>
             </a:pPr>
             <a:r>
-              <a:t>Análisis de Riesgos Críticos en Aplicaciones Web &amp; Mitigación Práctica</a:t>
+              <a:t>Análisis Exhaustivo de Riesgos en Aplicaciones Web &amp; Mitigación Práctica</a:t>
             </a:r>
           </a:p>
           <a:p>
             <a:pPr>
               <a:spcBef>
-                <a:spcPts val="800"/>
+                <a:spcPts val="600"/>
               </a:spcBef>
               <a:defRPr sz="1300">
                 <a:solidFill>
@@ -3246,7 +3246,7 @@
               </a:defRPr>
             </a:pPr>
             <a:r>
-              <a:t>Basado en el estudio de 2.8M de aplicaciones y 248 debilidades de software (CWE)</a:t>
+              <a:t>Monografía Técnica y Demostración Interactiva sobre 2.8 Millones de Aplicaciones</a:t>
             </a:r>
           </a:p>
         </p:txBody>
@@ -3259,8 +3259,8 @@
         </p:nvSpPr>
         <p:spPr>
           <a:xfrm>
-            <a:off x="1097280" y="3931920"/>
-            <a:ext cx="9875520" cy="1828800"/>
+            <a:off x="1097280" y="3474720"/>
+            <a:ext cx="10241280" cy="2103120"/>
           </a:xfrm>
           <a:prstGeom prst="roundRect">
             <a:avLst/>
@@ -3289,49 +3289,291 @@
           </a:fontRef>
         </p:style>
         <p:txBody>
-          <a:bodyPr rtlCol="0" anchor="ctr" lIns="274320" tIns="182880"/>
+          <a:bodyPr rtlCol="0" anchor="ctr" lIns="320040" tIns="228600"/>
+          <a:lstStyle/>
+          <a:p>
+            <a:pPr algn="ctr">
+              <a:spcAft>
+                <a:spcPts val="1200"/>
+              </a:spcAft>
+              <a:defRPr sz="1100" b="1">
+                <a:solidFill>
+                  <a:srgbClr val="F59E0B"/>
+                </a:solidFill>
+              </a:defRPr>
+            </a:pPr>
+            <a:r>
+              <a:t>INTEGRANTES DEL EQUIPO:</a:t>
+            </a:r>
+          </a:p>
+        </p:txBody>
+      </p:sp>
+      <p:sp>
+        <p:nvSpPr>
+          <p:cNvPr id="6" name="Rounded Rectangle 5"/>
+          <p:cNvSpPr/>
+          <p:nvPr/>
+        </p:nvSpPr>
+        <p:spPr>
+          <a:xfrm>
+            <a:off x="1325880" y="4297680"/>
+            <a:ext cx="1874519" cy="731520"/>
+          </a:xfrm>
+          <a:prstGeom prst="roundRect">
+            <a:avLst/>
+          </a:prstGeom>
+          <a:solidFill>
+            <a:srgbClr val="182541"/>
+          </a:solidFill>
+          <a:ln w="12700">
+            <a:solidFill>
+              <a:srgbClr val="06B6D4"/>
+            </a:solidFill>
+          </a:ln>
+        </p:spPr>
+        <p:style>
+          <a:lnRef idx="1">
+            <a:schemeClr val="accent1"/>
+          </a:lnRef>
+          <a:fillRef idx="3">
+            <a:schemeClr val="accent1"/>
+          </a:fillRef>
+          <a:effectRef idx="2">
+            <a:schemeClr val="accent1"/>
+          </a:effectRef>
+          <a:fontRef idx="minor">
+            <a:schemeClr val="lt1"/>
+          </a:fontRef>
+        </p:style>
+        <p:txBody>
+          <a:bodyPr rtlCol="0" anchor="ctr" wrap="square" tIns="109728"/>
           <a:lstStyle/>
           <a:p>
             <a:pPr algn="ctr">
               <a:defRPr sz="1200" b="1">
                 <a:solidFill>
-                  <a:srgbClr val="F59E0B"/>
-                </a:solidFill>
-              </a:defRPr>
-            </a:pPr>
-            <a:r>
-              <a:t>PRESENTACIÓN GRUPAL (5 EXPOSITORES):</a:t>
-            </a:r>
-          </a:p>
-          <a:p>
-            <a:pPr>
-              <a:spcBef>
-                <a:spcPts val="400"/>
-              </a:spcBef>
-              <a:defRPr sz="1150">
-                <a:solidFill>
-                  <a:srgbClr val="CBD5E1"/>
-                </a:solidFill>
-              </a:defRPr>
-            </a:pPr>
-            <a:r>
-              <a:t>• Orador 1: Introducción, Metodología y Estado de la Seguridad</a:t>
-            </a:r>
-            <a:br/>
-            <a:r>
-              <a:t>• Orador 2: A01 (Control de Acceso) &amp; A02 (Configuración Insegura)</a:t>
-            </a:r>
-            <a:br/>
-            <a:r>
-              <a:t>• Orador 3: A03 (Cadena de Suministro) &amp; A04 (Fallas Criptográficas)</a:t>
-            </a:r>
-            <a:br/>
-            <a:r>
-              <a:t>• Orador 4: A05 (Inyección) &amp; A06 (Diseño Inseguro)</a:t>
-            </a:r>
-            <a:br/>
-            <a:r>
-              <a:t>• Orador 5: A07 a A10 (Autenticación, Integridad, Logs, Excepciones) &amp; Demo del Simulador</a:t>
+                  <a:srgbClr val="F1F5F9"/>
+                </a:solidFill>
+              </a:defRPr>
+            </a:pPr>
+            <a:r>
+              <a:t>Valentín Garzaniti</a:t>
+            </a:r>
+          </a:p>
+        </p:txBody>
+      </p:sp>
+      <p:sp>
+        <p:nvSpPr>
+          <p:cNvPr id="7" name="Rounded Rectangle 6"/>
+          <p:cNvSpPr/>
+          <p:nvPr/>
+        </p:nvSpPr>
+        <p:spPr>
+          <a:xfrm>
+            <a:off x="3291839" y="4297680"/>
+            <a:ext cx="1874519" cy="731520"/>
+          </a:xfrm>
+          <a:prstGeom prst="roundRect">
+            <a:avLst/>
+          </a:prstGeom>
+          <a:solidFill>
+            <a:srgbClr val="182541"/>
+          </a:solidFill>
+          <a:ln w="12700">
+            <a:solidFill>
+              <a:srgbClr val="06B6D4"/>
+            </a:solidFill>
+          </a:ln>
+        </p:spPr>
+        <p:style>
+          <a:lnRef idx="1">
+            <a:schemeClr val="accent1"/>
+          </a:lnRef>
+          <a:fillRef idx="3">
+            <a:schemeClr val="accent1"/>
+          </a:fillRef>
+          <a:effectRef idx="2">
+            <a:schemeClr val="accent1"/>
+          </a:effectRef>
+          <a:fontRef idx="minor">
+            <a:schemeClr val="lt1"/>
+          </a:fontRef>
+        </p:style>
+        <p:txBody>
+          <a:bodyPr rtlCol="0" anchor="ctr" wrap="square" tIns="109728"/>
+          <a:lstStyle/>
+          <a:p>
+            <a:pPr algn="ctr">
+              <a:defRPr sz="1200" b="1">
+                <a:solidFill>
+                  <a:srgbClr val="F1F5F9"/>
+                </a:solidFill>
+              </a:defRPr>
+            </a:pPr>
+            <a:r>
+              <a:t>Romeo Monfroglio</a:t>
+            </a:r>
+          </a:p>
+        </p:txBody>
+      </p:sp>
+      <p:sp>
+        <p:nvSpPr>
+          <p:cNvPr id="8" name="Rounded Rectangle 7"/>
+          <p:cNvSpPr/>
+          <p:nvPr/>
+        </p:nvSpPr>
+        <p:spPr>
+          <a:xfrm>
+            <a:off x="5257800" y="4297680"/>
+            <a:ext cx="1874519" cy="731520"/>
+          </a:xfrm>
+          <a:prstGeom prst="roundRect">
+            <a:avLst/>
+          </a:prstGeom>
+          <a:solidFill>
+            <a:srgbClr val="182541"/>
+          </a:solidFill>
+          <a:ln w="12700">
+            <a:solidFill>
+              <a:srgbClr val="06B6D4"/>
+            </a:solidFill>
+          </a:ln>
+        </p:spPr>
+        <p:style>
+          <a:lnRef idx="1">
+            <a:schemeClr val="accent1"/>
+          </a:lnRef>
+          <a:fillRef idx="3">
+            <a:schemeClr val="accent1"/>
+          </a:fillRef>
+          <a:effectRef idx="2">
+            <a:schemeClr val="accent1"/>
+          </a:effectRef>
+          <a:fontRef idx="minor">
+            <a:schemeClr val="lt1"/>
+          </a:fontRef>
+        </p:style>
+        <p:txBody>
+          <a:bodyPr rtlCol="0" anchor="ctr" wrap="square" tIns="109728"/>
+          <a:lstStyle/>
+          <a:p>
+            <a:pPr algn="ctr">
+              <a:defRPr sz="1200" b="1">
+                <a:solidFill>
+                  <a:srgbClr val="F1F5F9"/>
+                </a:solidFill>
+              </a:defRPr>
+            </a:pPr>
+            <a:r>
+              <a:t>Valentino Laure</a:t>
+            </a:r>
+          </a:p>
+        </p:txBody>
+      </p:sp>
+      <p:sp>
+        <p:nvSpPr>
+          <p:cNvPr id="9" name="Rounded Rectangle 8"/>
+          <p:cNvSpPr/>
+          <p:nvPr/>
+        </p:nvSpPr>
+        <p:spPr>
+          <a:xfrm>
+            <a:off x="7223759" y="4297680"/>
+            <a:ext cx="1874519" cy="731520"/>
+          </a:xfrm>
+          <a:prstGeom prst="roundRect">
+            <a:avLst/>
+          </a:prstGeom>
+          <a:solidFill>
+            <a:srgbClr val="182541"/>
+          </a:solidFill>
+          <a:ln w="12700">
+            <a:solidFill>
+              <a:srgbClr val="06B6D4"/>
+            </a:solidFill>
+          </a:ln>
+        </p:spPr>
+        <p:style>
+          <a:lnRef idx="1">
+            <a:schemeClr val="accent1"/>
+          </a:lnRef>
+          <a:fillRef idx="3">
+            <a:schemeClr val="accent1"/>
+          </a:fillRef>
+          <a:effectRef idx="2">
+            <a:schemeClr val="accent1"/>
+          </a:effectRef>
+          <a:fontRef idx="minor">
+            <a:schemeClr val="lt1"/>
+          </a:fontRef>
+        </p:style>
+        <p:txBody>
+          <a:bodyPr rtlCol="0" anchor="ctr" wrap="square" tIns="109728"/>
+          <a:lstStyle/>
+          <a:p>
+            <a:pPr algn="ctr">
+              <a:defRPr sz="1200" b="1">
+                <a:solidFill>
+                  <a:srgbClr val="F1F5F9"/>
+                </a:solidFill>
+              </a:defRPr>
+            </a:pPr>
+            <a:r>
+              <a:t>Joaquín Caputto</a:t>
+            </a:r>
+          </a:p>
+        </p:txBody>
+      </p:sp>
+      <p:sp>
+        <p:nvSpPr>
+          <p:cNvPr id="10" name="Rounded Rectangle 9"/>
+          <p:cNvSpPr/>
+          <p:nvPr/>
+        </p:nvSpPr>
+        <p:spPr>
+          <a:xfrm>
+            <a:off x="9189719" y="4297680"/>
+            <a:ext cx="1874519" cy="731520"/>
+          </a:xfrm>
+          <a:prstGeom prst="roundRect">
+            <a:avLst/>
+          </a:prstGeom>
+          <a:solidFill>
+            <a:srgbClr val="182541"/>
+          </a:solidFill>
+          <a:ln w="12700">
+            <a:solidFill>
+              <a:srgbClr val="06B6D4"/>
+            </a:solidFill>
+          </a:ln>
+        </p:spPr>
+        <p:style>
+          <a:lnRef idx="1">
+            <a:schemeClr val="accent1"/>
+          </a:lnRef>
+          <a:fillRef idx="3">
+            <a:schemeClr val="accent1"/>
+          </a:fillRef>
+          <a:effectRef idx="2">
+            <a:schemeClr val="accent1"/>
+          </a:effectRef>
+          <a:fontRef idx="minor">
+            <a:schemeClr val="lt1"/>
+          </a:fontRef>
+        </p:style>
+        <p:txBody>
+          <a:bodyPr rtlCol="0" anchor="ctr" wrap="square" tIns="109728"/>
+          <a:lstStyle/>
+          <a:p>
+            <a:pPr algn="ctr">
+              <a:defRPr sz="1200" b="1">
+                <a:solidFill>
+                  <a:srgbClr val="F1F5F9"/>
+                </a:solidFill>
+              </a:defRPr>
+            </a:pPr>
+            <a:r>
+              <a:t>Mauro Lista</a:t>
             </a:r>
           </a:p>
         </p:txBody>
@@ -3405,8 +3647,8 @@
         </p:nvSpPr>
         <p:spPr>
           <a:xfrm>
-            <a:off x="731520" y="365760"/>
-            <a:ext cx="2926080" cy="365760"/>
+            <a:off x="731520" y="384048"/>
+            <a:ext cx="3108960" cy="320040"/>
           </a:xfrm>
           <a:prstGeom prst="roundRect">
             <a:avLst/>
@@ -3435,32 +3677,136 @@
           </a:fontRef>
         </p:style>
         <p:txBody>
-          <a:bodyPr rtlCol="0" anchor="ctr" wrap="square"/>
+          <a:bodyPr rtlCol="0" anchor="ctr"/>
           <a:lstStyle/>
           <a:p>
             <a:pPr algn="ctr">
-              <a:defRPr sz="1050" b="1">
+              <a:defRPr sz="1000" b="1">
                 <a:solidFill>
                   <a:srgbClr val="8B5CF6"/>
                 </a:solidFill>
               </a:defRPr>
             </a:pPr>
             <a:r>
-              <a:t>ORADOR 4</a:t>
-            </a:r>
-          </a:p>
-        </p:txBody>
-      </p:sp>
-      <p:sp>
-        <p:nvSpPr>
-          <p:cNvPr id="4" name="Rounded Rectangle 3"/>
+              <a:t>PUESTO #6 — PRINCIPIO 'CONCEPTOS &gt; CÓDIGO'</a:t>
+            </a:r>
+          </a:p>
+        </p:txBody>
+      </p:sp>
+      <p:sp>
+        <p:nvSpPr>
+          <p:cNvPr id="4" name="TextBox 3"/>
+          <p:cNvSpPr txBox="1"/>
+          <p:nvPr/>
+        </p:nvSpPr>
+        <p:spPr>
+          <a:xfrm>
+            <a:off x="731520" y="749808"/>
+            <a:ext cx="10698480" cy="685800"/>
+          </a:xfrm>
+          <a:prstGeom prst="rect">
+            <a:avLst/>
+          </a:prstGeom>
+          <a:noFill/>
+        </p:spPr>
+        <p:txBody>
+          <a:bodyPr wrap="square">
+            <a:spAutoFit/>
+          </a:bodyPr>
+          <a:lstStyle/>
+          <a:p>
+            <a:pPr>
+              <a:defRPr sz="2200" b="1">
+                <a:solidFill>
+                  <a:srgbClr val="F1F5F9"/>
+                </a:solidFill>
+              </a:defRPr>
+            </a:pPr>
+            <a:r>
+              <a:t>A06: Diseño Inseguro (Insecure Design)</a:t>
+            </a:r>
+          </a:p>
+        </p:txBody>
+      </p:sp>
+      <p:sp>
+        <p:nvSpPr>
+          <p:cNvPr id="5" name="Rounded Rectangle 4"/>
           <p:cNvSpPr/>
           <p:nvPr/>
         </p:nvSpPr>
         <p:spPr>
           <a:xfrm>
-            <a:off x="3840480" y="365760"/>
-            <a:ext cx="3200400" cy="365760"/>
+            <a:off x="731520" y="1645920"/>
+            <a:ext cx="10698480" cy="1188720"/>
+          </a:xfrm>
+          <a:prstGeom prst="roundRect">
+            <a:avLst/>
+          </a:prstGeom>
+          <a:solidFill>
+            <a:srgbClr val="182541"/>
+          </a:solidFill>
+          <a:ln w="12700">
+            <a:solidFill>
+              <a:srgbClr val="8B5CF6"/>
+            </a:solidFill>
+          </a:ln>
+        </p:spPr>
+        <p:style>
+          <a:lnRef idx="1">
+            <a:schemeClr val="accent1"/>
+          </a:lnRef>
+          <a:fillRef idx="3">
+            <a:schemeClr val="accent1"/>
+          </a:fillRef>
+          <a:effectRef idx="2">
+            <a:schemeClr val="accent1"/>
+          </a:effectRef>
+          <a:fontRef idx="minor">
+            <a:schemeClr val="lt1"/>
+          </a:fontRef>
+        </p:style>
+        <p:txBody>
+          <a:bodyPr rtlCol="0" anchor="ctr" lIns="365760" tIns="182880"/>
+          <a:lstStyle/>
+          <a:p>
+            <a:pPr algn="ctr">
+              <a:defRPr sz="1600" b="1">
+                <a:solidFill>
+                  <a:srgbClr val="F1F5F9"/>
+                </a:solidFill>
+              </a:defRPr>
+            </a:pPr>
+            <a:r>
+              <a:t>«Un diseño inseguro no se soluciona con una implementación perfecta de código.»</a:t>
+            </a:r>
+          </a:p>
+          <a:p>
+            <a:pPr>
+              <a:spcBef>
+                <a:spcPts val="400"/>
+              </a:spcBef>
+              <a:defRPr sz="1100">
+                <a:solidFill>
+                  <a:srgbClr val="06B6D4"/>
+                </a:solidFill>
+              </a:defRPr>
+            </a:pPr>
+            <a:r>
+              <a:t>Si los controles de seguridad nunca fueron concebidos en la arquitectura, la ausencia de bugs no evitará el ataque.</a:t>
+            </a:r>
+          </a:p>
+        </p:txBody>
+      </p:sp>
+      <p:sp>
+        <p:nvSpPr>
+          <p:cNvPr id="6" name="Rounded Rectangle 5"/>
+          <p:cNvSpPr/>
+          <p:nvPr/>
+        </p:nvSpPr>
+        <p:spPr>
+          <a:xfrm>
+            <a:off x="731520" y="3108960"/>
+            <a:ext cx="5212080" cy="3017520"/>
           </a:xfrm>
           <a:prstGeom prst="roundRect">
             <a:avLst/>
@@ -3468,7 +3814,7 @@
           <a:solidFill>
             <a:srgbClr val="131D33"/>
           </a:solidFill>
-          <a:ln w="12700">
+          <a:ln>
             <a:solidFill>
               <a:srgbClr val="24324D"/>
             </a:solidFill>
@@ -3489,67 +3835,83 @@
           </a:fontRef>
         </p:style>
         <p:txBody>
-          <a:bodyPr rtlCol="0" anchor="ctr"/>
+          <a:bodyPr rtlCol="0" anchor="ctr" lIns="274320" tIns="228600"/>
           <a:lstStyle/>
           <a:p>
             <a:pPr algn="ctr">
-              <a:defRPr sz="1000" b="1">
-                <a:solidFill>
-                  <a:srgbClr val="94A3B8"/>
-                </a:solidFill>
-              </a:defRPr>
-            </a:pPr>
-            <a:r>
-              <a:t>PUESTO #6 EN OWASP 2025</a:t>
-            </a:r>
-          </a:p>
-        </p:txBody>
-      </p:sp>
-      <p:sp>
-        <p:nvSpPr>
-          <p:cNvPr id="5" name="TextBox 4"/>
-          <p:cNvSpPr txBox="1"/>
+              <a:spcAft>
+                <a:spcPts val="800"/>
+              </a:spcAft>
+              <a:defRPr sz="1300" b="1">
+                <a:solidFill>
+                  <a:srgbClr val="F59E0B"/>
+                </a:solidFill>
+              </a:defRPr>
+            </a:pPr>
+            <a:r>
+              <a:t>Ejemplo Real: Lógica de Reserva en Cines</a:t>
+            </a:r>
+          </a:p>
+          <a:p>
+            <a:pPr>
+              <a:defRPr sz="1100">
+                <a:solidFill>
+                  <a:srgbClr val="CBD5E1"/>
+                </a:solidFill>
+              </a:defRPr>
+            </a:pPr>
+            <a:r>
+              <a:t>• Descuento grupal habilitado a partir de 15 personas.</a:t>
+            </a:r>
+          </a:p>
+          <a:p>
+            <a:pPr>
+              <a:defRPr sz="1100">
+                <a:solidFill>
+                  <a:srgbClr val="CBD5E1"/>
+                </a:solidFill>
+              </a:defRPr>
+            </a:pPr>
+            <a:r>
+              <a:t>• Un atacante reserva 600 asientos en todas las funciones con pocas peticiones legítimas.</a:t>
+            </a:r>
+          </a:p>
+          <a:p>
+            <a:pPr>
+              <a:defRPr sz="1100">
+                <a:solidFill>
+                  <a:srgbClr val="CBD5E1"/>
+                </a:solidFill>
+              </a:defRPr>
+            </a:pPr>
+            <a:r>
+              <a:t>• Provoca una pérdida millonaria al bloquear ventas genuinas.</a:t>
+            </a:r>
+          </a:p>
+          <a:p>
+            <a:pPr>
+              <a:defRPr sz="1100">
+                <a:solidFill>
+                  <a:srgbClr val="CBD5E1"/>
+                </a:solidFill>
+              </a:defRPr>
+            </a:pPr>
+            <a:r>
+              <a:t>• La implementación técnica no tenía ningún bug de código; la falla fue puramente de diseño del negocio.</a:t>
+            </a:r>
+          </a:p>
+        </p:txBody>
+      </p:sp>
+      <p:sp>
+        <p:nvSpPr>
+          <p:cNvPr id="7" name="Rounded Rectangle 6"/>
+          <p:cNvSpPr/>
           <p:nvPr/>
         </p:nvSpPr>
         <p:spPr>
           <a:xfrm>
-            <a:off x="731520" y="777240"/>
-            <a:ext cx="10698480" cy="731520"/>
-          </a:xfrm>
-          <a:prstGeom prst="rect">
-            <a:avLst/>
-          </a:prstGeom>
-          <a:noFill/>
-        </p:spPr>
-        <p:txBody>
-          <a:bodyPr wrap="square">
-            <a:spAutoFit/>
-          </a:bodyPr>
-          <a:lstStyle/>
-          <a:p>
-            <a:pPr>
-              <a:defRPr sz="2400" b="1">
-                <a:solidFill>
-                  <a:srgbClr val="F1F5F9"/>
-                </a:solidFill>
-              </a:defRPr>
-            </a:pPr>
-            <a:r>
-              <a:t>A06: Diseño Inseguro (Insecure Design)</a:t>
-            </a:r>
-          </a:p>
-        </p:txBody>
-      </p:sp>
-      <p:sp>
-        <p:nvSpPr>
-          <p:cNvPr id="6" name="Rounded Rectangle 5"/>
-          <p:cNvSpPr/>
-          <p:nvPr/>
-        </p:nvSpPr>
-        <p:spPr>
-          <a:xfrm>
-            <a:off x="731520" y="1645920"/>
-            <a:ext cx="3383280" cy="4572000"/>
+            <a:off x="6217920" y="3108960"/>
+            <a:ext cx="5212080" cy="3017520"/>
           </a:xfrm>
           <a:prstGeom prst="roundRect">
             <a:avLst/>
@@ -3557,7 +3919,7 @@
           <a:solidFill>
             <a:srgbClr val="131D33"/>
           </a:solidFill>
-          <a:ln w="12700">
+          <a:ln>
             <a:solidFill>
               <a:srgbClr val="24324D"/>
             </a:solidFill>
@@ -3578,360 +3940,69 @@
           </a:fontRef>
         </p:style>
         <p:txBody>
-          <a:bodyPr rtlCol="0" anchor="ctr" wrap="square" lIns="228600" rIns="228600" tIns="201168" bIns="201168"/>
+          <a:bodyPr rtlCol="0" anchor="ctr" lIns="274320" tIns="228600"/>
           <a:lstStyle/>
           <a:p>
             <a:pPr algn="ctr">
               <a:spcAft>
                 <a:spcPts val="800"/>
               </a:spcAft>
-              <a:defRPr sz="1500" b="1">
-                <a:solidFill>
-                  <a:srgbClr val="8B5CF6"/>
-                </a:solidFill>
-              </a:defRPr>
-            </a:pPr>
-            <a:r>
-              <a:t>Diseño vs. Implementación</a:t>
-            </a:r>
-          </a:p>
-          <a:p>
-            <a:pPr>
-              <a:spcAft>
-                <a:spcPts val="800"/>
-              </a:spcAft>
-              <a:defRPr sz="950" b="1">
-                <a:solidFill>
-                  <a:srgbClr val="94A3B8"/>
-                </a:solidFill>
-              </a:defRPr>
-            </a:pPr>
-            <a:r>
-              <a:t>[Conceptos &gt; Código]</a:t>
-            </a:r>
-          </a:p>
-          <a:p>
-            <a:pPr>
-              <a:spcAft>
-                <a:spcPts val="600"/>
-              </a:spcAft>
-              <a:defRPr sz="1200">
+              <a:defRPr sz="1300" b="1">
+                <a:solidFill>
+                  <a:srgbClr val="10B981"/>
+                </a:solidFill>
+              </a:defRPr>
+            </a:pPr>
+            <a:r>
+              <a:t>Estrategias de Diseño Seguro</a:t>
+            </a:r>
+          </a:p>
+          <a:p>
+            <a:pPr>
+              <a:defRPr sz="1100">
                 <a:solidFill>
                   <a:srgbClr val="CBD5E1"/>
                 </a:solidFill>
               </a:defRPr>
             </a:pPr>
             <a:r>
-              <a:t>• Principio clave de OWASP: Separar el diseño de la implementación.</a:t>
-            </a:r>
-          </a:p>
-          <a:p>
-            <a:pPr>
-              <a:spcAft>
-                <a:spcPts val="600"/>
-              </a:spcAft>
-              <a:defRPr sz="1200">
+              <a:t>• Modelado de Amenazas (Threat Modeling) previo al inicio de desarrollo.</a:t>
+            </a:r>
+          </a:p>
+          <a:p>
+            <a:pPr>
+              <a:defRPr sz="1100">
                 <a:solidFill>
                   <a:srgbClr val="CBD5E1"/>
                 </a:solidFill>
               </a:defRPr>
             </a:pPr>
             <a:r>
-              <a:t>• Un diseño inseguro no se soluciona con una implementación perfecta.</a:t>
-            </a:r>
-          </a:p>
-          <a:p>
-            <a:pPr>
-              <a:spcAft>
-                <a:spcPts val="600"/>
-              </a:spcAft>
-              <a:defRPr sz="1200">
+              <a:t>• Definición explícita de Casos de Abuso (Abuse Cases) junto a las historias de usuario.</a:t>
+            </a:r>
+          </a:p>
+          <a:p>
+            <a:pPr>
+              <a:defRPr sz="1100">
                 <a:solidFill>
                   <a:srgbClr val="CBD5E1"/>
                 </a:solidFill>
               </a:defRPr>
             </a:pPr>
             <a:r>
-              <a:t>• Si los controles no fueron concebidos desde la arquitectura, el código fallará.</a:t>
-            </a:r>
-          </a:p>
-          <a:p>
-            <a:pPr>
-              <a:spcAft>
-                <a:spcPts val="600"/>
-              </a:spcAft>
-              <a:defRPr sz="1200">
+              <a:t>• Límites de tasa de negocio (Rate Limiting en reservas, no solo en endpoints).</a:t>
+            </a:r>
+          </a:p>
+          <a:p>
+            <a:pPr>
+              <a:defRPr sz="1100">
                 <a:solidFill>
                   <a:srgbClr val="CBD5E1"/>
                 </a:solidFill>
               </a:defRPr>
             </a:pPr>
             <a:r>
-              <a:t>• Diferencia: Un bug es un error de código; una falla de diseño es una ausencia de lógica.</a:t>
-            </a:r>
-          </a:p>
-        </p:txBody>
-      </p:sp>
-      <p:sp>
-        <p:nvSpPr>
-          <p:cNvPr id="7" name="Rounded Rectangle 6"/>
-          <p:cNvSpPr/>
-          <p:nvPr/>
-        </p:nvSpPr>
-        <p:spPr>
-          <a:xfrm>
-            <a:off x="4389120" y="1645920"/>
-            <a:ext cx="3383280" cy="4572000"/>
-          </a:xfrm>
-          <a:prstGeom prst="roundRect">
-            <a:avLst/>
-          </a:prstGeom>
-          <a:solidFill>
-            <a:srgbClr val="131D33"/>
-          </a:solidFill>
-          <a:ln w="12700">
-            <a:solidFill>
-              <a:srgbClr val="24324D"/>
-            </a:solidFill>
-          </a:ln>
-        </p:spPr>
-        <p:style>
-          <a:lnRef idx="1">
-            <a:schemeClr val="accent1"/>
-          </a:lnRef>
-          <a:fillRef idx="3">
-            <a:schemeClr val="accent1"/>
-          </a:fillRef>
-          <a:effectRef idx="2">
-            <a:schemeClr val="accent1"/>
-          </a:effectRef>
-          <a:fontRef idx="minor">
-            <a:schemeClr val="lt1"/>
-          </a:fontRef>
-        </p:style>
-        <p:txBody>
-          <a:bodyPr rtlCol="0" anchor="ctr" wrap="square" lIns="228600" rIns="228600" tIns="201168" bIns="201168"/>
-          <a:lstStyle/>
-          <a:p>
-            <a:pPr algn="ctr">
-              <a:spcAft>
-                <a:spcPts val="800"/>
-              </a:spcAft>
-              <a:defRPr sz="1500" b="1">
-                <a:solidFill>
-                  <a:srgbClr val="EF4444"/>
-                </a:solidFill>
-              </a:defRPr>
-            </a:pPr>
-            <a:r>
-              <a:t>Ejemplo Real: Lógica de Negocio</a:t>
-            </a:r>
-          </a:p>
-          <a:p>
-            <a:pPr>
-              <a:spcAft>
-                <a:spcPts val="800"/>
-              </a:spcAft>
-              <a:defRPr sz="950" b="1">
-                <a:solidFill>
-                  <a:srgbClr val="94A3B8"/>
-                </a:solidFill>
-              </a:defRPr>
-            </a:pPr>
-            <a:r>
-              <a:t>[Falla de Lógica]</a:t>
-            </a:r>
-          </a:p>
-          <a:p>
-            <a:pPr>
-              <a:spcAft>
-                <a:spcPts val="600"/>
-              </a:spcAft>
-              <a:defRPr sz="1200">
-                <a:solidFill>
-                  <a:srgbClr val="CBD5E1"/>
-                </a:solidFill>
-              </a:defRPr>
-            </a:pPr>
-            <a:r>
-              <a:t>• Caso del sistema de cine: descuentos grupales a partir de 15 personas.</a:t>
-            </a:r>
-          </a:p>
-          <a:p>
-            <a:pPr>
-              <a:spcAft>
-                <a:spcPts val="600"/>
-              </a:spcAft>
-              <a:defRPr sz="1200">
-                <a:solidFill>
-                  <a:srgbClr val="CBD5E1"/>
-                </a:solidFill>
-              </a:defRPr>
-            </a:pPr>
-            <a:r>
-              <a:t>• Atacante reserva 600 asientos en todas las salas con pocas peticiones.</a:t>
-            </a:r>
-          </a:p>
-          <a:p>
-            <a:pPr>
-              <a:spcAft>
-                <a:spcPts val="600"/>
-              </a:spcAft>
-              <a:defRPr sz="1200">
-                <a:solidFill>
-                  <a:srgbClr val="CBD5E1"/>
-                </a:solidFill>
-              </a:defRPr>
-            </a:pPr>
-            <a:r>
-              <a:t>• Causa un daño financiero inmenso sin romper ninguna validación técnica de código.</a:t>
-            </a:r>
-          </a:p>
-          <a:p>
-            <a:pPr>
-              <a:spcAft>
-                <a:spcPts val="600"/>
-              </a:spcAft>
-              <a:defRPr sz="1200">
-                <a:solidFill>
-                  <a:srgbClr val="CBD5E1"/>
-                </a:solidFill>
-              </a:defRPr>
-            </a:pPr>
-            <a:r>
-              <a:t>• Falla de diseño: no contemplar límites de tasa o retención temporal por usuario.</a:t>
-            </a:r>
-          </a:p>
-        </p:txBody>
-      </p:sp>
-      <p:sp>
-        <p:nvSpPr>
-          <p:cNvPr id="8" name="Rounded Rectangle 7"/>
-          <p:cNvSpPr/>
-          <p:nvPr/>
-        </p:nvSpPr>
-        <p:spPr>
-          <a:xfrm>
-            <a:off x="8046720" y="1645920"/>
-            <a:ext cx="3383280" cy="4572000"/>
-          </a:xfrm>
-          <a:prstGeom prst="roundRect">
-            <a:avLst/>
-          </a:prstGeom>
-          <a:solidFill>
-            <a:srgbClr val="131D33"/>
-          </a:solidFill>
-          <a:ln w="12700">
-            <a:solidFill>
-              <a:srgbClr val="24324D"/>
-            </a:solidFill>
-          </a:ln>
-        </p:spPr>
-        <p:style>
-          <a:lnRef idx="1">
-            <a:schemeClr val="accent1"/>
-          </a:lnRef>
-          <a:fillRef idx="3">
-            <a:schemeClr val="accent1"/>
-          </a:fillRef>
-          <a:effectRef idx="2">
-            <a:schemeClr val="accent1"/>
-          </a:effectRef>
-          <a:fontRef idx="minor">
-            <a:schemeClr val="lt1"/>
-          </a:fontRef>
-        </p:style>
-        <p:txBody>
-          <a:bodyPr rtlCol="0" anchor="ctr" wrap="square" lIns="228600" rIns="228600" tIns="201168" bIns="201168"/>
-          <a:lstStyle/>
-          <a:p>
-            <a:pPr algn="ctr">
-              <a:spcAft>
-                <a:spcPts val="800"/>
-              </a:spcAft>
-              <a:defRPr sz="1500" b="1">
-                <a:solidFill>
-                  <a:srgbClr val="10B981"/>
-                </a:solidFill>
-              </a:defRPr>
-            </a:pPr>
-            <a:r>
-              <a:t>Enfoque Preventivo</a:t>
-            </a:r>
-          </a:p>
-          <a:p>
-            <a:pPr>
-              <a:spcAft>
-                <a:spcPts val="800"/>
-              </a:spcAft>
-              <a:defRPr sz="950" b="1">
-                <a:solidFill>
-                  <a:srgbClr val="94A3B8"/>
-                </a:solidFill>
-              </a:defRPr>
-            </a:pPr>
-            <a:r>
-              <a:t>[Arquitectura Segura]</a:t>
-            </a:r>
-          </a:p>
-          <a:p>
-            <a:pPr>
-              <a:spcAft>
-                <a:spcPts val="600"/>
-              </a:spcAft>
-              <a:defRPr sz="1200">
-                <a:solidFill>
-                  <a:srgbClr val="CBD5E1"/>
-                </a:solidFill>
-              </a:defRPr>
-            </a:pPr>
-            <a:r>
-              <a:t>• Modelado de Amenazas (Threat Modeling) en las fases tempranas del ciclo.</a:t>
-            </a:r>
-          </a:p>
-          <a:p>
-            <a:pPr>
-              <a:spcAft>
-                <a:spcPts val="600"/>
-              </a:spcAft>
-              <a:defRPr sz="1200">
-                <a:solidFill>
-                  <a:srgbClr val="CBD5E1"/>
-                </a:solidFill>
-              </a:defRPr>
-            </a:pPr>
-            <a:r>
-              <a:t>• Requerimientos de seguridad explícitos en las historias de usuario.</a:t>
-            </a:r>
-          </a:p>
-          <a:p>
-            <a:pPr>
-              <a:spcAft>
-                <a:spcPts val="600"/>
-              </a:spcAft>
-              <a:defRPr sz="1200">
-                <a:solidFill>
-                  <a:srgbClr val="CBD5E1"/>
-                </a:solidFill>
-              </a:defRPr>
-            </a:pPr>
-            <a:r>
-              <a:t>• Diseño de casos de abuso (Abuse Cases) junto a los casos de uso habituales.</a:t>
-            </a:r>
-          </a:p>
-          <a:p>
-            <a:pPr>
-              <a:spcAft>
-                <a:spcPts val="600"/>
-              </a:spcAft>
-              <a:defRPr sz="1200">
-                <a:solidFill>
-                  <a:srgbClr val="CBD5E1"/>
-                </a:solidFill>
-              </a:defRPr>
-            </a:pPr>
-            <a:r>
-              <a:t>• Implementación del marco de madurez OWASP SAMM.</a:t>
+              <a:t>• Adopción del modelo de madurez de software seguro OWASP SAMM.</a:t>
             </a:r>
           </a:p>
         </p:txBody>
@@ -4005,8 +4076,8 @@
         </p:nvSpPr>
         <p:spPr>
           <a:xfrm>
-            <a:off x="731520" y="365760"/>
-            <a:ext cx="2926080" cy="365760"/>
+            <a:off x="731520" y="384048"/>
+            <a:ext cx="3108960" cy="320040"/>
           </a:xfrm>
           <a:prstGeom prst="roundRect">
             <a:avLst/>
@@ -4035,32 +4106,67 @@
           </a:fontRef>
         </p:style>
         <p:txBody>
-          <a:bodyPr rtlCol="0" anchor="ctr" wrap="square"/>
+          <a:bodyPr rtlCol="0" anchor="ctr"/>
           <a:lstStyle/>
           <a:p>
             <a:pPr algn="ctr">
-              <a:defRPr sz="1050" b="1">
+              <a:defRPr sz="1000" b="1">
                 <a:solidFill>
                   <a:srgbClr val="10B981"/>
                 </a:solidFill>
               </a:defRPr>
             </a:pPr>
             <a:r>
-              <a:t>ORADOR 5</a:t>
-            </a:r>
-          </a:p>
-        </p:txBody>
-      </p:sp>
-      <p:sp>
-        <p:nvSpPr>
-          <p:cNvPr id="4" name="Rounded Rectangle 3"/>
+              <a:t>PUESTOS #7 Y #8</a:t>
+            </a:r>
+          </a:p>
+        </p:txBody>
+      </p:sp>
+      <p:sp>
+        <p:nvSpPr>
+          <p:cNvPr id="4" name="TextBox 3"/>
+          <p:cNvSpPr txBox="1"/>
+          <p:nvPr/>
+        </p:nvSpPr>
+        <p:spPr>
+          <a:xfrm>
+            <a:off x="731520" y="749808"/>
+            <a:ext cx="10698480" cy="685800"/>
+          </a:xfrm>
+          <a:prstGeom prst="rect">
+            <a:avLst/>
+          </a:prstGeom>
+          <a:noFill/>
+        </p:spPr>
+        <p:txBody>
+          <a:bodyPr wrap="square">
+            <a:spAutoFit/>
+          </a:bodyPr>
+          <a:lstStyle/>
+          <a:p>
+            <a:pPr>
+              <a:defRPr sz="2200" b="1">
+                <a:solidFill>
+                  <a:srgbClr val="F1F5F9"/>
+                </a:solidFill>
+              </a:defRPr>
+            </a:pPr>
+            <a:r>
+              <a:t>A07: Autenticación &amp; A08: Integridad de Software y Datos</a:t>
+            </a:r>
+          </a:p>
+        </p:txBody>
+      </p:sp>
+      <p:sp>
+        <p:nvSpPr>
+          <p:cNvPr id="5" name="Rounded Rectangle 4"/>
           <p:cNvSpPr/>
           <p:nvPr/>
         </p:nvSpPr>
         <p:spPr>
           <a:xfrm>
-            <a:off x="3840480" y="365760"/>
-            <a:ext cx="3200400" cy="365760"/>
+            <a:off x="731520" y="1645920"/>
+            <a:ext cx="5212080" cy="4480560"/>
           </a:xfrm>
           <a:prstGeom prst="roundRect">
             <a:avLst/>
@@ -4068,7 +4174,7 @@
           <a:solidFill>
             <a:srgbClr val="131D33"/>
           </a:solidFill>
-          <a:ln w="12700">
+          <a:ln>
             <a:solidFill>
               <a:srgbClr val="24324D"/>
             </a:solidFill>
@@ -4089,53 +4195,96 @@
           </a:fontRef>
         </p:style>
         <p:txBody>
-          <a:bodyPr rtlCol="0" anchor="ctr"/>
+          <a:bodyPr rtlCol="0" anchor="ctr" lIns="274320" tIns="228600"/>
           <a:lstStyle/>
           <a:p>
             <a:pPr algn="ctr">
-              <a:defRPr sz="1000" b="1">
-                <a:solidFill>
-                  <a:srgbClr val="94A3B8"/>
-                </a:solidFill>
-              </a:defRPr>
-            </a:pPr>
-            <a:r>
-              <a:t>PUESTOS #7 Y #8</a:t>
-            </a:r>
-          </a:p>
-        </p:txBody>
-      </p:sp>
-      <p:sp>
-        <p:nvSpPr>
-          <p:cNvPr id="5" name="TextBox 4"/>
-          <p:cNvSpPr txBox="1"/>
-          <p:nvPr/>
-        </p:nvSpPr>
-        <p:spPr>
-          <a:xfrm>
-            <a:off x="731520" y="777240"/>
-            <a:ext cx="10698480" cy="731520"/>
-          </a:xfrm>
-          <a:prstGeom prst="rect">
-            <a:avLst/>
-          </a:prstGeom>
-          <a:noFill/>
-        </p:spPr>
-        <p:txBody>
-          <a:bodyPr wrap="square">
-            <a:spAutoFit/>
-          </a:bodyPr>
-          <a:lstStyle/>
-          <a:p>
-            <a:pPr>
-              <a:defRPr sz="2400" b="1">
-                <a:solidFill>
-                  <a:srgbClr val="F1F5F9"/>
-                </a:solidFill>
-              </a:defRPr>
-            </a:pPr>
-            <a:r>
-              <a:t>A07: Autenticación &amp; A08: Integridad de Software</a:t>
+              <a:spcAft>
+                <a:spcPts val="1000"/>
+              </a:spcAft>
+              <a:defRPr sz="1300" b="1">
+                <a:solidFill>
+                  <a:srgbClr val="F59E0B"/>
+                </a:solidFill>
+              </a:defRPr>
+            </a:pPr>
+            <a:r>
+              <a:t>A07: FALLAS DE AUTENTICACIÓN</a:t>
+            </a:r>
+          </a:p>
+          <a:p>
+            <a:pPr>
+              <a:spcAft>
+                <a:spcPts val="800"/>
+              </a:spcAft>
+              <a:defRPr sz="1100">
+                <a:solidFill>
+                  <a:srgbClr val="CBD5E1"/>
+                </a:solidFill>
+              </a:defRPr>
+            </a:pPr>
+            <a:r>
+              <a:t>• 36 grupos de debilidades asociadas en el reporte 2025.</a:t>
+            </a:r>
+          </a:p>
+          <a:p>
+            <a:pPr>
+              <a:spcAft>
+                <a:spcPts val="800"/>
+              </a:spcAft>
+              <a:defRPr sz="1100">
+                <a:solidFill>
+                  <a:srgbClr val="CBD5E1"/>
+                </a:solidFill>
+              </a:defRPr>
+            </a:pPr>
+            <a:r>
+              <a:t>• Ataques de Fuerza Bruta y Credential Stuffing automatizados.</a:t>
+            </a:r>
+          </a:p>
+          <a:p>
+            <a:pPr>
+              <a:spcAft>
+                <a:spcPts val="800"/>
+              </a:spcAft>
+              <a:defRPr sz="1100">
+                <a:solidFill>
+                  <a:srgbClr val="CBD5E1"/>
+                </a:solidFill>
+              </a:defRPr>
+            </a:pPr>
+            <a:r>
+              <a:t>• Patrón de contraseñas predecibles: de 'Winter2025' a 'Winter2026!' tras filtraciones.</a:t>
+            </a:r>
+          </a:p>
+          <a:p>
+            <a:pPr>
+              <a:spcAft>
+                <a:spcPts val="800"/>
+              </a:spcAft>
+              <a:defRPr sz="1100">
+                <a:solidFill>
+                  <a:srgbClr val="CBD5E1"/>
+                </a:solidFill>
+              </a:defRPr>
+            </a:pPr>
+            <a:r>
+              <a:t>• Sin bloqueo progresivo, el servidor opera como un 'oráculo' que valida credenciales robadas.</a:t>
+            </a:r>
+          </a:p>
+          <a:p>
+            <a:pPr>
+              <a:spcAft>
+                <a:spcPts val="800"/>
+              </a:spcAft>
+              <a:defRPr sz="1100">
+                <a:solidFill>
+                  <a:srgbClr val="CBD5E1"/>
+                </a:solidFill>
+              </a:defRPr>
+            </a:pPr>
+            <a:r>
+              <a:t>• Mitigación: Pautas NIST 800-63b, retrasos exponenciales y MFA (Autenticación Multifactor) obligatorio.</a:t>
             </a:r>
           </a:p>
         </p:txBody>
@@ -4148,8 +4297,8 @@
         </p:nvSpPr>
         <p:spPr>
           <a:xfrm>
-            <a:off x="731520" y="1645920"/>
-            <a:ext cx="5212080" cy="4572000"/>
+            <a:off x="6217920" y="1645920"/>
+            <a:ext cx="5212080" cy="4480560"/>
           </a:xfrm>
           <a:prstGeom prst="roundRect">
             <a:avLst/>
@@ -4157,7 +4306,7 @@
           <a:solidFill>
             <a:srgbClr val="131D33"/>
           </a:solidFill>
-          <a:ln w="12700">
+          <a:ln>
             <a:solidFill>
               <a:srgbClr val="24324D"/>
             </a:solidFill>
@@ -4178,21 +4327,36 @@
           </a:fontRef>
         </p:style>
         <p:txBody>
-          <a:bodyPr rtlCol="0" anchor="ctr" wrap="square" lIns="228600" rIns="228600" tIns="201168" bIns="201168"/>
+          <a:bodyPr rtlCol="0" anchor="ctr" lIns="274320" tIns="228600"/>
           <a:lstStyle/>
           <a:p>
             <a:pPr algn="ctr">
+              <a:spcAft>
+                <a:spcPts val="1000"/>
+              </a:spcAft>
+              <a:defRPr sz="1300" b="1">
+                <a:solidFill>
+                  <a:srgbClr val="3B82F6"/>
+                </a:solidFill>
+              </a:defRPr>
+            </a:pPr>
+            <a:r>
+              <a:t>A08: INTEGRIDAD DE SOFTWARE O DATOS</a:t>
+            </a:r>
+          </a:p>
+          <a:p>
+            <a:pPr>
               <a:spcAft>
                 <a:spcPts val="800"/>
               </a:spcAft>
-              <a:defRPr sz="1500" b="1">
-                <a:solidFill>
-                  <a:srgbClr val="F59E0B"/>
-                </a:solidFill>
-              </a:defRPr>
-            </a:pPr>
-            <a:r>
-              <a:t>A07: Fallas de Autenticación</a:t>
+              <a:defRPr sz="1100">
+                <a:solidFill>
+                  <a:srgbClr val="CBD5E1"/>
+                </a:solidFill>
+              </a:defRPr>
+            </a:pPr>
+            <a:r>
+              <a:t>• Asumir que código o artefactos externos son seguros sin validación criptográfica.</a:t>
             </a:r>
           </a:p>
           <a:p>
@@ -4200,146 +4364,29 @@
               <a:spcAft>
                 <a:spcPts val="800"/>
               </a:spcAft>
-              <a:defRPr sz="950" b="1">
-                <a:solidFill>
-                  <a:srgbClr val="94A3B8"/>
-                </a:solidFill>
-              </a:defRPr>
-            </a:pPr>
-            <a:r>
-              <a:t>[Puesto #7]</a:t>
-            </a:r>
-          </a:p>
-          <a:p>
-            <a:pPr>
-              <a:spcAft>
-                <a:spcPts val="600"/>
-              </a:spcAft>
-              <a:defRPr sz="1200">
+              <a:defRPr sz="1100">
                 <a:solidFill>
                   <a:srgbClr val="CBD5E1"/>
                 </a:solidFill>
               </a:defRPr>
             </a:pPr>
             <a:r>
-              <a:t>• Ocurre cuando el sistema reconoce erróneamente a un usuario ilegítimo.</a:t>
-            </a:r>
-          </a:p>
-          <a:p>
-            <a:pPr>
-              <a:spcAft>
-                <a:spcPts val="600"/>
-              </a:spcAft>
-              <a:defRPr sz="1200">
-                <a:solidFill>
-                  <a:srgbClr val="CBD5E1"/>
-                </a:solidFill>
-              </a:defRPr>
-            </a:pPr>
-            <a:r>
-              <a:t>• Ataques típicos: Credential Stuffing y Fuerza Bruta automatizada.</a:t>
-            </a:r>
-          </a:p>
-          <a:p>
-            <a:pPr>
-              <a:spcAft>
-                <a:spcPts val="600"/>
-              </a:spcAft>
-              <a:defRPr sz="1200">
-                <a:solidFill>
-                  <a:srgbClr val="CBD5E1"/>
-                </a:solidFill>
-              </a:defRPr>
-            </a:pPr>
-            <a:r>
-              <a:t>• El problema humano: de 'Winter2025' a 'Winter2026' tras filtraciones.</a:t>
-            </a:r>
-          </a:p>
-          <a:p>
-            <a:pPr>
-              <a:spcAft>
-                <a:spcPts val="600"/>
-              </a:spcAft>
-              <a:defRPr sz="1200">
-                <a:solidFill>
-                  <a:srgbClr val="CBD5E1"/>
-                </a:solidFill>
-              </a:defRPr>
-            </a:pPr>
-            <a:r>
-              <a:t>• Sin rate limiting, el backend opera como un 'oráculo' para el botnet.</a:t>
-            </a:r>
-          </a:p>
-          <a:p>
-            <a:pPr>
-              <a:spcAft>
-                <a:spcPts val="600"/>
-              </a:spcAft>
-              <a:defRPr sz="1200">
-                <a:solidFill>
-                  <a:srgbClr val="CBD5E1"/>
-                </a:solidFill>
-              </a:defRPr>
-            </a:pPr>
-            <a:r>
-              <a:t>• Mitigación: Pautas NIST 800-63b, bloqueo por intentos y MFA obligatorio.</a:t>
-            </a:r>
-          </a:p>
-        </p:txBody>
-      </p:sp>
-      <p:sp>
-        <p:nvSpPr>
-          <p:cNvPr id="7" name="Rounded Rectangle 6"/>
-          <p:cNvSpPr/>
-          <p:nvPr/>
-        </p:nvSpPr>
-        <p:spPr>
-          <a:xfrm>
-            <a:off x="6217920" y="1645920"/>
-            <a:ext cx="5212080" cy="4572000"/>
-          </a:xfrm>
-          <a:prstGeom prst="roundRect">
-            <a:avLst/>
-          </a:prstGeom>
-          <a:solidFill>
-            <a:srgbClr val="131D33"/>
-          </a:solidFill>
-          <a:ln w="12700">
-            <a:solidFill>
-              <a:srgbClr val="24324D"/>
-            </a:solidFill>
-          </a:ln>
-        </p:spPr>
-        <p:style>
-          <a:lnRef idx="1">
-            <a:schemeClr val="accent1"/>
-          </a:lnRef>
-          <a:fillRef idx="3">
-            <a:schemeClr val="accent1"/>
-          </a:fillRef>
-          <a:effectRef idx="2">
-            <a:schemeClr val="accent1"/>
-          </a:effectRef>
-          <a:fontRef idx="minor">
-            <a:schemeClr val="lt1"/>
-          </a:fontRef>
-        </p:style>
-        <p:txBody>
-          <a:bodyPr rtlCol="0" anchor="ctr" wrap="square" lIns="228600" rIns="228600" tIns="201168" bIns="201168"/>
-          <a:lstStyle/>
-          <a:p>
-            <a:pPr algn="ctr">
+              <a:t>• Plugins o módulos importados de CDN no confiables.</a:t>
+            </a:r>
+          </a:p>
+          <a:p>
+            <a:pPr>
               <a:spcAft>
                 <a:spcPts val="800"/>
               </a:spcAft>
-              <a:defRPr sz="1500" b="1">
-                <a:solidFill>
-                  <a:srgbClr val="10B981"/>
-                </a:solidFill>
-              </a:defRPr>
-            </a:pPr>
-            <a:r>
-              <a:t>A08: Fallas de Integridad de Software y Datos</a:t>
+              <a:defRPr sz="1100">
+                <a:solidFill>
+                  <a:srgbClr val="CBD5E1"/>
+                </a:solidFill>
+              </a:defRPr>
+            </a:pPr>
+            <a:r>
+              <a:t>• Actualizaciones automáticas aplicadas sin verificar firmas digitales.</a:t>
             </a:r>
           </a:p>
           <a:p>
@@ -4347,89 +4394,29 @@
               <a:spcAft>
                 <a:spcPts val="800"/>
               </a:spcAft>
-              <a:defRPr sz="950" b="1">
-                <a:solidFill>
-                  <a:srgbClr val="94A3B8"/>
-                </a:solidFill>
-              </a:defRPr>
-            </a:pPr>
-            <a:r>
-              <a:t>[Puesto #8]</a:t>
+              <a:defRPr sz="1100">
+                <a:solidFill>
+                  <a:srgbClr val="CBD5E1"/>
+                </a:solidFill>
+              </a:defRPr>
+            </a:pPr>
+            <a:r>
+              <a:t>• Deserialización Insegura: Modificación de objetos serializados que permite ejecución de código remoto (RCE).</a:t>
             </a:r>
           </a:p>
           <a:p>
             <a:pPr>
               <a:spcAft>
-                <a:spcPts val="600"/>
+                <a:spcPts val="800"/>
               </a:spcAft>
-              <a:defRPr sz="1200">
+              <a:defRPr sz="1100">
                 <a:solidFill>
                   <a:srgbClr val="CBD5E1"/>
                 </a:solidFill>
               </a:defRPr>
             </a:pPr>
             <a:r>
-              <a:t>• Asumir que código o artefactos externos son confiables sin verificación.</a:t>
-            </a:r>
-          </a:p>
-          <a:p>
-            <a:pPr>
-              <a:spcAft>
-                <a:spcPts val="600"/>
-              </a:spcAft>
-              <a:defRPr sz="1200">
-                <a:solidFill>
-                  <a:srgbClr val="CBD5E1"/>
-                </a:solidFill>
-              </a:defRPr>
-            </a:pPr>
-            <a:r>
-              <a:t>• Pipelines que descargan módulos sin verificar firma criptográfica.</a:t>
-            </a:r>
-          </a:p>
-          <a:p>
-            <a:pPr>
-              <a:spcAft>
-                <a:spcPts val="600"/>
-              </a:spcAft>
-              <a:defRPr sz="1200">
-                <a:solidFill>
-                  <a:srgbClr val="CBD5E1"/>
-                </a:solidFill>
-              </a:defRPr>
-            </a:pPr>
-            <a:r>
-              <a:t>• Actualizaciones automáticas aplicadas a ciegas.</a:t>
-            </a:r>
-          </a:p>
-          <a:p>
-            <a:pPr>
-              <a:spcAft>
-                <a:spcPts val="600"/>
-              </a:spcAft>
-              <a:defRPr sz="1200">
-                <a:solidFill>
-                  <a:srgbClr val="CBD5E1"/>
-                </a:solidFill>
-              </a:defRPr>
-            </a:pPr>
-            <a:r>
-              <a:t>• Deserialización insegura: manipulación de objetos para ejecutar código remoto.</a:t>
-            </a:r>
-          </a:p>
-          <a:p>
-            <a:pPr>
-              <a:spcAft>
-                <a:spcPts val="600"/>
-              </a:spcAft>
-              <a:defRPr sz="1200">
-                <a:solidFill>
-                  <a:srgbClr val="CBD5E1"/>
-                </a:solidFill>
-              </a:defRPr>
-            </a:pPr>
-            <a:r>
-              <a:t>• Mitigación: Firmas digitales, repositorios espejo auditados y escáneres estáticos.</a:t>
+              <a:t>• Mitigación: Firmas digitales, verificación de hashes de integridad y escáneres estáticos de deserialización.</a:t>
             </a:r>
           </a:p>
         </p:txBody>
@@ -4503,8 +4490,8 @@
         </p:nvSpPr>
         <p:spPr>
           <a:xfrm>
-            <a:off x="731520" y="365760"/>
-            <a:ext cx="2926080" cy="365760"/>
+            <a:off x="731520" y="384048"/>
+            <a:ext cx="3108960" cy="320040"/>
           </a:xfrm>
           <a:prstGeom prst="roundRect">
             <a:avLst/>
@@ -4533,32 +4520,67 @@
           </a:fontRef>
         </p:style>
         <p:txBody>
-          <a:bodyPr rtlCol="0" anchor="ctr" wrap="square"/>
+          <a:bodyPr rtlCol="0" anchor="ctr"/>
           <a:lstStyle/>
           <a:p>
             <a:pPr algn="ctr">
-              <a:defRPr sz="1050" b="1">
+              <a:defRPr sz="1000" b="1">
                 <a:solidFill>
                   <a:srgbClr val="10B981"/>
                 </a:solidFill>
               </a:defRPr>
             </a:pPr>
             <a:r>
-              <a:t>ORADOR 5</a:t>
-            </a:r>
-          </a:p>
-        </p:txBody>
-      </p:sp>
-      <p:sp>
-        <p:nvSpPr>
-          <p:cNvPr id="4" name="Rounded Rectangle 3"/>
+              <a:t>PUESTOS #9 Y #10 (NUEVA CATEGORÍA)</a:t>
+            </a:r>
+          </a:p>
+        </p:txBody>
+      </p:sp>
+      <p:sp>
+        <p:nvSpPr>
+          <p:cNvPr id="4" name="TextBox 3"/>
+          <p:cNvSpPr txBox="1"/>
+          <p:nvPr/>
+        </p:nvSpPr>
+        <p:spPr>
+          <a:xfrm>
+            <a:off x="731520" y="749808"/>
+            <a:ext cx="10698480" cy="685800"/>
+          </a:xfrm>
+          <a:prstGeom prst="rect">
+            <a:avLst/>
+          </a:prstGeom>
+          <a:noFill/>
+        </p:spPr>
+        <p:txBody>
+          <a:bodyPr wrap="square">
+            <a:spAutoFit/>
+          </a:bodyPr>
+          <a:lstStyle/>
+          <a:p>
+            <a:pPr>
+              <a:defRPr sz="2200" b="1">
+                <a:solidFill>
+                  <a:srgbClr val="F1F5F9"/>
+                </a:solidFill>
+              </a:defRPr>
+            </a:pPr>
+            <a:r>
+              <a:t>A09: Fallas de Registro y Alertas &amp; A10: Condiciones Excepcionales</a:t>
+            </a:r>
+          </a:p>
+        </p:txBody>
+      </p:sp>
+      <p:sp>
+        <p:nvSpPr>
+          <p:cNvPr id="5" name="Rounded Rectangle 4"/>
           <p:cNvSpPr/>
           <p:nvPr/>
         </p:nvSpPr>
         <p:spPr>
           <a:xfrm>
-            <a:off x="3840480" y="365760"/>
-            <a:ext cx="3200400" cy="365760"/>
+            <a:off x="731520" y="1645920"/>
+            <a:ext cx="5212080" cy="4480560"/>
           </a:xfrm>
           <a:prstGeom prst="roundRect">
             <a:avLst/>
@@ -4566,7 +4588,7 @@
           <a:solidFill>
             <a:srgbClr val="131D33"/>
           </a:solidFill>
-          <a:ln w="12700">
+          <a:ln>
             <a:solidFill>
               <a:srgbClr val="24324D"/>
             </a:solidFill>
@@ -4587,53 +4609,81 @@
           </a:fontRef>
         </p:style>
         <p:txBody>
-          <a:bodyPr rtlCol="0" anchor="ctr"/>
+          <a:bodyPr rtlCol="0" anchor="ctr" lIns="274320" tIns="228600"/>
           <a:lstStyle/>
           <a:p>
             <a:pPr algn="ctr">
-              <a:defRPr sz="1000" b="1">
-                <a:solidFill>
-                  <a:srgbClr val="94A3B8"/>
-                </a:solidFill>
-              </a:defRPr>
-            </a:pPr>
-            <a:r>
-              <a:t>PUESTOS #9 Y #10 (NOVEDAD)</a:t>
-            </a:r>
-          </a:p>
-        </p:txBody>
-      </p:sp>
-      <p:sp>
-        <p:nvSpPr>
-          <p:cNvPr id="5" name="TextBox 4"/>
-          <p:cNvSpPr txBox="1"/>
-          <p:nvPr/>
-        </p:nvSpPr>
-        <p:spPr>
-          <a:xfrm>
-            <a:off x="731520" y="777240"/>
-            <a:ext cx="10698480" cy="731520"/>
-          </a:xfrm>
-          <a:prstGeom prst="rect">
-            <a:avLst/>
-          </a:prstGeom>
-          <a:noFill/>
-        </p:spPr>
-        <p:txBody>
-          <a:bodyPr wrap="square">
-            <a:spAutoFit/>
-          </a:bodyPr>
-          <a:lstStyle/>
-          <a:p>
-            <a:pPr>
-              <a:defRPr sz="2400" b="1">
-                <a:solidFill>
-                  <a:srgbClr val="F1F5F9"/>
-                </a:solidFill>
-              </a:defRPr>
-            </a:pPr>
-            <a:r>
-              <a:t>A09: Registro y Alertas &amp; A10: Condiciones Excepcionales</a:t>
+              <a:spcAft>
+                <a:spcPts val="1000"/>
+              </a:spcAft>
+              <a:defRPr sz="1300" b="1">
+                <a:solidFill>
+                  <a:srgbClr val="3B82F6"/>
+                </a:solidFill>
+              </a:defRPr>
+            </a:pPr>
+            <a:r>
+              <a:t>A09: DE 'MONITOREO' A 'ALERTAS'</a:t>
+            </a:r>
+          </a:p>
+          <a:p>
+            <a:pPr>
+              <a:spcAft>
+                <a:spcPts val="800"/>
+              </a:spcAft>
+              <a:defRPr sz="1100">
+                <a:solidFill>
+                  <a:srgbClr val="CBD5E1"/>
+                </a:solidFill>
+              </a:defRPr>
+            </a:pPr>
+            <a:r>
+              <a:t>• Un registro pasivo no detiene ataques: si no hay alertas en tiempo real, las intrusiones pasan inadvertidas.</a:t>
+            </a:r>
+          </a:p>
+          <a:p>
+            <a:pPr>
+              <a:spcAft>
+                <a:spcPts val="800"/>
+              </a:spcAft>
+              <a:defRPr sz="1100">
+                <a:solidFill>
+                  <a:srgbClr val="CBD5E1"/>
+                </a:solidFill>
+              </a:defRPr>
+            </a:pPr>
+            <a:r>
+              <a:t>• Caso Real: Aseguradora de salud infantil con filtración no detectada durante más de 7 años (3.5 millones de niños expuestos).</a:t>
+            </a:r>
+          </a:p>
+          <a:p>
+            <a:pPr>
+              <a:spcAft>
+                <a:spcPts val="800"/>
+              </a:spcAft>
+              <a:defRPr sz="1100">
+                <a:solidFill>
+                  <a:srgbClr val="CBD5E1"/>
+                </a:solidFill>
+              </a:defRPr>
+            </a:pPr>
+            <a:r>
+              <a:t>• Honeytokens: Trampas con cebos sintéticos que disparan alertas con tasa casi cero de falsos positivos.</a:t>
+            </a:r>
+          </a:p>
+          <a:p>
+            <a:pPr>
+              <a:spcAft>
+                <a:spcPts val="800"/>
+              </a:spcAft>
+              <a:defRPr sz="1100">
+                <a:solidFill>
+                  <a:srgbClr val="CBD5E1"/>
+                </a:solidFill>
+              </a:defRPr>
+            </a:pPr>
+            <a:r>
+              <a:t>• Herramientas: Pila ELK (Elasticsearch, Logstash, Kibana) y planes de respuesta a incidentes NIST 800-61.</a:t>
             </a:r>
           </a:p>
         </p:txBody>
@@ -4646,8 +4696,8 @@
         </p:nvSpPr>
         <p:spPr>
           <a:xfrm>
-            <a:off x="731520" y="1645920"/>
-            <a:ext cx="5212080" cy="4572000"/>
+            <a:off x="6217920" y="1645920"/>
+            <a:ext cx="5212080" cy="4480560"/>
           </a:xfrm>
           <a:prstGeom prst="roundRect">
             <a:avLst/>
@@ -4655,7 +4705,7 @@
           <a:solidFill>
             <a:srgbClr val="131D33"/>
           </a:solidFill>
-          <a:ln w="12700">
+          <a:ln>
             <a:solidFill>
               <a:srgbClr val="24324D"/>
             </a:solidFill>
@@ -4676,21 +4726,36 @@
           </a:fontRef>
         </p:style>
         <p:txBody>
-          <a:bodyPr rtlCol="0" anchor="ctr" wrap="square" lIns="228600" rIns="228600" tIns="201168" bIns="201168"/>
+          <a:bodyPr rtlCol="0" anchor="ctr" lIns="274320" tIns="228600"/>
           <a:lstStyle/>
           <a:p>
             <a:pPr algn="ctr">
+              <a:spcAft>
+                <a:spcPts val="1000"/>
+              </a:spcAft>
+              <a:defRPr sz="1300" b="1">
+                <a:solidFill>
+                  <a:srgbClr val="EF4444"/>
+                </a:solidFill>
+              </a:defRPr>
+            </a:pPr>
+            <a:r>
+              <a:t>A10: MAL MANEJO DE CONDICIONES EXCEPCIONALES (NUEVA)</a:t>
+            </a:r>
+          </a:p>
+          <a:p>
+            <a:pPr>
               <a:spcAft>
                 <a:spcPts val="800"/>
               </a:spcAft>
-              <a:defRPr sz="1500" b="1">
-                <a:solidFill>
-                  <a:srgbClr val="3B82F6"/>
-                </a:solidFill>
-              </a:defRPr>
-            </a:pPr>
-            <a:r>
-              <a:t>A09: Fallas de Registro y Alertas</a:t>
+              <a:defRPr sz="1100">
+                <a:solidFill>
+                  <a:srgbClr val="CBD5E1"/>
+                </a:solidFill>
+              </a:defRPr>
+            </a:pPr>
+            <a:r>
+              <a:t>• Nueva categoría en 2025: 24 debilidades orientadas a fallas lógicas y errores no controlados.</a:t>
             </a:r>
           </a:p>
           <a:p>
@@ -4698,131 +4763,29 @@
               <a:spcAft>
                 <a:spcPts val="800"/>
               </a:spcAft>
-              <a:defRPr sz="950" b="1">
-                <a:solidFill>
-                  <a:srgbClr val="94A3B8"/>
-                </a:solidFill>
-              </a:defRPr>
-            </a:pPr>
-            <a:r>
-              <a:t>[Puesto #9]</a:t>
-            </a:r>
-          </a:p>
-          <a:p>
-            <a:pPr>
-              <a:spcAft>
-                <a:spcPts val="600"/>
-              </a:spcAft>
-              <a:defRPr sz="1200">
+              <a:defRPr sz="1100">
                 <a:solidFill>
                   <a:srgbClr val="CBD5E1"/>
                 </a:solidFill>
               </a:defRPr>
             </a:pPr>
             <a:r>
-              <a:t>• Evolución clave: Pasó de llamarse 'monitoreo' a 'alertas'.</a:t>
-            </a:r>
-          </a:p>
-          <a:p>
-            <a:pPr>
-              <a:spcAft>
-                <a:spcPts val="600"/>
-              </a:spcAft>
-              <a:defRPr sz="1200">
-                <a:solidFill>
-                  <a:srgbClr val="CBD5E1"/>
-                </a:solidFill>
-              </a:defRPr>
-            </a:pPr>
-            <a:r>
-              <a:t>• Tener logs sin alertas no sirve: ataques persisten años inadvertidos.</a:t>
-            </a:r>
-          </a:p>
-          <a:p>
-            <a:pPr>
-              <a:spcAft>
-                <a:spcPts val="600"/>
-              </a:spcAft>
-              <a:defRPr sz="1200">
-                <a:solidFill>
-                  <a:srgbClr val="CBD5E1"/>
-                </a:solidFill>
-              </a:defRPr>
-            </a:pPr>
-            <a:r>
-              <a:t>• Caso Real: Filtración de aseguradora de salud infantil durante 7 años (3.5M de niños).</a:t>
-            </a:r>
-          </a:p>
-          <a:p>
-            <a:pPr>
-              <a:spcAft>
-                <a:spcPts val="600"/>
-              </a:spcAft>
-              <a:defRPr sz="1200">
-                <a:solidFill>
-                  <a:srgbClr val="CBD5E1"/>
-                </a:solidFill>
-              </a:defRPr>
-            </a:pPr>
-            <a:r>
-              <a:t>• Mitigación: Pila ELK, honeytokens (trampas con cero falsos positivos) y plan NIST 800-61.</a:t>
-            </a:r>
-          </a:p>
-        </p:txBody>
-      </p:sp>
-      <p:sp>
-        <p:nvSpPr>
-          <p:cNvPr id="7" name="Rounded Rectangle 6"/>
-          <p:cNvSpPr/>
-          <p:nvPr/>
-        </p:nvSpPr>
-        <p:spPr>
-          <a:xfrm>
-            <a:off x="6217920" y="1645920"/>
-            <a:ext cx="5212080" cy="4572000"/>
-          </a:xfrm>
-          <a:prstGeom prst="roundRect">
-            <a:avLst/>
-          </a:prstGeom>
-          <a:solidFill>
-            <a:srgbClr val="131D33"/>
-          </a:solidFill>
-          <a:ln w="12700">
-            <a:solidFill>
-              <a:srgbClr val="24324D"/>
-            </a:solidFill>
-          </a:ln>
-        </p:spPr>
-        <p:style>
-          <a:lnRef idx="1">
-            <a:schemeClr val="accent1"/>
-          </a:lnRef>
-          <a:fillRef idx="3">
-            <a:schemeClr val="accent1"/>
-          </a:fillRef>
-          <a:effectRef idx="2">
-            <a:schemeClr val="accent1"/>
-          </a:effectRef>
-          <a:fontRef idx="minor">
-            <a:schemeClr val="lt1"/>
-          </a:fontRef>
-        </p:style>
-        <p:txBody>
-          <a:bodyPr rtlCol="0" anchor="ctr" wrap="square" lIns="228600" rIns="228600" tIns="201168" bIns="201168"/>
-          <a:lstStyle/>
-          <a:p>
-            <a:pPr algn="ctr">
+              <a:t>• Falla Abierta: Cuando el sistema ante una excepción queda en un estado inesperado que otorga acceso.</a:t>
+            </a:r>
+          </a:p>
+          <a:p>
+            <a:pPr>
               <a:spcAft>
                 <a:spcPts val="800"/>
               </a:spcAft>
-              <a:defRPr sz="1500" b="1">
-                <a:solidFill>
-                  <a:srgbClr val="EF4444"/>
-                </a:solidFill>
-              </a:defRPr>
-            </a:pPr>
-            <a:r>
-              <a:t>A10: Mal Manejo de Condiciones Excepcionales</a:t>
+              <a:defRPr sz="1100">
+                <a:solidFill>
+                  <a:srgbClr val="CBD5E1"/>
+                </a:solidFill>
+              </a:defRPr>
+            </a:pPr>
+            <a:r>
+              <a:t>• Caso Transaccional: Débito en origen, crédito en destino y log. Si se interrumpe a mitad de camino sin rollback, se vulnera la consistencia financiera.</a:t>
             </a:r>
           </a:p>
           <a:p>
@@ -4830,74 +4793,14 @@
               <a:spcAft>
                 <a:spcPts val="800"/>
               </a:spcAft>
-              <a:defRPr sz="950" b="1">
-                <a:solidFill>
-                  <a:srgbClr val="94A3B8"/>
-                </a:solidFill>
-              </a:defRPr>
-            </a:pPr>
-            <a:r>
-              <a:t>[Puesto #10 (Nueva)]</a:t>
-            </a:r>
-          </a:p>
-          <a:p>
-            <a:pPr>
-              <a:spcAft>
-                <a:spcPts val="600"/>
-              </a:spcAft>
-              <a:defRPr sz="1200">
+              <a:defRPr sz="1100">
                 <a:solidFill>
                   <a:srgbClr val="CBD5E1"/>
                 </a:solidFill>
               </a:defRPr>
             </a:pPr>
             <a:r>
-              <a:t>• NUEVA CATEGORÍA EN 2025: 24 debilidades enfocadas en errores.</a:t>
-            </a:r>
-          </a:p>
-          <a:p>
-            <a:pPr>
-              <a:spcAft>
-                <a:spcPts val="600"/>
-              </a:spcAft>
-              <a:defRPr sz="1200">
-                <a:solidFill>
-                  <a:srgbClr val="CBD5E1"/>
-                </a:solidFill>
-              </a:defRPr>
-            </a:pPr>
-            <a:r>
-              <a:t>• Falla abierta: el sistema falla dejando datos o permisos expuestos.</a:t>
-            </a:r>
-          </a:p>
-          <a:p>
-            <a:pPr>
-              <a:spcAft>
-                <a:spcPts val="600"/>
-              </a:spcAft>
-              <a:defRPr sz="1200">
-                <a:solidFill>
-                  <a:srgbClr val="CBD5E1"/>
-                </a:solidFill>
-              </a:defRPr>
-            </a:pPr>
-            <a:r>
-              <a:t>• Ejemplo: Transacción bancaria en 3 pasos que no ejecuta rollback ante cortes.</a:t>
-            </a:r>
-          </a:p>
-          <a:p>
-            <a:pPr>
-              <a:spcAft>
-                <a:spcPts val="600"/>
-              </a:spcAft>
-              <a:defRPr sz="1200">
-                <a:solidFill>
-                  <a:srgbClr val="CBD5E1"/>
-                </a:solidFill>
-              </a:defRPr>
-            </a:pPr>
-            <a:r>
-              <a:t>• Mitigación: Manejo centralizado global de excepciones, idempotencia y límites de cuota.</a:t>
+              <a:t>• Mitigación: Manejadores globales centralizados de excepciones, transacciones atómicas y límites de tasa/cuotas.</a:t>
             </a:r>
           </a:p>
         </p:txBody>
@@ -4971,8 +4874,8 @@
         </p:nvSpPr>
         <p:spPr>
           <a:xfrm>
-            <a:off x="731520" y="365760"/>
-            <a:ext cx="2926080" cy="365760"/>
+            <a:off x="731520" y="384048"/>
+            <a:ext cx="3108960" cy="320040"/>
           </a:xfrm>
           <a:prstGeom prst="roundRect">
             <a:avLst/>
@@ -5001,32 +4904,67 @@
           </a:fontRef>
         </p:style>
         <p:txBody>
-          <a:bodyPr rtlCol="0" anchor="ctr" wrap="square"/>
+          <a:bodyPr rtlCol="0" anchor="ctr"/>
           <a:lstStyle/>
           <a:p>
             <a:pPr algn="ctr">
-              <a:defRPr sz="1050" b="1">
+              <a:defRPr sz="1000" b="1">
                 <a:solidFill>
                   <a:srgbClr val="06B6D4"/>
                 </a:solidFill>
               </a:defRPr>
             </a:pPr>
             <a:r>
-              <a:t>EQUIPO COMPLETO</a:t>
-            </a:r>
-          </a:p>
-        </p:txBody>
-      </p:sp>
-      <p:sp>
-        <p:nvSpPr>
-          <p:cNvPr id="4" name="Rounded Rectangle 3"/>
+              <a:t>CIERRE DEL TRABAJO PRÁCTICO</a:t>
+            </a:r>
+          </a:p>
+        </p:txBody>
+      </p:sp>
+      <p:sp>
+        <p:nvSpPr>
+          <p:cNvPr id="4" name="TextBox 3"/>
+          <p:cNvSpPr txBox="1"/>
+          <p:nvPr/>
+        </p:nvSpPr>
+        <p:spPr>
+          <a:xfrm>
+            <a:off x="731520" y="749808"/>
+            <a:ext cx="10698480" cy="685800"/>
+          </a:xfrm>
+          <a:prstGeom prst="rect">
+            <a:avLst/>
+          </a:prstGeom>
+          <a:noFill/>
+        </p:spPr>
+        <p:txBody>
+          <a:bodyPr wrap="square">
+            <a:spAutoFit/>
+          </a:bodyPr>
+          <a:lstStyle/>
+          <a:p>
+            <a:pPr>
+              <a:defRPr sz="2200" b="1">
+                <a:solidFill>
+                  <a:srgbClr val="F1F5F9"/>
+                </a:solidFill>
+              </a:defRPr>
+            </a:pPr>
+            <a:r>
+              <a:t>Conclusiones del Estudio &amp; Demostración Práctica en Vivo</a:t>
+            </a:r>
+          </a:p>
+        </p:txBody>
+      </p:sp>
+      <p:sp>
+        <p:nvSpPr>
+          <p:cNvPr id="5" name="Rounded Rectangle 4"/>
           <p:cNvSpPr/>
           <p:nvPr/>
         </p:nvSpPr>
         <p:spPr>
           <a:xfrm>
-            <a:off x="3840480" y="365760"/>
-            <a:ext cx="3200400" cy="365760"/>
+            <a:off x="731520" y="1645920"/>
+            <a:ext cx="5212080" cy="4480560"/>
           </a:xfrm>
           <a:prstGeom prst="roundRect">
             <a:avLst/>
@@ -5034,7 +4972,7 @@
           <a:solidFill>
             <a:srgbClr val="131D33"/>
           </a:solidFill>
-          <a:ln w="12700">
+          <a:ln>
             <a:solidFill>
               <a:srgbClr val="24324D"/>
             </a:solidFill>
@@ -5055,53 +4993,81 @@
           </a:fontRef>
         </p:style>
         <p:txBody>
-          <a:bodyPr rtlCol="0" anchor="ctr"/>
+          <a:bodyPr rtlCol="0" anchor="ctr" lIns="274320" tIns="228600"/>
           <a:lstStyle/>
           <a:p>
             <a:pPr algn="ctr">
-              <a:defRPr sz="1000" b="1">
-                <a:solidFill>
-                  <a:srgbClr val="94A3B8"/>
-                </a:solidFill>
-              </a:defRPr>
-            </a:pPr>
-            <a:r>
-              <a:t>CIERRE Y LABORATORIO EN VIVO</a:t>
-            </a:r>
-          </a:p>
-        </p:txBody>
-      </p:sp>
-      <p:sp>
-        <p:nvSpPr>
-          <p:cNvPr id="5" name="TextBox 4"/>
-          <p:cNvSpPr txBox="1"/>
-          <p:nvPr/>
-        </p:nvSpPr>
-        <p:spPr>
-          <a:xfrm>
-            <a:off x="731520" y="777240"/>
-            <a:ext cx="10698480" cy="731520"/>
-          </a:xfrm>
-          <a:prstGeom prst="rect">
-            <a:avLst/>
-          </a:prstGeom>
-          <a:noFill/>
-        </p:spPr>
-        <p:txBody>
-          <a:bodyPr wrap="square">
-            <a:spAutoFit/>
-          </a:bodyPr>
-          <a:lstStyle/>
-          <a:p>
-            <a:pPr>
-              <a:defRPr sz="2400" b="1">
-                <a:solidFill>
-                  <a:srgbClr val="F1F5F9"/>
-                </a:solidFill>
-              </a:defRPr>
-            </a:pPr>
-            <a:r>
-              <a:t>Conclusiones del Estudio &amp; Demostración Práctica</a:t>
+              <a:spcAft>
+                <a:spcPts val="1000"/>
+              </a:spcAft>
+              <a:defRPr sz="1300" b="1">
+                <a:solidFill>
+                  <a:srgbClr val="06B6D4"/>
+                </a:solidFill>
+              </a:defRPr>
+            </a:pPr>
+            <a:r>
+              <a:t>CONCLUSIONES DE LA INVESTIGACIÓN</a:t>
+            </a:r>
+          </a:p>
+          <a:p>
+            <a:pPr>
+              <a:spcAft>
+                <a:spcPts val="800"/>
+              </a:spcAft>
+              <a:defRPr sz="1100">
+                <a:solidFill>
+                  <a:srgbClr val="CBD5E1"/>
+                </a:solidFill>
+              </a:defRPr>
+            </a:pPr>
+            <a:r>
+              <a:t>• 1. La seguridad no es una etapa final: debe integrarse por diseño desde la concepción de la arquitectura.</a:t>
+            </a:r>
+          </a:p>
+          <a:p>
+            <a:pPr>
+              <a:spcAft>
+                <a:spcPts val="800"/>
+              </a:spcAft>
+              <a:defRPr sz="1100">
+                <a:solidFill>
+                  <a:srgbClr val="CBD5E1"/>
+                </a:solidFill>
+              </a:defRPr>
+            </a:pPr>
+            <a:r>
+              <a:t>• 2. La automatización de los atacantes exige defensas automáticas (CI/CD con SAST/DAST, SBOM y alertas).</a:t>
+            </a:r>
+          </a:p>
+          <a:p>
+            <a:pPr>
+              <a:spcAft>
+                <a:spcPts val="800"/>
+              </a:spcAft>
+              <a:defRPr sz="1100">
+                <a:solidFill>
+                  <a:srgbClr val="CBD5E1"/>
+                </a:solidFill>
+              </a:defRPr>
+            </a:pPr>
+            <a:r>
+              <a:t>• 3. El código limpio no basta: la configuración cloud y la cadena de suministro son los vectores predominantes.</a:t>
+            </a:r>
+          </a:p>
+          <a:p>
+            <a:pPr>
+              <a:spcAft>
+                <a:spcPts val="800"/>
+              </a:spcAft>
+              <a:defRPr sz="1100">
+                <a:solidFill>
+                  <a:srgbClr val="CBD5E1"/>
+                </a:solidFill>
+              </a:defRPr>
+            </a:pPr>
+            <a:r>
+              <a:t>• 4. El Top 10:2025 demuestra que corregir la causa raíz es el único camino sostenible en la industria.</a:t>
             </a:r>
           </a:p>
         </p:txBody>
@@ -5114,18 +5080,18 @@
         </p:nvSpPr>
         <p:spPr>
           <a:xfrm>
-            <a:off x="731520" y="1645920"/>
-            <a:ext cx="5212080" cy="4572000"/>
+            <a:off x="6217920" y="1645920"/>
+            <a:ext cx="5212080" cy="4480560"/>
           </a:xfrm>
           <a:prstGeom prst="roundRect">
             <a:avLst/>
           </a:prstGeom>
           <a:solidFill>
-            <a:srgbClr val="131D33"/>
+            <a:srgbClr val="182541"/>
           </a:solidFill>
           <a:ln w="12700">
             <a:solidFill>
-              <a:srgbClr val="24324D"/>
+              <a:srgbClr val="10B981"/>
             </a:solidFill>
           </a:ln>
         </p:spPr>
@@ -5144,36 +5110,21 @@
           </a:fontRef>
         </p:style>
         <p:txBody>
-          <a:bodyPr rtlCol="0" anchor="ctr" wrap="square" lIns="228600" rIns="228600" tIns="201168" bIns="201168"/>
+          <a:bodyPr rtlCol="0" anchor="ctr" lIns="274320" tIns="228600"/>
           <a:lstStyle/>
           <a:p>
             <a:pPr algn="ctr">
               <a:spcAft>
-                <a:spcPts val="800"/>
+                <a:spcPts val="1000"/>
               </a:spcAft>
-              <a:defRPr sz="1500" b="1">
-                <a:solidFill>
-                  <a:srgbClr val="06B6D4"/>
-                </a:solidFill>
-              </a:defRPr>
-            </a:pPr>
-            <a:r>
-              <a:t>Conclusiones de la Monografía</a:t>
-            </a:r>
-          </a:p>
-          <a:p>
-            <a:pPr>
-              <a:spcAft>
-                <a:spcPts val="800"/>
-              </a:spcAft>
-              <a:defRPr sz="950" b="1">
-                <a:solidFill>
-                  <a:srgbClr val="94A3B8"/>
-                </a:solidFill>
-              </a:defRPr>
-            </a:pPr>
-            <a:r>
-              <a:t>[Pilares Clave]</a:t>
+              <a:defRPr sz="1300" b="1">
+                <a:solidFill>
+                  <a:srgbClr val="10B981"/>
+                </a:solidFill>
+              </a:defRPr>
+            </a:pPr>
+            <a:r>
+              <a:t>DEMO EN VIVO: SIMULADOR WEB (SeguridadTP)</a:t>
             </a:r>
           </a:p>
           <a:p>
@@ -5181,14 +5132,14 @@
               <a:spcAft>
                 <a:spcPts val="600"/>
               </a:spcAft>
-              <a:defRPr sz="1200">
+              <a:defRPr sz="1100">
                 <a:solidFill>
                   <a:srgbClr val="CBD5E1"/>
                 </a:solidFill>
               </a:defRPr>
             </a:pPr>
             <a:r>
-              <a:t>• 1. La seguridad no se añade al final: debe ser parte del diseño inicial.</a:t>
+              <a:t>• Plataforma interactiva para visualizar los 3 vectores clave:</a:t>
             </a:r>
           </a:p>
           <a:p>
@@ -5196,14 +5147,14 @@
               <a:spcAft>
                 <a:spcPts val="600"/>
               </a:spcAft>
-              <a:defRPr sz="1200">
-                <a:solidFill>
-                  <a:srgbClr val="CBD5E1"/>
-                </a:solidFill>
-              </a:defRPr>
-            </a:pPr>
-            <a:r>
-              <a:t>• 2. El Top 10:2025 destaca que el código bien escrito puede ser vulnerado por infraestructura y cadena de suministro.</a:t>
+              <a:defRPr sz="1100">
+                <a:solidFill>
+                  <a:srgbClr val="F1F5F9"/>
+                </a:solidFill>
+              </a:defRPr>
+            </a:pPr>
+            <a:r>
+              <a:t>• • Demo 1: Manipulación de Objeto Directo (IDOR / A01) con switch Vulnerable vs. RBAC.</a:t>
             </a:r>
           </a:p>
           <a:p>
@@ -5211,14 +5162,14 @@
               <a:spcAft>
                 <a:spcPts val="600"/>
               </a:spcAft>
-              <a:defRPr sz="1200">
-                <a:solidFill>
-                  <a:srgbClr val="CBD5E1"/>
-                </a:solidFill>
-              </a:defRPr>
-            </a:pPr>
-            <a:r>
-              <a:t>• 3. La automatización ofensiva exige automatización defensiva (SAST, DAST, SBOM y MFA).</a:t>
+              <a:defRPr sz="1100">
+                <a:solidFill>
+                  <a:srgbClr val="F1F5F9"/>
+                </a:solidFill>
+              </a:defRPr>
+            </a:pPr>
+            <a:r>
+              <a:t>• • Demo 2: Inyección SQL (A05) con desglose en vivo del AST y Prepared Statements.</a:t>
             </a:r>
           </a:p>
           <a:p>
@@ -5226,86 +5177,14 @@
               <a:spcAft>
                 <a:spcPts val="600"/>
               </a:spcAft>
-              <a:defRPr sz="1200">
-                <a:solidFill>
-                  <a:srgbClr val="CBD5E1"/>
-                </a:solidFill>
-              </a:defRPr>
-            </a:pPr>
-            <a:r>
-              <a:t>• 4. Enfoque integral: Diseño Seguro + Automatización CI/CD + Monitoreo con Alertas.</a:t>
-            </a:r>
-          </a:p>
-        </p:txBody>
-      </p:sp>
-      <p:sp>
-        <p:nvSpPr>
-          <p:cNvPr id="7" name="Rounded Rectangle 6"/>
-          <p:cNvSpPr/>
-          <p:nvPr/>
-        </p:nvSpPr>
-        <p:spPr>
-          <a:xfrm>
-            <a:off x="6217920" y="1645920"/>
-            <a:ext cx="5212080" cy="4572000"/>
-          </a:xfrm>
-          <a:prstGeom prst="roundRect">
-            <a:avLst/>
-          </a:prstGeom>
-          <a:solidFill>
-            <a:srgbClr val="131D33"/>
-          </a:solidFill>
-          <a:ln w="12700">
-            <a:solidFill>
-              <a:srgbClr val="24324D"/>
-            </a:solidFill>
-          </a:ln>
-        </p:spPr>
-        <p:style>
-          <a:lnRef idx="1">
-            <a:schemeClr val="accent1"/>
-          </a:lnRef>
-          <a:fillRef idx="3">
-            <a:schemeClr val="accent1"/>
-          </a:fillRef>
-          <a:effectRef idx="2">
-            <a:schemeClr val="accent1"/>
-          </a:effectRef>
-          <a:fontRef idx="minor">
-            <a:schemeClr val="lt1"/>
-          </a:fontRef>
-        </p:style>
-        <p:txBody>
-          <a:bodyPr rtlCol="0" anchor="ctr" wrap="square" lIns="228600" rIns="228600" tIns="201168" bIns="201168"/>
-          <a:lstStyle/>
-          <a:p>
-            <a:pPr algn="ctr">
-              <a:spcAft>
-                <a:spcPts val="800"/>
-              </a:spcAft>
-              <a:defRPr sz="1500" b="1">
-                <a:solidFill>
-                  <a:srgbClr val="10B981"/>
-                </a:solidFill>
-              </a:defRPr>
-            </a:pPr>
-            <a:r>
-              <a:t>Demostración del Simulador Web (SeguridadTP)</a:t>
-            </a:r>
-          </a:p>
-          <a:p>
-            <a:pPr>
-              <a:spcAft>
-                <a:spcPts val="800"/>
-              </a:spcAft>
-              <a:defRPr sz="950" b="1">
-                <a:solidFill>
-                  <a:srgbClr val="94A3B8"/>
-                </a:solidFill>
-              </a:defRPr>
-            </a:pPr>
-            <a:r>
-              <a:t>[Simulación en Vivo]</a:t>
+              <a:defRPr sz="1100">
+                <a:solidFill>
+                  <a:srgbClr val="F1F5F9"/>
+                </a:solidFill>
+              </a:defRPr>
+            </a:pPr>
+            <a:r>
+              <a:t>• • Demo 3: Fuerza Bruta / Credential Stuffing (A07) con bloqueo NIST y MFA.</a:t>
             </a:r>
           </a:p>
           <a:p>
@@ -5313,14 +5192,14 @@
               <a:spcAft>
                 <a:spcPts val="600"/>
               </a:spcAft>
-              <a:defRPr sz="1200">
+              <a:defRPr sz="1100">
                 <a:solidFill>
                   <a:srgbClr val="CBD5E1"/>
                 </a:solidFill>
               </a:defRPr>
             </a:pPr>
             <a:r>
-              <a:t>• Laboratorio interactivo desarrollado para acompañar la monografía:</a:t>
+              <a:t>• Pipeline animado en tiempo real con medición de latencia y Web Audio API.</a:t>
             </a:r>
           </a:p>
           <a:p>
@@ -5328,59 +5207,14 @@
               <a:spcAft>
                 <a:spcPts val="600"/>
               </a:spcAft>
-              <a:defRPr sz="1200">
+              <a:defRPr sz="1100">
                 <a:solidFill>
                   <a:srgbClr val="CBD5E1"/>
                 </a:solidFill>
               </a:defRPr>
             </a:pPr>
             <a:r>
-              <a:t>• • Demo 1: Explotación y mitigación de IDOR (A01 - Broken Access Control).</a:t>
-            </a:r>
-          </a:p>
-          <a:p>
-            <a:pPr>
-              <a:spcAft>
-                <a:spcPts val="600"/>
-              </a:spcAft>
-              <a:defRPr sz="1200">
-                <a:solidFill>
-                  <a:srgbClr val="CBD5E1"/>
-                </a:solidFill>
-              </a:defRPr>
-            </a:pPr>
-            <a:r>
-              <a:t>• • Demo 2: Bypass de autenticación con SQL Injection y Prepared Statements (A05).</a:t>
-            </a:r>
-          </a:p>
-          <a:p>
-            <a:pPr>
-              <a:spcAft>
-                <a:spcPts val="600"/>
-              </a:spcAft>
-              <a:defRPr sz="1200">
-                <a:solidFill>
-                  <a:srgbClr val="CBD5E1"/>
-                </a:solidFill>
-              </a:defRPr>
-            </a:pPr>
-            <a:r>
-              <a:t>• • Demo 3: Simulación de botnet de fuerza bruta, bloqueo NIST y MFA (A07).</a:t>
-            </a:r>
-          </a:p>
-          <a:p>
-            <a:pPr>
-              <a:spcAft>
-                <a:spcPts val="600"/>
-              </a:spcAft>
-              <a:defRPr sz="1200">
-                <a:solidFill>
-                  <a:srgbClr val="CBD5E1"/>
-                </a:solidFill>
-              </a:defRPr>
-            </a:pPr>
-            <a:r>
-              <a:t>• Disponible en: https://github.com/Vgarzaniti/SeguridadTP</a:t>
+              <a:t>• Repositorio público: github.com/Vgarzaniti/SeguridadTP</a:t>
             </a:r>
           </a:p>
         </p:txBody>
@@ -5454,8 +5288,8 @@
         </p:nvSpPr>
         <p:spPr>
           <a:xfrm>
-            <a:off x="731520" y="365760"/>
-            <a:ext cx="2926080" cy="365760"/>
+            <a:off x="731520" y="384048"/>
+            <a:ext cx="3108960" cy="320040"/>
           </a:xfrm>
           <a:prstGeom prst="roundRect">
             <a:avLst/>
@@ -5484,32 +5318,67 @@
           </a:fontRef>
         </p:style>
         <p:txBody>
-          <a:bodyPr rtlCol="0" anchor="ctr" wrap="square"/>
+          <a:bodyPr rtlCol="0" anchor="ctr"/>
           <a:lstStyle/>
           <a:p>
             <a:pPr algn="ctr">
-              <a:defRPr sz="1050" b="1">
+              <a:defRPr sz="1000" b="1">
                 <a:solidFill>
                   <a:srgbClr val="3B82F6"/>
                 </a:solidFill>
               </a:defRPr>
             </a:pPr>
             <a:r>
-              <a:t>EQUIPO COMPLETO</a:t>
-            </a:r>
-          </a:p>
-        </p:txBody>
-      </p:sp>
-      <p:sp>
-        <p:nvSpPr>
-          <p:cNvPr id="4" name="Rounded Rectangle 3"/>
+              <a:t>DATOS Y ESTADÍSTICAS GLOBALES</a:t>
+            </a:r>
+          </a:p>
+        </p:txBody>
+      </p:sp>
+      <p:sp>
+        <p:nvSpPr>
+          <p:cNvPr id="4" name="TextBox 3"/>
+          <p:cNvSpPr txBox="1"/>
+          <p:nvPr/>
+        </p:nvSpPr>
+        <p:spPr>
+          <a:xfrm>
+            <a:off x="731520" y="749808"/>
+            <a:ext cx="10698480" cy="685800"/>
+          </a:xfrm>
+          <a:prstGeom prst="rect">
+            <a:avLst/>
+          </a:prstGeom>
+          <a:noFill/>
+        </p:spPr>
+        <p:txBody>
+          <a:bodyPr wrap="square">
+            <a:spAutoFit/>
+          </a:bodyPr>
+          <a:lstStyle/>
+          <a:p>
+            <a:pPr>
+              <a:defRPr sz="2200" b="1">
+                <a:solidFill>
+                  <a:srgbClr val="F1F5F9"/>
+                </a:solidFill>
+              </a:defRPr>
+            </a:pPr>
+            <a:r>
+              <a:t>Metodología y Alcance: ¿Cómo se construyó la Edición 2025?</a:t>
+            </a:r>
+          </a:p>
+        </p:txBody>
+      </p:sp>
+      <p:sp>
+        <p:nvSpPr>
+          <p:cNvPr id="5" name="Rounded Rectangle 4"/>
           <p:cNvSpPr/>
           <p:nvPr/>
         </p:nvSpPr>
         <p:spPr>
           <a:xfrm>
-            <a:off x="3840480" y="365760"/>
-            <a:ext cx="3200400" cy="365760"/>
+            <a:off x="731520" y="1645920"/>
+            <a:ext cx="2560320" cy="4480560"/>
           </a:xfrm>
           <a:prstGeom prst="roundRect">
             <a:avLst/>
@@ -5538,53 +5407,51 @@
           </a:fontRef>
         </p:style>
         <p:txBody>
-          <a:bodyPr rtlCol="0" anchor="ctr"/>
+          <a:bodyPr rtlCol="0" anchor="ctr" wrap="square" lIns="182880" rIns="182880" tIns="274320"/>
           <a:lstStyle/>
           <a:p>
             <a:pPr algn="ctr">
-              <a:defRPr sz="1000" b="1">
+              <a:spcAft>
+                <a:spcPts val="800"/>
+              </a:spcAft>
+              <a:defRPr sz="3600" b="1">
+                <a:solidFill>
+                  <a:srgbClr val="06B6D4"/>
+                </a:solidFill>
+              </a:defRPr>
+            </a:pPr>
+            <a:r>
+              <a:t>2.8M+</a:t>
+            </a:r>
+          </a:p>
+          <a:p>
+            <a:pPr>
+              <a:spcAft>
+                <a:spcPts val="1200"/>
+              </a:spcAft>
+              <a:defRPr sz="1300" b="1">
+                <a:solidFill>
+                  <a:srgbClr val="F1F5F9"/>
+                </a:solidFill>
+              </a:defRPr>
+            </a:pPr>
+            <a:r>
+              <a:t>Aplicaciones Analizadas</a:t>
+            </a:r>
+          </a:p>
+          <a:p>
+            <a:pPr>
+              <a:lnSpc>
+                <a:spcPct val="125000"/>
+              </a:lnSpc>
+              <a:defRPr sz="1100">
                 <a:solidFill>
                   <a:srgbClr val="94A3B8"/>
                 </a:solidFill>
               </a:defRPr>
             </a:pPr>
             <a:r>
-              <a:t>METODOLOGÍA DE EXPOSICIÓN</a:t>
-            </a:r>
-          </a:p>
-        </p:txBody>
-      </p:sp>
-      <p:sp>
-        <p:nvSpPr>
-          <p:cNvPr id="5" name="TextBox 4"/>
-          <p:cNvSpPr txBox="1"/>
-          <p:nvPr/>
-        </p:nvSpPr>
-        <p:spPr>
-          <a:xfrm>
-            <a:off x="731520" y="777240"/>
-            <a:ext cx="10698480" cy="731520"/>
-          </a:xfrm>
-          <a:prstGeom prst="rect">
-            <a:avLst/>
-          </a:prstGeom>
-          <a:noFill/>
-        </p:spPr>
-        <p:txBody>
-          <a:bodyPr wrap="square">
-            <a:spAutoFit/>
-          </a:bodyPr>
-          <a:lstStyle/>
-          <a:p>
-            <a:pPr>
-              <a:defRPr sz="2400" b="1">
-                <a:solidFill>
-                  <a:srgbClr val="F1F5F9"/>
-                </a:solidFill>
-              </a:defRPr>
-            </a:pPr>
-            <a:r>
-              <a:t>Agenda de la Presentación &amp; Distribución de Roles</a:t>
+              <a:t>Estudio masivo provisto por firmas líderes como Veracode, Sonar y Contrast Security.</a:t>
             </a:r>
           </a:p>
         </p:txBody>
@@ -5597,8 +5464,8 @@
         </p:nvSpPr>
         <p:spPr>
           <a:xfrm>
-            <a:off x="731520" y="1645920"/>
-            <a:ext cx="2011680" cy="4572000"/>
+            <a:off x="3429000" y="1645920"/>
+            <a:ext cx="2560320" cy="4480560"/>
           </a:xfrm>
           <a:prstGeom prst="roundRect">
             <a:avLst/>
@@ -5627,111 +5494,51 @@
           </a:fontRef>
         </p:style>
         <p:txBody>
-          <a:bodyPr rtlCol="0" anchor="ctr" wrap="square" lIns="228600" rIns="228600" tIns="201168" bIns="201168"/>
+          <a:bodyPr rtlCol="0" anchor="ctr" wrap="square" lIns="182880" rIns="182880" tIns="274320"/>
           <a:lstStyle/>
           <a:p>
             <a:pPr algn="ctr">
               <a:spcAft>
                 <a:spcPts val="800"/>
               </a:spcAft>
-              <a:defRPr sz="1500" b="1">
+              <a:defRPr sz="3600" b="1">
                 <a:solidFill>
                   <a:srgbClr val="3B82F6"/>
                 </a:solidFill>
               </a:defRPr>
             </a:pPr>
             <a:r>
-              <a:t>Orador 1</a:t>
+              <a:t>248</a:t>
             </a:r>
           </a:p>
           <a:p>
             <a:pPr>
               <a:spcAft>
-                <a:spcPts val="800"/>
+                <a:spcPts val="1200"/>
               </a:spcAft>
-              <a:defRPr sz="950" b="1">
+              <a:defRPr sz="1300" b="1">
+                <a:solidFill>
+                  <a:srgbClr val="F1F5F9"/>
+                </a:solidFill>
+              </a:defRPr>
+            </a:pPr>
+            <a:r>
+              <a:t>Debilidades CWE Evaluadas</a:t>
+            </a:r>
+          </a:p>
+          <a:p>
+            <a:pPr>
+              <a:lnSpc>
+                <a:spcPct val="125000"/>
+              </a:lnSpc>
+              <a:defRPr sz="1100">
                 <a:solidFill>
                   <a:srgbClr val="94A3B8"/>
                 </a:solidFill>
               </a:defRPr>
             </a:pPr>
             <a:r>
-              <a:t>[Bloque Introductorio]</a:t>
-            </a:r>
-          </a:p>
-          <a:p>
-            <a:pPr>
-              <a:spcAft>
-                <a:spcPts val="600"/>
-              </a:spcAft>
-              <a:defRPr sz="1200">
-                <a:solidFill>
-                  <a:srgbClr val="CBD5E1"/>
-                </a:solidFill>
-              </a:defRPr>
-            </a:pPr>
-            <a:r>
-              <a:t>• Qué es OWASP</a:t>
-            </a:r>
-          </a:p>
-          <a:p>
-            <a:pPr>
-              <a:spcAft>
-                <a:spcPts val="600"/>
-              </a:spcAft>
-              <a:defRPr sz="1200">
-                <a:solidFill>
-                  <a:srgbClr val="CBD5E1"/>
-                </a:solidFill>
-              </a:defRPr>
-            </a:pPr>
-            <a:r>
-              <a:t>• Espacio del problema (Web/APIs)</a:t>
-            </a:r>
-          </a:p>
-          <a:p>
-            <a:pPr>
-              <a:spcAft>
-                <a:spcPts val="600"/>
-              </a:spcAft>
-              <a:defRPr sz="1200">
-                <a:solidFill>
-                  <a:srgbClr val="CBD5E1"/>
-                </a:solidFill>
-              </a:defRPr>
-            </a:pPr>
-            <a:r>
-              <a:t>• Riesgo vs Vulnerabilidad</a:t>
-            </a:r>
-          </a:p>
-          <a:p>
-            <a:pPr>
-              <a:spcAft>
-                <a:spcPts val="600"/>
-              </a:spcAft>
-              <a:defRPr sz="1200">
-                <a:solidFill>
-                  <a:srgbClr val="CBD5E1"/>
-                </a:solidFill>
-              </a:defRPr>
-            </a:pPr>
-            <a:r>
-              <a:t>• Metodología edición 2025</a:t>
-            </a:r>
-          </a:p>
-          <a:p>
-            <a:pPr>
-              <a:spcAft>
-                <a:spcPts val="600"/>
-              </a:spcAft>
-              <a:defRPr sz="1200">
-                <a:solidFill>
-                  <a:srgbClr val="CBD5E1"/>
-                </a:solidFill>
-              </a:defRPr>
-            </a:pPr>
-            <a:r>
-              <a:t>• Comparativa 2021 vs 2025</a:t>
+              <a:t>Agrupadas a partir de 589 debilidades iniciales hacia 10 categorías finales de riesgo.</a:t>
             </a:r>
           </a:p>
         </p:txBody>
@@ -5744,8 +5551,8 @@
         </p:nvSpPr>
         <p:spPr>
           <a:xfrm>
-            <a:off x="2926080" y="1645920"/>
-            <a:ext cx="2011680" cy="4572000"/>
+            <a:off x="6126480" y="1645920"/>
+            <a:ext cx="2560320" cy="4480560"/>
           </a:xfrm>
           <a:prstGeom prst="roundRect">
             <a:avLst/>
@@ -5774,126 +5581,51 @@
           </a:fontRef>
         </p:style>
         <p:txBody>
-          <a:bodyPr rtlCol="0" anchor="ctr" wrap="square" lIns="228600" rIns="228600" tIns="201168" bIns="201168"/>
+          <a:bodyPr rtlCol="0" anchor="ctr" wrap="square" lIns="182880" rIns="182880" tIns="274320"/>
           <a:lstStyle/>
           <a:p>
             <a:pPr algn="ctr">
               <a:spcAft>
                 <a:spcPts val="800"/>
               </a:spcAft>
-              <a:defRPr sz="1500" b="1">
-                <a:solidFill>
-                  <a:srgbClr val="EF4444"/>
-                </a:solidFill>
-              </a:defRPr>
-            </a:pPr>
-            <a:r>
-              <a:t>Orador 2</a:t>
+              <a:defRPr sz="3600" b="1">
+                <a:solidFill>
+                  <a:srgbClr val="F59E0B"/>
+                </a:solidFill>
+              </a:defRPr>
+            </a:pPr>
+            <a:r>
+              <a:t>2</a:t>
             </a:r>
           </a:p>
           <a:p>
             <a:pPr>
               <a:spcAft>
-                <a:spcPts val="800"/>
+                <a:spcPts val="1200"/>
               </a:spcAft>
-              <a:defRPr sz="950" b="1">
+              <a:defRPr sz="1300" b="1">
+                <a:solidFill>
+                  <a:srgbClr val="F1F5F9"/>
+                </a:solidFill>
+              </a:defRPr>
+            </a:pPr>
+            <a:r>
+              <a:t>Nuevas Categorías en 2025</a:t>
+            </a:r>
+          </a:p>
+          <a:p>
+            <a:pPr>
+              <a:lnSpc>
+                <a:spcPct val="125000"/>
+              </a:lnSpc>
+              <a:defRPr sz="1100">
                 <a:solidFill>
                   <a:srgbClr val="94A3B8"/>
                 </a:solidFill>
               </a:defRPr>
             </a:pPr>
             <a:r>
-              <a:t>[Top 1 y 2]</a:t>
-            </a:r>
-          </a:p>
-          <a:p>
-            <a:pPr>
-              <a:spcAft>
-                <a:spcPts val="600"/>
-              </a:spcAft>
-              <a:defRPr sz="1200">
-                <a:solidFill>
-                  <a:srgbClr val="CBD5E1"/>
-                </a:solidFill>
-              </a:defRPr>
-            </a:pPr>
-            <a:r>
-              <a:t>• A01: Broken Access Control</a:t>
-            </a:r>
-          </a:p>
-          <a:p>
-            <a:pPr>
-              <a:spcAft>
-                <a:spcPts val="600"/>
-              </a:spcAft>
-              <a:defRPr sz="1200">
-                <a:solidFill>
-                  <a:srgbClr val="CBD5E1"/>
-                </a:solidFill>
-              </a:defRPr>
-            </a:pPr>
-            <a:r>
-              <a:t>• Absorción de SSRF</a:t>
-            </a:r>
-          </a:p>
-          <a:p>
-            <a:pPr>
-              <a:spcAft>
-                <a:spcPts val="600"/>
-              </a:spcAft>
-              <a:defRPr sz="1200">
-                <a:solidFill>
-                  <a:srgbClr val="CBD5E1"/>
-                </a:solidFill>
-              </a:defRPr>
-            </a:pPr>
-            <a:r>
-              <a:t>• 100% incidencia en apps</a:t>
-            </a:r>
-          </a:p>
-          <a:p>
-            <a:pPr>
-              <a:spcAft>
-                <a:spcPts val="600"/>
-              </a:spcAft>
-              <a:defRPr sz="1200">
-                <a:solidFill>
-                  <a:srgbClr val="CBD5E1"/>
-                </a:solidFill>
-              </a:defRPr>
-            </a:pPr>
-            <a:r>
-              <a:t>• A02: Security Misconfiguration</a:t>
-            </a:r>
-          </a:p>
-          <a:p>
-            <a:pPr>
-              <a:spcAft>
-                <a:spcPts val="600"/>
-              </a:spcAft>
-              <a:defRPr sz="1200">
-                <a:solidFill>
-                  <a:srgbClr val="CBD5E1"/>
-                </a:solidFill>
-              </a:defRPr>
-            </a:pPr>
-            <a:r>
-              <a:t>• Ascenso al puesto #2</a:t>
-            </a:r>
-          </a:p>
-          <a:p>
-            <a:pPr>
-              <a:spcAft>
-                <a:spcPts val="600"/>
-              </a:spcAft>
-              <a:defRPr sz="1200">
-                <a:solidFill>
-                  <a:srgbClr val="CBD5E1"/>
-                </a:solidFill>
-              </a:defRPr>
-            </a:pPr>
-            <a:r>
-              <a:t>• Impacto estructural</a:t>
+              <a:t>Fallas en Cadena de Suministro (A03) y Mal Manejo de Excepciones (A10).</a:t>
             </a:r>
           </a:p>
         </p:txBody>
@@ -5906,8 +5638,8 @@
         </p:nvSpPr>
         <p:spPr>
           <a:xfrm>
-            <a:off x="5120640" y="1645920"/>
-            <a:ext cx="2011680" cy="4572000"/>
+            <a:off x="8823960" y="1645920"/>
+            <a:ext cx="2560320" cy="4480560"/>
           </a:xfrm>
           <a:prstGeom prst="roundRect">
             <a:avLst/>
@@ -5936,450 +5668,51 @@
           </a:fontRef>
         </p:style>
         <p:txBody>
-          <a:bodyPr rtlCol="0" anchor="ctr" wrap="square" lIns="228600" rIns="228600" tIns="201168" bIns="201168"/>
+          <a:bodyPr rtlCol="0" anchor="ctr" wrap="square" lIns="182880" rIns="182880" tIns="274320"/>
           <a:lstStyle/>
           <a:p>
             <a:pPr algn="ctr">
               <a:spcAft>
                 <a:spcPts val="800"/>
               </a:spcAft>
-              <a:defRPr sz="1500" b="1">
-                <a:solidFill>
-                  <a:srgbClr val="F59E0B"/>
-                </a:solidFill>
-              </a:defRPr>
-            </a:pPr>
-            <a:r>
-              <a:t>Orador 3</a:t>
+              <a:defRPr sz="3600" b="1">
+                <a:solidFill>
+                  <a:srgbClr val="EF4444"/>
+                </a:solidFill>
+              </a:defRPr>
+            </a:pPr>
+            <a:r>
+              <a:t>100%</a:t>
             </a:r>
           </a:p>
           <a:p>
             <a:pPr>
               <a:spcAft>
-                <a:spcPts val="800"/>
+                <a:spcPts val="1200"/>
               </a:spcAft>
-              <a:defRPr sz="950" b="1">
+              <a:defRPr sz="1300" b="1">
+                <a:solidFill>
+                  <a:srgbClr val="F1F5F9"/>
+                </a:solidFill>
+              </a:defRPr>
+            </a:pPr>
+            <a:r>
+              <a:t>Prevalencia en Puesto #1 y #2</a:t>
+            </a:r>
+          </a:p>
+          <a:p>
+            <a:pPr>
+              <a:lnSpc>
+                <a:spcPct val="125000"/>
+              </a:lnSpc>
+              <a:defRPr sz="1100">
                 <a:solidFill>
                   <a:srgbClr val="94A3B8"/>
                 </a:solidFill>
               </a:defRPr>
             </a:pPr>
             <a:r>
-              <a:t>[Top 3 y 4]</a:t>
-            </a:r>
-          </a:p>
-          <a:p>
-            <a:pPr>
-              <a:spcAft>
-                <a:spcPts val="600"/>
-              </a:spcAft>
-              <a:defRPr sz="1200">
-                <a:solidFill>
-                  <a:srgbClr val="CBD5E1"/>
-                </a:solidFill>
-              </a:defRPr>
-            </a:pPr>
-            <a:r>
-              <a:t>• A03: Software Supply Chain</a:t>
-            </a:r>
-          </a:p>
-          <a:p>
-            <a:pPr>
-              <a:spcAft>
-                <a:spcPts val="600"/>
-              </a:spcAft>
-              <a:defRPr sz="1200">
-                <a:solidFill>
-                  <a:srgbClr val="CBD5E1"/>
-                </a:solidFill>
-              </a:defRPr>
-            </a:pPr>
-            <a:r>
-              <a:t>• Nueva categoría 2025</a:t>
-            </a:r>
-          </a:p>
-          <a:p>
-            <a:pPr>
-              <a:spcAft>
-                <a:spcPts val="600"/>
-              </a:spcAft>
-              <a:defRPr sz="1200">
-                <a:solidFill>
-                  <a:srgbClr val="CBD5E1"/>
-                </a:solidFill>
-              </a:defRPr>
-            </a:pPr>
-            <a:r>
-              <a:t>• Caso SolarWinds &amp; SBOM</a:t>
-            </a:r>
-          </a:p>
-          <a:p>
-            <a:pPr>
-              <a:spcAft>
-                <a:spcPts val="600"/>
-              </a:spcAft>
-              <a:defRPr sz="1200">
-                <a:solidFill>
-                  <a:srgbClr val="CBD5E1"/>
-                </a:solidFill>
-              </a:defRPr>
-            </a:pPr>
-            <a:r>
-              <a:t>• A04: Cryptographic Failures</a:t>
-            </a:r>
-          </a:p>
-          <a:p>
-            <a:pPr>
-              <a:spcAft>
-                <a:spcPts val="600"/>
-              </a:spcAft>
-              <a:defRPr sz="1200">
-                <a:solidFill>
-                  <a:srgbClr val="CBD5E1"/>
-                </a:solidFill>
-              </a:defRPr>
-            </a:pPr>
-            <a:r>
-              <a:t>• Algoritmos obsoletos</a:t>
-            </a:r>
-          </a:p>
-          <a:p>
-            <a:pPr>
-              <a:spcAft>
-                <a:spcPts val="600"/>
-              </a:spcAft>
-              <a:defRPr sz="1200">
-                <a:solidFill>
-                  <a:srgbClr val="CBD5E1"/>
-                </a:solidFill>
-              </a:defRPr>
-            </a:pPr>
-            <a:r>
-              <a:t>• Fugas de claves y TLS</a:t>
-            </a:r>
-          </a:p>
-        </p:txBody>
-      </p:sp>
-      <p:sp>
-        <p:nvSpPr>
-          <p:cNvPr id="9" name="Rounded Rectangle 8"/>
-          <p:cNvSpPr/>
-          <p:nvPr/>
-        </p:nvSpPr>
-        <p:spPr>
-          <a:xfrm>
-            <a:off x="7315200" y="1645920"/>
-            <a:ext cx="2011680" cy="4572000"/>
-          </a:xfrm>
-          <a:prstGeom prst="roundRect">
-            <a:avLst/>
-          </a:prstGeom>
-          <a:solidFill>
-            <a:srgbClr val="131D33"/>
-          </a:solidFill>
-          <a:ln w="12700">
-            <a:solidFill>
-              <a:srgbClr val="24324D"/>
-            </a:solidFill>
-          </a:ln>
-        </p:spPr>
-        <p:style>
-          <a:lnRef idx="1">
-            <a:schemeClr val="accent1"/>
-          </a:lnRef>
-          <a:fillRef idx="3">
-            <a:schemeClr val="accent1"/>
-          </a:fillRef>
-          <a:effectRef idx="2">
-            <a:schemeClr val="accent1"/>
-          </a:effectRef>
-          <a:fontRef idx="minor">
-            <a:schemeClr val="lt1"/>
-          </a:fontRef>
-        </p:style>
-        <p:txBody>
-          <a:bodyPr rtlCol="0" anchor="ctr" wrap="square" lIns="228600" rIns="228600" tIns="201168" bIns="201168"/>
-          <a:lstStyle/>
-          <a:p>
-            <a:pPr algn="ctr">
-              <a:spcAft>
-                <a:spcPts val="800"/>
-              </a:spcAft>
-              <a:defRPr sz="1500" b="1">
-                <a:solidFill>
-                  <a:srgbClr val="8B5CF6"/>
-                </a:solidFill>
-              </a:defRPr>
-            </a:pPr>
-            <a:r>
-              <a:t>Orador 4</a:t>
-            </a:r>
-          </a:p>
-          <a:p>
-            <a:pPr>
-              <a:spcAft>
-                <a:spcPts val="800"/>
-              </a:spcAft>
-              <a:defRPr sz="950" b="1">
-                <a:solidFill>
-                  <a:srgbClr val="94A3B8"/>
-                </a:solidFill>
-              </a:defRPr>
-            </a:pPr>
-            <a:r>
-              <a:t>[Top 5 y 6]</a:t>
-            </a:r>
-          </a:p>
-          <a:p>
-            <a:pPr>
-              <a:spcAft>
-                <a:spcPts val="600"/>
-              </a:spcAft>
-              <a:defRPr sz="1200">
-                <a:solidFill>
-                  <a:srgbClr val="CBD5E1"/>
-                </a:solidFill>
-              </a:defRPr>
-            </a:pPr>
-            <a:r>
-              <a:t>• A05: Injection (SQLi/XSS)</a:t>
-            </a:r>
-          </a:p>
-          <a:p>
-            <a:pPr>
-              <a:spcAft>
-                <a:spcPts val="600"/>
-              </a:spcAft>
-              <a:defRPr sz="1200">
-                <a:solidFill>
-                  <a:srgbClr val="CBD5E1"/>
-                </a:solidFill>
-              </a:defRPr>
-            </a:pPr>
-            <a:r>
-              <a:t>• +44k CVEs históricos</a:t>
-            </a:r>
-          </a:p>
-          <a:p>
-            <a:pPr>
-              <a:spcAft>
-                <a:spcPts val="600"/>
-              </a:spcAft>
-              <a:defRPr sz="1200">
-                <a:solidFill>
-                  <a:srgbClr val="CBD5E1"/>
-                </a:solidFill>
-              </a:defRPr>
-            </a:pPr>
-            <a:r>
-              <a:t>• Prepared Statements</a:t>
-            </a:r>
-          </a:p>
-          <a:p>
-            <a:pPr>
-              <a:spcAft>
-                <a:spcPts val="600"/>
-              </a:spcAft>
-              <a:defRPr sz="1200">
-                <a:solidFill>
-                  <a:srgbClr val="CBD5E1"/>
-                </a:solidFill>
-              </a:defRPr>
-            </a:pPr>
-            <a:r>
-              <a:t>• A06: Insecure Design</a:t>
-            </a:r>
-          </a:p>
-          <a:p>
-            <a:pPr>
-              <a:spcAft>
-                <a:spcPts val="600"/>
-              </a:spcAft>
-              <a:defRPr sz="1200">
-                <a:solidFill>
-                  <a:srgbClr val="CBD5E1"/>
-                </a:solidFill>
-              </a:defRPr>
-            </a:pPr>
-            <a:r>
-              <a:t>• Diseño vs Implementación</a:t>
-            </a:r>
-          </a:p>
-          <a:p>
-            <a:pPr>
-              <a:spcAft>
-                <a:spcPts val="600"/>
-              </a:spcAft>
-              <a:defRPr sz="1200">
-                <a:solidFill>
-                  <a:srgbClr val="CBD5E1"/>
-                </a:solidFill>
-              </a:defRPr>
-            </a:pPr>
-            <a:r>
-              <a:t>• Modelado de Amenazas</a:t>
-            </a:r>
-          </a:p>
-        </p:txBody>
-      </p:sp>
-      <p:sp>
-        <p:nvSpPr>
-          <p:cNvPr id="10" name="Rounded Rectangle 9"/>
-          <p:cNvSpPr/>
-          <p:nvPr/>
-        </p:nvSpPr>
-        <p:spPr>
-          <a:xfrm>
-            <a:off x="9509760" y="1645920"/>
-            <a:ext cx="2011680" cy="4572000"/>
-          </a:xfrm>
-          <a:prstGeom prst="roundRect">
-            <a:avLst/>
-          </a:prstGeom>
-          <a:solidFill>
-            <a:srgbClr val="131D33"/>
-          </a:solidFill>
-          <a:ln w="12700">
-            <a:solidFill>
-              <a:srgbClr val="24324D"/>
-            </a:solidFill>
-          </a:ln>
-        </p:spPr>
-        <p:style>
-          <a:lnRef idx="1">
-            <a:schemeClr val="accent1"/>
-          </a:lnRef>
-          <a:fillRef idx="3">
-            <a:schemeClr val="accent1"/>
-          </a:fillRef>
-          <a:effectRef idx="2">
-            <a:schemeClr val="accent1"/>
-          </a:effectRef>
-          <a:fontRef idx="minor">
-            <a:schemeClr val="lt1"/>
-          </a:fontRef>
-        </p:style>
-        <p:txBody>
-          <a:bodyPr rtlCol="0" anchor="ctr" wrap="square" lIns="228600" rIns="228600" tIns="201168" bIns="201168"/>
-          <a:lstStyle/>
-          <a:p>
-            <a:pPr algn="ctr">
-              <a:spcAft>
-                <a:spcPts val="800"/>
-              </a:spcAft>
-              <a:defRPr sz="1500" b="1">
-                <a:solidFill>
-                  <a:srgbClr val="10B981"/>
-                </a:solidFill>
-              </a:defRPr>
-            </a:pPr>
-            <a:r>
-              <a:t>Orador 5</a:t>
-            </a:r>
-          </a:p>
-          <a:p>
-            <a:pPr>
-              <a:spcAft>
-                <a:spcPts val="800"/>
-              </a:spcAft>
-              <a:defRPr sz="950" b="1">
-                <a:solidFill>
-                  <a:srgbClr val="94A3B8"/>
-                </a:solidFill>
-              </a:defRPr>
-            </a:pPr>
-            <a:r>
-              <a:t>[Top 7-10 + Demo]</a:t>
-            </a:r>
-          </a:p>
-          <a:p>
-            <a:pPr>
-              <a:spcAft>
-                <a:spcPts val="600"/>
-              </a:spcAft>
-              <a:defRPr sz="1200">
-                <a:solidFill>
-                  <a:srgbClr val="CBD5E1"/>
-                </a:solidFill>
-              </a:defRPr>
-            </a:pPr>
-            <a:r>
-              <a:t>• A07: Authentication Failures</a:t>
-            </a:r>
-          </a:p>
-          <a:p>
-            <a:pPr>
-              <a:spcAft>
-                <a:spcPts val="600"/>
-              </a:spcAft>
-              <a:defRPr sz="1200">
-                <a:solidFill>
-                  <a:srgbClr val="CBD5E1"/>
-                </a:solidFill>
-              </a:defRPr>
-            </a:pPr>
-            <a:r>
-              <a:t>• A08: Integridad Software/Datos</a:t>
-            </a:r>
-          </a:p>
-          <a:p>
-            <a:pPr>
-              <a:spcAft>
-                <a:spcPts val="600"/>
-              </a:spcAft>
-              <a:defRPr sz="1200">
-                <a:solidFill>
-                  <a:srgbClr val="CBD5E1"/>
-                </a:solidFill>
-              </a:defRPr>
-            </a:pPr>
-            <a:r>
-              <a:t>• A09: Registro y Alertas</a:t>
-            </a:r>
-          </a:p>
-          <a:p>
-            <a:pPr>
-              <a:spcAft>
-                <a:spcPts val="600"/>
-              </a:spcAft>
-              <a:defRPr sz="1200">
-                <a:solidFill>
-                  <a:srgbClr val="CBD5E1"/>
-                </a:solidFill>
-              </a:defRPr>
-            </a:pPr>
-            <a:r>
-              <a:t>• A10: Condiciones Excepcionales</a:t>
-            </a:r>
-          </a:p>
-          <a:p>
-            <a:pPr>
-              <a:spcAft>
-                <a:spcPts val="600"/>
-              </a:spcAft>
-              <a:defRPr sz="1200">
-                <a:solidFill>
-                  <a:srgbClr val="CBD5E1"/>
-                </a:solidFill>
-              </a:defRPr>
-            </a:pPr>
-            <a:r>
-              <a:t>• Conclusiones Generales</a:t>
-            </a:r>
-          </a:p>
-          <a:p>
-            <a:pPr>
-              <a:spcAft>
-                <a:spcPts val="600"/>
-              </a:spcAft>
-              <a:defRPr sz="1200">
-                <a:solidFill>
-                  <a:srgbClr val="CBD5E1"/>
-                </a:solidFill>
-              </a:defRPr>
-            </a:pPr>
-            <a:r>
-              <a:t>• Demo Simulador Web</a:t>
+              <a:t>El total de aplicaciones probadas presentó fallas en control de acceso y configuración.</a:t>
             </a:r>
           </a:p>
         </p:txBody>
@@ -6453,8 +5786,8 @@
         </p:nvSpPr>
         <p:spPr>
           <a:xfrm>
-            <a:off x="731520" y="365760"/>
-            <a:ext cx="2926080" cy="365760"/>
+            <a:off x="731520" y="384048"/>
+            <a:ext cx="3108960" cy="320040"/>
           </a:xfrm>
           <a:prstGeom prst="roundRect">
             <a:avLst/>
@@ -6464,7 +5797,7 @@
           </a:solidFill>
           <a:ln w="12700">
             <a:solidFill>
-              <a:srgbClr val="06B6D4"/>
+              <a:srgbClr val="10B981"/>
             </a:solidFill>
           </a:ln>
         </p:spPr>
@@ -6483,32 +5816,136 @@
           </a:fontRef>
         </p:style>
         <p:txBody>
-          <a:bodyPr rtlCol="0" anchor="ctr" wrap="square"/>
+          <a:bodyPr rtlCol="0" anchor="ctr"/>
           <a:lstStyle/>
           <a:p>
             <a:pPr algn="ctr">
-              <a:defRPr sz="1050" b="1">
-                <a:solidFill>
-                  <a:srgbClr val="06B6D4"/>
-                </a:solidFill>
-              </a:defRPr>
-            </a:pPr>
-            <a:r>
-              <a:t>ORADOR 1</a:t>
-            </a:r>
-          </a:p>
-        </p:txBody>
-      </p:sp>
-      <p:sp>
-        <p:nvSpPr>
-          <p:cNvPr id="4" name="Rounded Rectangle 3"/>
+              <a:defRPr sz="1000" b="1">
+                <a:solidFill>
+                  <a:srgbClr val="10B981"/>
+                </a:solidFill>
+              </a:defRPr>
+            </a:pPr>
+            <a:r>
+              <a:t>CONCEPTOS FUNDAMENTALES</a:t>
+            </a:r>
+          </a:p>
+        </p:txBody>
+      </p:sp>
+      <p:sp>
+        <p:nvSpPr>
+          <p:cNvPr id="4" name="TextBox 3"/>
+          <p:cNvSpPr txBox="1"/>
+          <p:nvPr/>
+        </p:nvSpPr>
+        <p:spPr>
+          <a:xfrm>
+            <a:off x="731520" y="749808"/>
+            <a:ext cx="10698480" cy="685800"/>
+          </a:xfrm>
+          <a:prstGeom prst="rect">
+            <a:avLst/>
+          </a:prstGeom>
+          <a:noFill/>
+        </p:spPr>
+        <p:txBody>
+          <a:bodyPr wrap="square">
+            <a:spAutoFit/>
+          </a:bodyPr>
+          <a:lstStyle/>
+          <a:p>
+            <a:pPr>
+              <a:defRPr sz="2200" b="1">
+                <a:solidFill>
+                  <a:srgbClr val="F1F5F9"/>
+                </a:solidFill>
+              </a:defRPr>
+            </a:pPr>
+            <a:r>
+              <a:t>Fundamentos Arquitectónicos: Riesgo vs. Vulnerabilidad</a:t>
+            </a:r>
+          </a:p>
+        </p:txBody>
+      </p:sp>
+      <p:sp>
+        <p:nvSpPr>
+          <p:cNvPr id="5" name="Rounded Rectangle 4"/>
           <p:cNvSpPr/>
           <p:nvPr/>
         </p:nvSpPr>
         <p:spPr>
           <a:xfrm>
-            <a:off x="3840480" y="365760"/>
-            <a:ext cx="3200400" cy="365760"/>
+            <a:off x="731520" y="1554480"/>
+            <a:ext cx="10698480" cy="1280160"/>
+          </a:xfrm>
+          <a:prstGeom prst="roundRect">
+            <a:avLst/>
+          </a:prstGeom>
+          <a:solidFill>
+            <a:srgbClr val="182541"/>
+          </a:solidFill>
+          <a:ln w="12700">
+            <a:solidFill>
+              <a:srgbClr val="10B981"/>
+            </a:solidFill>
+          </a:ln>
+        </p:spPr>
+        <p:style>
+          <a:lnRef idx="1">
+            <a:schemeClr val="accent1"/>
+          </a:lnRef>
+          <a:fillRef idx="3">
+            <a:schemeClr val="accent1"/>
+          </a:fillRef>
+          <a:effectRef idx="2">
+            <a:schemeClr val="accent1"/>
+          </a:effectRef>
+          <a:fontRef idx="minor">
+            <a:schemeClr val="lt1"/>
+          </a:fontRef>
+        </p:style>
+        <p:txBody>
+          <a:bodyPr rtlCol="0" anchor="ctr" tIns="182880" lIns="365760"/>
+          <a:lstStyle/>
+          <a:p>
+            <a:pPr algn="ctr">
+              <a:defRPr sz="1100" b="1">
+                <a:solidFill>
+                  <a:srgbClr val="10B981"/>
+                </a:solidFill>
+              </a:defRPr>
+            </a:pPr>
+            <a:r>
+              <a:t>FÓRMULA CONCEPTUAL DE EVALUACIÓN OWASP:</a:t>
+            </a:r>
+          </a:p>
+          <a:p>
+            <a:pPr>
+              <a:spcBef>
+                <a:spcPts val="400"/>
+              </a:spcBef>
+              <a:defRPr sz="1600" b="1">
+                <a:solidFill>
+                  <a:srgbClr val="F1F5F9"/>
+                </a:solidFill>
+              </a:defRPr>
+            </a:pPr>
+            <a:r>
+              <a:t>RIESGO = Agente Atacante + Vector de Entrada + Facilidad de Explotación + Daño al Negocio</a:t>
+            </a:r>
+          </a:p>
+        </p:txBody>
+      </p:sp>
+      <p:sp>
+        <p:nvSpPr>
+          <p:cNvPr id="6" name="Rounded Rectangle 5"/>
+          <p:cNvSpPr/>
+          <p:nvPr/>
+        </p:nvSpPr>
+        <p:spPr>
+          <a:xfrm>
+            <a:off x="731520" y="3017520"/>
+            <a:ext cx="5212080" cy="3200400"/>
           </a:xfrm>
           <a:prstGeom prst="roundRect">
             <a:avLst/>
@@ -6516,7 +5953,7 @@
           <a:solidFill>
             <a:srgbClr val="131D33"/>
           </a:solidFill>
-          <a:ln w="12700">
+          <a:ln>
             <a:solidFill>
               <a:srgbClr val="24324D"/>
             </a:solidFill>
@@ -6537,67 +5974,80 @@
           </a:fontRef>
         </p:style>
         <p:txBody>
-          <a:bodyPr rtlCol="0" anchor="ctr"/>
+          <a:bodyPr rtlCol="0" anchor="ctr" lIns="274320" tIns="228600"/>
           <a:lstStyle/>
           <a:p>
             <a:pPr algn="ctr">
-              <a:defRPr sz="1000" b="1">
-                <a:solidFill>
-                  <a:srgbClr val="94A3B8"/>
-                </a:solidFill>
-              </a:defRPr>
-            </a:pPr>
-            <a:r>
-              <a:t>FUNDAMENTOS DE SEGURIDAD</a:t>
-            </a:r>
-          </a:p>
-        </p:txBody>
-      </p:sp>
-      <p:sp>
-        <p:nvSpPr>
-          <p:cNvPr id="5" name="TextBox 4"/>
-          <p:cNvSpPr txBox="1"/>
+              <a:spcAft>
+                <a:spcPts val="800"/>
+              </a:spcAft>
+              <a:defRPr sz="1400" b="1">
+                <a:solidFill>
+                  <a:srgbClr val="F59E0B"/>
+                </a:solidFill>
+              </a:defRPr>
+            </a:pPr>
+            <a:r>
+              <a:t>VULNERABILIDAD (Falla Técnica)</a:t>
+            </a:r>
+          </a:p>
+          <a:p>
+            <a:pPr>
+              <a:spcAft>
+                <a:spcPts val="600"/>
+              </a:spcAft>
+              <a:defRPr sz="1150">
+                <a:solidFill>
+                  <a:srgbClr val="CBD5E1"/>
+                </a:solidFill>
+              </a:defRPr>
+            </a:pPr>
+            <a:r>
+              <a:t>• Debilidad interna en el código fuente, configuración o diseño del sistema.</a:t>
+            </a:r>
+          </a:p>
+          <a:p>
+            <a:pPr>
+              <a:spcAft>
+                <a:spcPts val="600"/>
+              </a:spcAft>
+              <a:defRPr sz="1150">
+                <a:solidFill>
+                  <a:srgbClr val="CBD5E1"/>
+                </a:solidFill>
+              </a:defRPr>
+            </a:pPr>
+            <a:r>
+              <a:t>• Existe de forma pasiva aunque nadie la esté explotando en este momento.</a:t>
+            </a:r>
+          </a:p>
+          <a:p>
+            <a:pPr>
+              <a:spcAft>
+                <a:spcPts val="600"/>
+              </a:spcAft>
+              <a:defRPr sz="1150">
+                <a:solidFill>
+                  <a:srgbClr val="CBD5E1"/>
+                </a:solidFill>
+              </a:defRPr>
+            </a:pPr>
+            <a:r>
+              <a:t>• Ejemplo: Un puerto innecesario abierto en un contenedor o una variable sin sanear.</a:t>
+            </a:r>
+          </a:p>
+        </p:txBody>
+      </p:sp>
+      <p:sp>
+        <p:nvSpPr>
+          <p:cNvPr id="7" name="Rounded Rectangle 6"/>
+          <p:cNvSpPr/>
           <p:nvPr/>
         </p:nvSpPr>
         <p:spPr>
           <a:xfrm>
-            <a:off x="731520" y="777240"/>
-            <a:ext cx="10698480" cy="731520"/>
-          </a:xfrm>
-          <a:prstGeom prst="rect">
-            <a:avLst/>
-          </a:prstGeom>
-          <a:noFill/>
-        </p:spPr>
-        <p:txBody>
-          <a:bodyPr wrap="square">
-            <a:spAutoFit/>
-          </a:bodyPr>
-          <a:lstStyle/>
-          <a:p>
-            <a:pPr>
-              <a:defRPr sz="2400" b="1">
-                <a:solidFill>
-                  <a:srgbClr val="F1F5F9"/>
-                </a:solidFill>
-              </a:defRPr>
-            </a:pPr>
-            <a:r>
-              <a:t>Espacio del Problema: La Superficie de Ataque Moderna</a:t>
-            </a:r>
-          </a:p>
-        </p:txBody>
-      </p:sp>
-      <p:sp>
-        <p:nvSpPr>
-          <p:cNvPr id="6" name="Rounded Rectangle 5"/>
-          <p:cNvSpPr/>
-          <p:nvPr/>
-        </p:nvSpPr>
-        <p:spPr>
-          <a:xfrm>
-            <a:off x="731520" y="1645920"/>
-            <a:ext cx="3383280" cy="4572000"/>
+            <a:off x="6217920" y="3017520"/>
+            <a:ext cx="5212080" cy="3200400"/>
           </a:xfrm>
           <a:prstGeom prst="roundRect">
             <a:avLst/>
@@ -6605,7 +6055,7 @@
           <a:solidFill>
             <a:srgbClr val="131D33"/>
           </a:solidFill>
-          <a:ln w="12700">
+          <a:ln>
             <a:solidFill>
               <a:srgbClr val="24324D"/>
             </a:solidFill>
@@ -6626,36 +6076,21 @@
           </a:fontRef>
         </p:style>
         <p:txBody>
-          <a:bodyPr rtlCol="0" anchor="ctr" wrap="square" lIns="228600" rIns="228600" tIns="201168" bIns="201168"/>
+          <a:bodyPr rtlCol="0" anchor="ctr" lIns="274320" tIns="228600"/>
           <a:lstStyle/>
           <a:p>
             <a:pPr algn="ctr">
               <a:spcAft>
                 <a:spcPts val="800"/>
               </a:spcAft>
-              <a:defRPr sz="1500" b="1">
-                <a:solidFill>
-                  <a:srgbClr val="06B6D4"/>
-                </a:solidFill>
-              </a:defRPr>
-            </a:pPr>
-            <a:r>
-              <a:t>¿Qué es OWASP?</a:t>
-            </a:r>
-          </a:p>
-          <a:p>
-            <a:pPr>
-              <a:spcAft>
-                <a:spcPts val="800"/>
-              </a:spcAft>
-              <a:defRPr sz="950" b="1">
-                <a:solidFill>
-                  <a:srgbClr val="94A3B8"/>
-                </a:solidFill>
-              </a:defRPr>
-            </a:pPr>
-            <a:r>
-              <a:t>[Estándar Global]</a:t>
+              <a:defRPr sz="1400" b="1">
+                <a:solidFill>
+                  <a:srgbClr val="EF4444"/>
+                </a:solidFill>
+              </a:defRPr>
+            </a:pPr>
+            <a:r>
+              <a:t>RIESGO (Impacto Real)</a:t>
             </a:r>
           </a:p>
           <a:p>
@@ -6663,14 +6098,14 @@
               <a:spcAft>
                 <a:spcPts val="600"/>
               </a:spcAft>
-              <a:defRPr sz="1200">
+              <a:defRPr sz="1150">
                 <a:solidFill>
                   <a:srgbClr val="CBD5E1"/>
                 </a:solidFill>
               </a:defRPr>
             </a:pPr>
             <a:r>
-              <a:t>• Open Worldwide Application Security Project.</a:t>
+              <a:t>• Mide la probabilidad y severidad de que un atacante comprometa activos críticos.</a:t>
             </a:r>
           </a:p>
           <a:p>
@@ -6678,14 +6113,14 @@
               <a:spcAft>
                 <a:spcPts val="600"/>
               </a:spcAft>
-              <a:defRPr sz="1200">
+              <a:defRPr sz="1150">
                 <a:solidFill>
                   <a:srgbClr val="CBD5E1"/>
                 </a:solidFill>
               </a:defRPr>
             </a:pPr>
             <a:r>
-              <a:t>• Organización global sin fines de lucro enfocada en la seguridad del software.</a:t>
+              <a:t>• El Top 10:2025 prioriza causas raíz: atacar el problema de fondo, no solo el bug sintáctico.</a:t>
             </a:r>
           </a:p>
           <a:p>
@@ -6693,293 +6128,14 @@
               <a:spcAft>
                 <a:spcPts val="600"/>
               </a:spcAft>
-              <a:defRPr sz="1200">
+              <a:defRPr sz="1150">
                 <a:solidFill>
                   <a:srgbClr val="CBD5E1"/>
                 </a:solidFill>
               </a:defRPr>
             </a:pPr>
             <a:r>
-              <a:t>• El Top 10 es el estándar de facto adoptado por la industria internacional.</a:t>
-            </a:r>
-          </a:p>
-          <a:p>
-            <a:pPr>
-              <a:spcAft>
-                <a:spcPts val="600"/>
-              </a:spcAft>
-              <a:defRPr sz="1200">
-                <a:solidFill>
-                  <a:srgbClr val="CBD5E1"/>
-                </a:solidFill>
-              </a:defRPr>
-            </a:pPr>
-            <a:r>
-              <a:t>• Objetivo: Educar a desarrolladores y arquitectos en mitigación preventiva.</a:t>
-            </a:r>
-          </a:p>
-        </p:txBody>
-      </p:sp>
-      <p:sp>
-        <p:nvSpPr>
-          <p:cNvPr id="7" name="Rounded Rectangle 6"/>
-          <p:cNvSpPr/>
-          <p:nvPr/>
-        </p:nvSpPr>
-        <p:spPr>
-          <a:xfrm>
-            <a:off x="4389120" y="1645920"/>
-            <a:ext cx="3383280" cy="4572000"/>
-          </a:xfrm>
-          <a:prstGeom prst="roundRect">
-            <a:avLst/>
-          </a:prstGeom>
-          <a:solidFill>
-            <a:srgbClr val="131D33"/>
-          </a:solidFill>
-          <a:ln w="12700">
-            <a:solidFill>
-              <a:srgbClr val="24324D"/>
-            </a:solidFill>
-          </a:ln>
-        </p:spPr>
-        <p:style>
-          <a:lnRef idx="1">
-            <a:schemeClr val="accent1"/>
-          </a:lnRef>
-          <a:fillRef idx="3">
-            <a:schemeClr val="accent1"/>
-          </a:fillRef>
-          <a:effectRef idx="2">
-            <a:schemeClr val="accent1"/>
-          </a:effectRef>
-          <a:fontRef idx="minor">
-            <a:schemeClr val="lt1"/>
-          </a:fontRef>
-        </p:style>
-        <p:txBody>
-          <a:bodyPr rtlCol="0" anchor="ctr" wrap="square" lIns="228600" rIns="228600" tIns="201168" bIns="201168"/>
-          <a:lstStyle/>
-          <a:p>
-            <a:pPr algn="ctr">
-              <a:spcAft>
-                <a:spcPts val="800"/>
-              </a:spcAft>
-              <a:defRPr sz="1500" b="1">
-                <a:solidFill>
-                  <a:srgbClr val="3B82F6"/>
-                </a:solidFill>
-              </a:defRPr>
-            </a:pPr>
-            <a:r>
-              <a:t>El Espacio del Problema</a:t>
-            </a:r>
-          </a:p>
-          <a:p>
-            <a:pPr>
-              <a:spcAft>
-                <a:spcPts val="800"/>
-              </a:spcAft>
-              <a:defRPr sz="950" b="1">
-                <a:solidFill>
-                  <a:srgbClr val="94A3B8"/>
-                </a:solidFill>
-              </a:defRPr>
-            </a:pPr>
-            <a:r>
-              <a:t>[Ecosistema Actual]</a:t>
-            </a:r>
-          </a:p>
-          <a:p>
-            <a:pPr>
-              <a:spcAft>
-                <a:spcPts val="600"/>
-              </a:spcAft>
-              <a:defRPr sz="1200">
-                <a:solidFill>
-                  <a:srgbClr val="CBD5E1"/>
-                </a:solidFill>
-              </a:defRPr>
-            </a:pPr>
-            <a:r>
-              <a:t>• Aplicaciones web acopladas a APIs y microservicios expuestos a Internet.</a:t>
-            </a:r>
-          </a:p>
-          <a:p>
-            <a:pPr>
-              <a:spcAft>
-                <a:spcPts val="600"/>
-              </a:spcAft>
-              <a:defRPr sz="1200">
-                <a:solidFill>
-                  <a:srgbClr val="CBD5E1"/>
-                </a:solidFill>
-              </a:defRPr>
-            </a:pPr>
-            <a:r>
-              <a:t>• Dependencia masiva de paquetes de terceros y repositorios públicos.</a:t>
-            </a:r>
-          </a:p>
-          <a:p>
-            <a:pPr>
-              <a:spcAft>
-                <a:spcPts val="600"/>
-              </a:spcAft>
-              <a:defRPr sz="1200">
-                <a:solidFill>
-                  <a:srgbClr val="CBD5E1"/>
-                </a:solidFill>
-              </a:defRPr>
-            </a:pPr>
-            <a:r>
-              <a:t>• Infraestructura cloud distribuida con pipelines CI/CD automatizados.</a:t>
-            </a:r>
-          </a:p>
-          <a:p>
-            <a:pPr>
-              <a:spcAft>
-                <a:spcPts val="600"/>
-              </a:spcAft>
-              <a:defRPr sz="1200">
-                <a:solidFill>
-                  <a:srgbClr val="CBD5E1"/>
-                </a:solidFill>
-              </a:defRPr>
-            </a:pPr>
-            <a:r>
-              <a:t>• Cada capa adicional expande exponencialmente la superficie de ataque.</a:t>
-            </a:r>
-          </a:p>
-        </p:txBody>
-      </p:sp>
-      <p:sp>
-        <p:nvSpPr>
-          <p:cNvPr id="8" name="Rounded Rectangle 7"/>
-          <p:cNvSpPr/>
-          <p:nvPr/>
-        </p:nvSpPr>
-        <p:spPr>
-          <a:xfrm>
-            <a:off x="8046720" y="1645920"/>
-            <a:ext cx="3383280" cy="4572000"/>
-          </a:xfrm>
-          <a:prstGeom prst="roundRect">
-            <a:avLst/>
-          </a:prstGeom>
-          <a:solidFill>
-            <a:srgbClr val="131D33"/>
-          </a:solidFill>
-          <a:ln w="12700">
-            <a:solidFill>
-              <a:srgbClr val="24324D"/>
-            </a:solidFill>
-          </a:ln>
-        </p:spPr>
-        <p:style>
-          <a:lnRef idx="1">
-            <a:schemeClr val="accent1"/>
-          </a:lnRef>
-          <a:fillRef idx="3">
-            <a:schemeClr val="accent1"/>
-          </a:fillRef>
-          <a:effectRef idx="2">
-            <a:schemeClr val="accent1"/>
-          </a:effectRef>
-          <a:fontRef idx="minor">
-            <a:schemeClr val="lt1"/>
-          </a:fontRef>
-        </p:style>
-        <p:txBody>
-          <a:bodyPr rtlCol="0" anchor="ctr" wrap="square" lIns="228600" rIns="228600" tIns="201168" bIns="201168"/>
-          <a:lstStyle/>
-          <a:p>
-            <a:pPr algn="ctr">
-              <a:spcAft>
-                <a:spcPts val="800"/>
-              </a:spcAft>
-              <a:defRPr sz="1500" b="1">
-                <a:solidFill>
-                  <a:srgbClr val="10B981"/>
-                </a:solidFill>
-              </a:defRPr>
-            </a:pPr>
-            <a:r>
-              <a:t>Riesgo vs Vulnerabilidad</a:t>
-            </a:r>
-          </a:p>
-          <a:p>
-            <a:pPr>
-              <a:spcAft>
-                <a:spcPts val="800"/>
-              </a:spcAft>
-              <a:defRPr sz="950" b="1">
-                <a:solidFill>
-                  <a:srgbClr val="94A3B8"/>
-                </a:solidFill>
-              </a:defRPr>
-            </a:pPr>
-            <a:r>
-              <a:t>[Diferenciación Clave]</a:t>
-            </a:r>
-          </a:p>
-          <a:p>
-            <a:pPr>
-              <a:spcAft>
-                <a:spcPts val="600"/>
-              </a:spcAft>
-              <a:defRPr sz="1200">
-                <a:solidFill>
-                  <a:srgbClr val="CBD5E1"/>
-                </a:solidFill>
-              </a:defRPr>
-            </a:pPr>
-            <a:r>
-              <a:t>• Vulnerabilidad: Debilidad o fallo técnico en el código o configuración.</a:t>
-            </a:r>
-          </a:p>
-          <a:p>
-            <a:pPr>
-              <a:spcAft>
-                <a:spcPts val="600"/>
-              </a:spcAft>
-              <a:defRPr sz="1200">
-                <a:solidFill>
-                  <a:srgbClr val="CBD5E1"/>
-                </a:solidFill>
-              </a:defRPr>
-            </a:pPr>
-            <a:r>
-              <a:t>• Riesgo = Vector de Ataque + Facilidad de Explotación + Impacto al Negocio.</a:t>
-            </a:r>
-          </a:p>
-          <a:p>
-            <a:pPr>
-              <a:spcAft>
-                <a:spcPts val="600"/>
-              </a:spcAft>
-              <a:defRPr sz="1200">
-                <a:solidFill>
-                  <a:srgbClr val="CBD5E1"/>
-                </a:solidFill>
-              </a:defRPr>
-            </a:pPr>
-            <a:r>
-              <a:t>• El OWASP Top 10 prioriza Riesgos: el daño real potencial a datos y operaciones.</a:t>
-            </a:r>
-          </a:p>
-          <a:p>
-            <a:pPr>
-              <a:spcAft>
-                <a:spcPts val="600"/>
-              </a:spcAft>
-              <a:defRPr sz="1200">
-                <a:solidFill>
-                  <a:srgbClr val="CBD5E1"/>
-                </a:solidFill>
-              </a:defRPr>
-            </a:pPr>
-            <a:r>
-              <a:t>• No todo bug técnico representa un riesgo crítico.</a:t>
+              <a:t>• Las aplicaciones web modernas integran APIs, Cloud y pipelines CI/CD que maximizan el riesgo.</a:t>
             </a:r>
           </a:p>
         </p:txBody>
@@ -7053,8 +6209,8 @@
         </p:nvSpPr>
         <p:spPr>
           <a:xfrm>
-            <a:off x="731520" y="365760"/>
-            <a:ext cx="2926080" cy="365760"/>
+            <a:off x="731520" y="384048"/>
+            <a:ext cx="3108960" cy="320040"/>
           </a:xfrm>
           <a:prstGeom prst="roundRect">
             <a:avLst/>
@@ -7064,7 +6220,7 @@
           </a:solidFill>
           <a:ln w="12700">
             <a:solidFill>
-              <a:srgbClr val="06B6D4"/>
+              <a:srgbClr val="3B82F6"/>
             </a:solidFill>
           </a:ln>
         </p:spPr>
@@ -7083,86 +6239,32 @@
           </a:fontRef>
         </p:style>
         <p:txBody>
-          <a:bodyPr rtlCol="0" anchor="ctr" wrap="square"/>
+          <a:bodyPr rtlCol="0" anchor="ctr"/>
           <a:lstStyle/>
           <a:p>
             <a:pPr algn="ctr">
-              <a:defRPr sz="1050" b="1">
-                <a:solidFill>
-                  <a:srgbClr val="06B6D4"/>
-                </a:solidFill>
-              </a:defRPr>
-            </a:pPr>
-            <a:r>
-              <a:t>ORADOR 1</a:t>
-            </a:r>
-          </a:p>
-        </p:txBody>
-      </p:sp>
-      <p:sp>
-        <p:nvSpPr>
-          <p:cNvPr id="4" name="Rounded Rectangle 3"/>
-          <p:cNvSpPr/>
+              <a:defRPr sz="1000" b="1">
+                <a:solidFill>
+                  <a:srgbClr val="3B82F6"/>
+                </a:solidFill>
+              </a:defRPr>
+            </a:pPr>
+            <a:r>
+              <a:t>EVOLUCIÓN Y CAMBIOS DE PUESTO</a:t>
+            </a:r>
+          </a:p>
+        </p:txBody>
+      </p:sp>
+      <p:sp>
+        <p:nvSpPr>
+          <p:cNvPr id="4" name="TextBox 3"/>
+          <p:cNvSpPr txBox="1"/>
           <p:nvPr/>
         </p:nvSpPr>
         <p:spPr>
           <a:xfrm>
-            <a:off x="3840480" y="365760"/>
-            <a:ext cx="3200400" cy="365760"/>
-          </a:xfrm>
-          <a:prstGeom prst="roundRect">
-            <a:avLst/>
-          </a:prstGeom>
-          <a:solidFill>
-            <a:srgbClr val="131D33"/>
-          </a:solidFill>
-          <a:ln w="12700">
-            <a:solidFill>
-              <a:srgbClr val="24324D"/>
-            </a:solidFill>
-          </a:ln>
-        </p:spPr>
-        <p:style>
-          <a:lnRef idx="1">
-            <a:schemeClr val="accent1"/>
-          </a:lnRef>
-          <a:fillRef idx="3">
-            <a:schemeClr val="accent1"/>
-          </a:fillRef>
-          <a:effectRef idx="2">
-            <a:schemeClr val="accent1"/>
-          </a:effectRef>
-          <a:fontRef idx="minor">
-            <a:schemeClr val="lt1"/>
-          </a:fontRef>
-        </p:style>
-        <p:txBody>
-          <a:bodyPr rtlCol="0" anchor="ctr"/>
-          <a:lstStyle/>
-          <a:p>
-            <a:pPr algn="ctr">
-              <a:defRPr sz="1000" b="1">
-                <a:solidFill>
-                  <a:srgbClr val="94A3B8"/>
-                </a:solidFill>
-              </a:defRPr>
-            </a:pPr>
-            <a:r>
-              <a:t>METODOLOGÍA Y DATOS</a:t>
-            </a:r>
-          </a:p>
-        </p:txBody>
-      </p:sp>
-      <p:sp>
-        <p:nvSpPr>
-          <p:cNvPr id="5" name="TextBox 4"/>
-          <p:cNvSpPr txBox="1"/>
-          <p:nvPr/>
-        </p:nvSpPr>
-        <p:spPr>
-          <a:xfrm>
-            <a:off x="731520" y="777240"/>
-            <a:ext cx="10698480" cy="731520"/>
+            <a:off x="731520" y="749808"/>
+            <a:ext cx="10698480" cy="685800"/>
           </a:xfrm>
           <a:prstGeom prst="rect">
             <a:avLst/>
@@ -7176,312 +6278,1080 @@
           <a:lstStyle/>
           <a:p>
             <a:pPr>
-              <a:defRPr sz="2400" b="1">
+              <a:defRPr sz="2200" b="1">
                 <a:solidFill>
                   <a:srgbClr val="F1F5F9"/>
                 </a:solidFill>
               </a:defRPr>
             </a:pPr>
             <a:r>
-              <a:t>Construcción del OWASP Top 10:2025 y Grandes Cambios</a:t>
-            </a:r>
-          </a:p>
-        </p:txBody>
-      </p:sp>
-      <p:sp>
-        <p:nvSpPr>
-          <p:cNvPr id="6" name="Rounded Rectangle 5"/>
-          <p:cNvSpPr/>
+              <a:t>El Mapa Completo: Tabla Comparativa OWASP Top 10 (2025 vs. 2021)</a:t>
+            </a:r>
+          </a:p>
+        </p:txBody>
+      </p:sp>
+      <p:graphicFrame>
+        <p:nvGraphicFramePr>
+          <p:cNvPr id="5" name="Table 4"/>
+          <p:cNvGraphicFramePr>
+            <a:graphicFrameLocks noGrp="1"/>
+          </p:cNvGraphicFramePr>
           <p:nvPr/>
-        </p:nvSpPr>
-        <p:spPr>
-          <a:xfrm>
-            <a:off x="731520" y="1645920"/>
-            <a:ext cx="5212080" cy="4572000"/>
-          </a:xfrm>
-          <a:prstGeom prst="roundRect">
-            <a:avLst/>
-          </a:prstGeom>
-          <a:solidFill>
-            <a:srgbClr val="131D33"/>
-          </a:solidFill>
-          <a:ln w="12700">
-            <a:solidFill>
-              <a:srgbClr val="24324D"/>
-            </a:solidFill>
-          </a:ln>
-        </p:spPr>
-        <p:style>
-          <a:lnRef idx="1">
-            <a:schemeClr val="accent1"/>
-          </a:lnRef>
-          <a:fillRef idx="3">
-            <a:schemeClr val="accent1"/>
-          </a:fillRef>
-          <a:effectRef idx="2">
-            <a:schemeClr val="accent1"/>
-          </a:effectRef>
-          <a:fontRef idx="minor">
-            <a:schemeClr val="lt1"/>
-          </a:fontRef>
-        </p:style>
-        <p:txBody>
-          <a:bodyPr rtlCol="0" anchor="ctr" wrap="square" lIns="228600" rIns="228600" tIns="201168" bIns="201168"/>
-          <a:lstStyle/>
-          <a:p>
-            <a:pPr algn="ctr">
-              <a:spcAft>
-                <a:spcPts val="800"/>
-              </a:spcAft>
-              <a:defRPr sz="1500" b="1">
-                <a:solidFill>
-                  <a:srgbClr val="3B82F6"/>
-                </a:solidFill>
-              </a:defRPr>
-            </a:pPr>
-            <a:r>
-              <a:t>Metodología Basada en Evidencia</a:t>
-            </a:r>
-          </a:p>
-          <a:p>
-            <a:pPr>
-              <a:spcAft>
-                <a:spcPts val="800"/>
-              </a:spcAft>
-              <a:defRPr sz="950" b="1">
-                <a:solidFill>
-                  <a:srgbClr val="94A3B8"/>
-                </a:solidFill>
-              </a:defRPr>
-            </a:pPr>
-            <a:r>
-              <a:t>[Datos Duros]</a:t>
-            </a:r>
-          </a:p>
-          <a:p>
-            <a:pPr>
-              <a:spcAft>
-                <a:spcPts val="600"/>
-              </a:spcAft>
-              <a:defRPr sz="1200">
-                <a:solidFill>
-                  <a:srgbClr val="CBD5E1"/>
-                </a:solidFill>
-              </a:defRPr>
-            </a:pPr>
-            <a:r>
-              <a:t>• Evaluación masiva: Más de 2.8 millones de aplicaciones auditadas.</a:t>
-            </a:r>
-          </a:p>
-          <a:p>
-            <a:pPr>
-              <a:spcAft>
-                <a:spcPts val="600"/>
-              </a:spcAft>
-              <a:defRPr sz="1200">
-                <a:solidFill>
-                  <a:srgbClr val="CBD5E1"/>
-                </a:solidFill>
-              </a:defRPr>
-            </a:pPr>
-            <a:r>
-              <a:t>• Fuentes líderes de telemetría: Veracode, Sonar, Contrast Security, etc.</a:t>
-            </a:r>
-          </a:p>
-          <a:p>
-            <a:pPr>
-              <a:spcAft>
-                <a:spcPts val="600"/>
-              </a:spcAft>
-              <a:defRPr sz="1200">
-                <a:solidFill>
-                  <a:srgbClr val="CBD5E1"/>
-                </a:solidFill>
-              </a:defRPr>
-            </a:pPr>
-            <a:r>
-              <a:t>• Análisis inicial de 589 CWEs agrupadas en 248 debilidades finales.</a:t>
-            </a:r>
-          </a:p>
-          <a:p>
-            <a:pPr>
-              <a:spcAft>
-                <a:spcPts val="600"/>
-              </a:spcAft>
-              <a:defRPr sz="1200">
-                <a:solidFill>
-                  <a:srgbClr val="CBD5E1"/>
-                </a:solidFill>
-              </a:defRPr>
-            </a:pPr>
-            <a:r>
-              <a:t>• 8 categorías surgieron de datos empíricos y 2 por encuesta comunitaria.</a:t>
-            </a:r>
-          </a:p>
-          <a:p>
-            <a:pPr>
-              <a:spcAft>
-                <a:spcPts val="600"/>
-              </a:spcAft>
-              <a:defRPr sz="1200">
-                <a:solidFill>
-                  <a:srgbClr val="CBD5E1"/>
-                </a:solidFill>
-              </a:defRPr>
-            </a:pPr>
-            <a:r>
-              <a:t>• Cambio de paradigma: Priorización de la CAUSA RAÍZ por sobre los síntomas.</a:t>
-            </a:r>
-          </a:p>
-        </p:txBody>
-      </p:sp>
-      <p:sp>
-        <p:nvSpPr>
-          <p:cNvPr id="7" name="Rounded Rectangle 6"/>
-          <p:cNvSpPr/>
-          <p:nvPr/>
-        </p:nvSpPr>
-        <p:spPr>
-          <a:xfrm>
-            <a:off x="6217920" y="1645920"/>
-            <a:ext cx="5212080" cy="4572000"/>
-          </a:xfrm>
-          <a:prstGeom prst="roundRect">
-            <a:avLst/>
-          </a:prstGeom>
-          <a:solidFill>
-            <a:srgbClr val="131D33"/>
-          </a:solidFill>
-          <a:ln w="12700">
-            <a:solidFill>
-              <a:srgbClr val="24324D"/>
-            </a:solidFill>
-          </a:ln>
-        </p:spPr>
-        <p:style>
-          <a:lnRef idx="1">
-            <a:schemeClr val="accent1"/>
-          </a:lnRef>
-          <a:fillRef idx="3">
-            <a:schemeClr val="accent1"/>
-          </a:fillRef>
-          <a:effectRef idx="2">
-            <a:schemeClr val="accent1"/>
-          </a:effectRef>
-          <a:fontRef idx="minor">
-            <a:schemeClr val="lt1"/>
-          </a:fontRef>
-        </p:style>
-        <p:txBody>
-          <a:bodyPr rtlCol="0" anchor="ctr" wrap="square" lIns="228600" rIns="228600" tIns="201168" bIns="201168"/>
-          <a:lstStyle/>
-          <a:p>
-            <a:pPr algn="ctr">
-              <a:spcAft>
-                <a:spcPts val="800"/>
-              </a:spcAft>
-              <a:defRPr sz="1500" b="1">
-                <a:solidFill>
-                  <a:srgbClr val="F59E0B"/>
-                </a:solidFill>
-              </a:defRPr>
-            </a:pPr>
-            <a:r>
-              <a:t>Grandes Novedades frente a 2021</a:t>
-            </a:r>
-          </a:p>
-          <a:p>
-            <a:pPr>
-              <a:spcAft>
-                <a:spcPts val="800"/>
-              </a:spcAft>
-              <a:defRPr sz="950" b="1">
-                <a:solidFill>
-                  <a:srgbClr val="94A3B8"/>
-                </a:solidFill>
-              </a:defRPr>
-            </a:pPr>
-            <a:r>
-              <a:t>[Evolución de Amenazas]</a:t>
-            </a:r>
-          </a:p>
-          <a:p>
-            <a:pPr>
-              <a:spcAft>
-                <a:spcPts val="600"/>
-              </a:spcAft>
-              <a:defRPr sz="1200">
-                <a:solidFill>
-                  <a:srgbClr val="CBD5E1"/>
-                </a:solidFill>
-              </a:defRPr>
-            </a:pPr>
-            <a:r>
-              <a:t>• A01 (Broken Access Control) se mantiene #1 y absorbe a SSRF.</a:t>
-            </a:r>
-          </a:p>
-          <a:p>
-            <a:pPr>
-              <a:spcAft>
-                <a:spcPts val="600"/>
-              </a:spcAft>
-              <a:defRPr sz="1200">
-                <a:solidFill>
-                  <a:srgbClr val="CBD5E1"/>
-                </a:solidFill>
-              </a:defRPr>
-            </a:pPr>
-            <a:r>
-              <a:t>• A02 (Security Misconfiguration) asciende drásticamente del puesto 5 al 2.</a:t>
-            </a:r>
-          </a:p>
-          <a:p>
-            <a:pPr>
-              <a:spcAft>
-                <a:spcPts val="600"/>
-              </a:spcAft>
-              <a:defRPr sz="1200">
-                <a:solidFill>
-                  <a:srgbClr val="CBD5E1"/>
-                </a:solidFill>
-              </a:defRPr>
-            </a:pPr>
-            <a:r>
-              <a:t>• NUEVA: A03 Software Supply Chain Failures (refleja el riesgo en compilación y CI/CD).</a:t>
-            </a:r>
-          </a:p>
-          <a:p>
-            <a:pPr>
-              <a:spcAft>
-                <a:spcPts val="600"/>
-              </a:spcAft>
-              <a:defRPr sz="1200">
-                <a:solidFill>
-                  <a:srgbClr val="CBD5E1"/>
-                </a:solidFill>
-              </a:defRPr>
-            </a:pPr>
-            <a:r>
-              <a:t>• A04 (Criptografía) y A05 (Inyección) bajan puestos relativos ante fallas arquitectónicas.</a:t>
-            </a:r>
-          </a:p>
-          <a:p>
-            <a:pPr>
-              <a:spcAft>
-                <a:spcPts val="600"/>
-              </a:spcAft>
-              <a:defRPr sz="1200">
-                <a:solidFill>
-                  <a:srgbClr val="CBD5E1"/>
-                </a:solidFill>
-              </a:defRPr>
-            </a:pPr>
-            <a:r>
-              <a:t>• NUEVA: A10 Mishandling of Exceptional Conditions (mal manejo de errores y fallas abiertas).</a:t>
-            </a:r>
-          </a:p>
-        </p:txBody>
-      </p:sp>
+        </p:nvGraphicFramePr>
+        <p:xfrm>
+          <a:off x="731520" y="1554480"/>
+          <a:ext cx="10698480" cy="4663440"/>
+        </p:xfrm>
+        <a:graphic>
+          <a:graphicData uri="http://schemas.openxmlformats.org/drawingml/2006/table">
+            <a:tbl>
+              <a:tblPr firstRow="1" bandRow="1">
+                <a:tableStyleId>{5C22544A-7EE6-4342-B048-85BDC9FD1C3A}</a:tableStyleId>
+              </a:tblPr>
+              <a:tblGrid>
+                <a:gridCol w="1005840"/>
+                <a:gridCol w="4114800"/>
+                <a:gridCol w="2926080"/>
+                <a:gridCol w="2651760"/>
+              </a:tblGrid>
+              <a:tr h="423949">
+                <a:tc>
+                  <a:txBody>
+                    <a:bodyPr/>
+                    <a:lstStyle/>
+                    <a:p>
+                      <a:pPr>
+                        <a:defRPr sz="1100" b="1">
+                          <a:solidFill>
+                            <a:srgbClr val="06B6D4"/>
+                          </a:solidFill>
+                        </a:defRPr>
+                      </a:pPr>
+                      <a:r>
+                        <a:t>#</a:t>
+                      </a:r>
+                    </a:p>
+                  </a:txBody>
+                  <a:tcPr>
+                    <a:solidFill>
+                      <a:srgbClr val="182541"/>
+                    </a:solidFill>
+                  </a:tcPr>
+                </a:tc>
+                <a:tc>
+                  <a:txBody>
+                    <a:bodyPr/>
+                    <a:lstStyle/>
+                    <a:p>
+                      <a:pPr>
+                        <a:defRPr sz="1100" b="1">
+                          <a:solidFill>
+                            <a:srgbClr val="06B6D4"/>
+                          </a:solidFill>
+                        </a:defRPr>
+                      </a:pPr>
+                      <a:r>
+                        <a:t>Categoría (Edición 2025)</a:t>
+                      </a:r>
+                    </a:p>
+                  </a:txBody>
+                  <a:tcPr>
+                    <a:solidFill>
+                      <a:srgbClr val="182541"/>
+                    </a:solidFill>
+                  </a:tcPr>
+                </a:tc>
+                <a:tc>
+                  <a:txBody>
+                    <a:bodyPr/>
+                    <a:lstStyle/>
+                    <a:p>
+                      <a:pPr>
+                        <a:defRPr sz="1100" b="1">
+                          <a:solidFill>
+                            <a:srgbClr val="06B6D4"/>
+                          </a:solidFill>
+                        </a:defRPr>
+                      </a:pPr>
+                      <a:r>
+                        <a:t>Cambio frente a 2021</a:t>
+                      </a:r>
+                    </a:p>
+                  </a:txBody>
+                  <a:tcPr>
+                    <a:solidFill>
+                      <a:srgbClr val="182541"/>
+                    </a:solidFill>
+                  </a:tcPr>
+                </a:tc>
+                <a:tc>
+                  <a:txBody>
+                    <a:bodyPr/>
+                    <a:lstStyle/>
+                    <a:p>
+                      <a:pPr>
+                        <a:defRPr sz="1100" b="1">
+                          <a:solidFill>
+                            <a:srgbClr val="06B6D4"/>
+                          </a:solidFill>
+                        </a:defRPr>
+                      </a:pPr>
+                      <a:r>
+                        <a:t>Naturaleza del Riesgo</a:t>
+                      </a:r>
+                    </a:p>
+                  </a:txBody>
+                  <a:tcPr>
+                    <a:solidFill>
+                      <a:srgbClr val="182541"/>
+                    </a:solidFill>
+                  </a:tcPr>
+                </a:tc>
+              </a:tr>
+              <a:tr h="423949">
+                <a:tc>
+                  <a:txBody>
+                    <a:bodyPr/>
+                    <a:lstStyle/>
+                    <a:p>
+                      <a:pPr>
+                        <a:defRPr sz="950" b="1">
+                          <a:solidFill>
+                            <a:srgbClr val="EF4444"/>
+                          </a:solidFill>
+                        </a:defRPr>
+                      </a:pPr>
+                      <a:r>
+                        <a:t>A01</a:t>
+                      </a:r>
+                    </a:p>
+                  </a:txBody>
+                  <a:tcPr>
+                    <a:solidFill>
+                      <a:srgbClr val="131D33"/>
+                    </a:solidFill>
+                  </a:tcPr>
+                </a:tc>
+                <a:tc>
+                  <a:txBody>
+                    <a:bodyPr/>
+                    <a:lstStyle/>
+                    <a:p>
+                      <a:pPr>
+                        <a:defRPr sz="950">
+                          <a:solidFill>
+                            <a:srgbClr val="CBD5E1"/>
+                          </a:solidFill>
+                        </a:defRPr>
+                      </a:pPr>
+                      <a:r>
+                        <a:t>Broken Access Control (Control de Acceso)</a:t>
+                      </a:r>
+                    </a:p>
+                  </a:txBody>
+                  <a:tcPr>
+                    <a:solidFill>
+                      <a:srgbClr val="131D33"/>
+                    </a:solidFill>
+                  </a:tcPr>
+                </a:tc>
+                <a:tc>
+                  <a:txBody>
+                    <a:bodyPr/>
+                    <a:lstStyle/>
+                    <a:p>
+                      <a:pPr>
+                        <a:defRPr sz="950">
+                          <a:solidFill>
+                            <a:srgbClr val="CBD5E1"/>
+                          </a:solidFill>
+                        </a:defRPr>
+                      </a:pPr>
+                      <a:r>
+                        <a:t>Sigue #1, absorbe SSRF</a:t>
+                      </a:r>
+                    </a:p>
+                  </a:txBody>
+                  <a:tcPr>
+                    <a:solidFill>
+                      <a:srgbClr val="131D33"/>
+                    </a:solidFill>
+                  </a:tcPr>
+                </a:tc>
+                <a:tc>
+                  <a:txBody>
+                    <a:bodyPr/>
+                    <a:lstStyle/>
+                    <a:p>
+                      <a:pPr>
+                        <a:defRPr sz="950">
+                          <a:solidFill>
+                            <a:srgbClr val="EF4444"/>
+                          </a:solidFill>
+                        </a:defRPr>
+                      </a:pPr>
+                      <a:r>
+                        <a:t>100% de apps afectadas</a:t>
+                      </a:r>
+                    </a:p>
+                  </a:txBody>
+                  <a:tcPr>
+                    <a:solidFill>
+                      <a:srgbClr val="131D33"/>
+                    </a:solidFill>
+                  </a:tcPr>
+                </a:tc>
+              </a:tr>
+              <a:tr h="423949">
+                <a:tc>
+                  <a:txBody>
+                    <a:bodyPr/>
+                    <a:lstStyle/>
+                    <a:p>
+                      <a:pPr>
+                        <a:defRPr sz="950" b="1">
+                          <a:solidFill>
+                            <a:srgbClr val="EF4444"/>
+                          </a:solidFill>
+                        </a:defRPr>
+                      </a:pPr>
+                      <a:r>
+                        <a:t>A02</a:t>
+                      </a:r>
+                    </a:p>
+                  </a:txBody>
+                  <a:tcPr>
+                    <a:solidFill>
+                      <a:srgbClr val="131D33"/>
+                    </a:solidFill>
+                  </a:tcPr>
+                </a:tc>
+                <a:tc>
+                  <a:txBody>
+                    <a:bodyPr/>
+                    <a:lstStyle/>
+                    <a:p>
+                      <a:pPr>
+                        <a:defRPr sz="950">
+                          <a:solidFill>
+                            <a:srgbClr val="CBD5E1"/>
+                          </a:solidFill>
+                        </a:defRPr>
+                      </a:pPr>
+                      <a:r>
+                        <a:t>Security Misconfiguration (Configuración)</a:t>
+                      </a:r>
+                    </a:p>
+                  </a:txBody>
+                  <a:tcPr>
+                    <a:solidFill>
+                      <a:srgbClr val="131D33"/>
+                    </a:solidFill>
+                  </a:tcPr>
+                </a:tc>
+                <a:tc>
+                  <a:txBody>
+                    <a:bodyPr/>
+                    <a:lstStyle/>
+                    <a:p>
+                      <a:pPr>
+                        <a:defRPr sz="950">
+                          <a:solidFill>
+                            <a:srgbClr val="CBD5E1"/>
+                          </a:solidFill>
+                        </a:defRPr>
+                      </a:pPr>
+                      <a:r>
+                        <a:t>Subió del puesto 5 al 2</a:t>
+                      </a:r>
+                    </a:p>
+                  </a:txBody>
+                  <a:tcPr>
+                    <a:solidFill>
+                      <a:srgbClr val="131D33"/>
+                    </a:solidFill>
+                  </a:tcPr>
+                </a:tc>
+                <a:tc>
+                  <a:txBody>
+                    <a:bodyPr/>
+                    <a:lstStyle/>
+                    <a:p>
+                      <a:pPr>
+                        <a:defRPr sz="950">
+                          <a:solidFill>
+                            <a:srgbClr val="EF4444"/>
+                          </a:solidFill>
+                        </a:defRPr>
+                      </a:pPr>
+                      <a:r>
+                        <a:t>Complejidad Cloud / Defaults</a:t>
+                      </a:r>
+                    </a:p>
+                  </a:txBody>
+                  <a:tcPr>
+                    <a:solidFill>
+                      <a:srgbClr val="131D33"/>
+                    </a:solidFill>
+                  </a:tcPr>
+                </a:tc>
+              </a:tr>
+              <a:tr h="423949">
+                <a:tc>
+                  <a:txBody>
+                    <a:bodyPr/>
+                    <a:lstStyle/>
+                    <a:p>
+                      <a:pPr>
+                        <a:defRPr sz="950" b="1">
+                          <a:solidFill>
+                            <a:srgbClr val="F59E0B"/>
+                          </a:solidFill>
+                        </a:defRPr>
+                      </a:pPr>
+                      <a:r>
+                        <a:t>A03</a:t>
+                      </a:r>
+                    </a:p>
+                  </a:txBody>
+                  <a:tcPr>
+                    <a:solidFill>
+                      <a:srgbClr val="131D33"/>
+                    </a:solidFill>
+                  </a:tcPr>
+                </a:tc>
+                <a:tc>
+                  <a:txBody>
+                    <a:bodyPr/>
+                    <a:lstStyle/>
+                    <a:p>
+                      <a:pPr>
+                        <a:defRPr sz="950">
+                          <a:solidFill>
+                            <a:srgbClr val="CBD5E1"/>
+                          </a:solidFill>
+                        </a:defRPr>
+                      </a:pPr>
+                      <a:r>
+                        <a:t>Software Supply Chain Failures</a:t>
+                      </a:r>
+                    </a:p>
+                  </a:txBody>
+                  <a:tcPr>
+                    <a:solidFill>
+                      <a:srgbClr val="131D33"/>
+                    </a:solidFill>
+                  </a:tcPr>
+                </a:tc>
+                <a:tc>
+                  <a:txBody>
+                    <a:bodyPr/>
+                    <a:lstStyle/>
+                    <a:p>
+                      <a:pPr>
+                        <a:defRPr sz="950">
+                          <a:solidFill>
+                            <a:srgbClr val="CBD5E1"/>
+                          </a:solidFill>
+                        </a:defRPr>
+                      </a:pPr>
+                      <a:r>
+                        <a:t>NUEVA en 2025 (Ex-Componentes)</a:t>
+                      </a:r>
+                    </a:p>
+                  </a:txBody>
+                  <a:tcPr>
+                    <a:solidFill>
+                      <a:srgbClr val="131D33"/>
+                    </a:solidFill>
+                  </a:tcPr>
+                </a:tc>
+                <a:tc>
+                  <a:txBody>
+                    <a:bodyPr/>
+                    <a:lstStyle/>
+                    <a:p>
+                      <a:pPr>
+                        <a:defRPr sz="950">
+                          <a:solidFill>
+                            <a:srgbClr val="F59E0B"/>
+                          </a:solidFill>
+                        </a:defRPr>
+                      </a:pPr>
+                      <a:r>
+                        <a:t>Compilación / CI/CD / SBOM</a:t>
+                      </a:r>
+                    </a:p>
+                  </a:txBody>
+                  <a:tcPr>
+                    <a:solidFill>
+                      <a:srgbClr val="131D33"/>
+                    </a:solidFill>
+                  </a:tcPr>
+                </a:tc>
+              </a:tr>
+              <a:tr h="423949">
+                <a:tc>
+                  <a:txBody>
+                    <a:bodyPr/>
+                    <a:lstStyle/>
+                    <a:p>
+                      <a:pPr>
+                        <a:defRPr sz="950" b="1">
+                          <a:solidFill>
+                            <a:srgbClr val="3B82F6"/>
+                          </a:solidFill>
+                        </a:defRPr>
+                      </a:pPr>
+                      <a:r>
+                        <a:t>A04</a:t>
+                      </a:r>
+                    </a:p>
+                  </a:txBody>
+                  <a:tcPr>
+                    <a:solidFill>
+                      <a:srgbClr val="131D33"/>
+                    </a:solidFill>
+                  </a:tcPr>
+                </a:tc>
+                <a:tc>
+                  <a:txBody>
+                    <a:bodyPr/>
+                    <a:lstStyle/>
+                    <a:p>
+                      <a:pPr>
+                        <a:defRPr sz="950">
+                          <a:solidFill>
+                            <a:srgbClr val="CBD5E1"/>
+                          </a:solidFill>
+                        </a:defRPr>
+                      </a:pPr>
+                      <a:r>
+                        <a:t>Cryptographic Failures (Fallas Criptográficas)</a:t>
+                      </a:r>
+                    </a:p>
+                  </a:txBody>
+                  <a:tcPr>
+                    <a:solidFill>
+                      <a:srgbClr val="131D33"/>
+                    </a:solidFill>
+                  </a:tcPr>
+                </a:tc>
+                <a:tc>
+                  <a:txBody>
+                    <a:bodyPr/>
+                    <a:lstStyle/>
+                    <a:p>
+                      <a:pPr>
+                        <a:defRPr sz="950">
+                          <a:solidFill>
+                            <a:srgbClr val="CBD5E1"/>
+                          </a:solidFill>
+                        </a:defRPr>
+                      </a:pPr>
+                      <a:r>
+                        <a:t>Bajó del puesto 2 al 4</a:t>
+                      </a:r>
+                    </a:p>
+                  </a:txBody>
+                  <a:tcPr>
+                    <a:solidFill>
+                      <a:srgbClr val="131D33"/>
+                    </a:solidFill>
+                  </a:tcPr>
+                </a:tc>
+                <a:tc>
+                  <a:txBody>
+                    <a:bodyPr/>
+                    <a:lstStyle/>
+                    <a:p>
+                      <a:pPr>
+                        <a:defRPr sz="950">
+                          <a:solidFill>
+                            <a:srgbClr val="3B82F6"/>
+                          </a:solidFill>
+                        </a:defRPr>
+                      </a:pPr>
+                      <a:r>
+                        <a:t>TLS / Claves / Random débil</a:t>
+                      </a:r>
+                    </a:p>
+                  </a:txBody>
+                  <a:tcPr>
+                    <a:solidFill>
+                      <a:srgbClr val="131D33"/>
+                    </a:solidFill>
+                  </a:tcPr>
+                </a:tc>
+              </a:tr>
+              <a:tr h="423949">
+                <a:tc>
+                  <a:txBody>
+                    <a:bodyPr/>
+                    <a:lstStyle/>
+                    <a:p>
+                      <a:pPr>
+                        <a:defRPr sz="950" b="1">
+                          <a:solidFill>
+                            <a:srgbClr val="8B5CF6"/>
+                          </a:solidFill>
+                        </a:defRPr>
+                      </a:pPr>
+                      <a:r>
+                        <a:t>A05</a:t>
+                      </a:r>
+                    </a:p>
+                  </a:txBody>
+                  <a:tcPr>
+                    <a:solidFill>
+                      <a:srgbClr val="131D33"/>
+                    </a:solidFill>
+                  </a:tcPr>
+                </a:tc>
+                <a:tc>
+                  <a:txBody>
+                    <a:bodyPr/>
+                    <a:lstStyle/>
+                    <a:p>
+                      <a:pPr>
+                        <a:defRPr sz="950">
+                          <a:solidFill>
+                            <a:srgbClr val="CBD5E1"/>
+                          </a:solidFill>
+                        </a:defRPr>
+                      </a:pPr>
+                      <a:r>
+                        <a:t>Injection (Inyección SQL, XSS, etc.)</a:t>
+                      </a:r>
+                    </a:p>
+                  </a:txBody>
+                  <a:tcPr>
+                    <a:solidFill>
+                      <a:srgbClr val="131D33"/>
+                    </a:solidFill>
+                  </a:tcPr>
+                </a:tc>
+                <a:tc>
+                  <a:txBody>
+                    <a:bodyPr/>
+                    <a:lstStyle/>
+                    <a:p>
+                      <a:pPr>
+                        <a:defRPr sz="950">
+                          <a:solidFill>
+                            <a:srgbClr val="CBD5E1"/>
+                          </a:solidFill>
+                        </a:defRPr>
+                      </a:pPr>
+                      <a:r>
+                        <a:t>Bajó del puesto 3 al 5</a:t>
+                      </a:r>
+                    </a:p>
+                  </a:txBody>
+                  <a:tcPr>
+                    <a:solidFill>
+                      <a:srgbClr val="131D33"/>
+                    </a:solidFill>
+                  </a:tcPr>
+                </a:tc>
+                <a:tc>
+                  <a:txBody>
+                    <a:bodyPr/>
+                    <a:lstStyle/>
+                    <a:p>
+                      <a:pPr>
+                        <a:defRPr sz="950">
+                          <a:solidFill>
+                            <a:srgbClr val="8B5CF6"/>
+                          </a:solidFill>
+                        </a:defRPr>
+                      </a:pPr>
+                      <a:r>
+                        <a:t>+44.000 CVEs históricos</a:t>
+                      </a:r>
+                    </a:p>
+                  </a:txBody>
+                  <a:tcPr>
+                    <a:solidFill>
+                      <a:srgbClr val="131D33"/>
+                    </a:solidFill>
+                  </a:tcPr>
+                </a:tc>
+              </a:tr>
+              <a:tr h="423949">
+                <a:tc>
+                  <a:txBody>
+                    <a:bodyPr/>
+                    <a:lstStyle/>
+                    <a:p>
+                      <a:pPr>
+                        <a:defRPr sz="950" b="1">
+                          <a:solidFill>
+                            <a:srgbClr val="3B82F6"/>
+                          </a:solidFill>
+                        </a:defRPr>
+                      </a:pPr>
+                      <a:r>
+                        <a:t>A06</a:t>
+                      </a:r>
+                    </a:p>
+                  </a:txBody>
+                  <a:tcPr>
+                    <a:solidFill>
+                      <a:srgbClr val="131D33"/>
+                    </a:solidFill>
+                  </a:tcPr>
+                </a:tc>
+                <a:tc>
+                  <a:txBody>
+                    <a:bodyPr/>
+                    <a:lstStyle/>
+                    <a:p>
+                      <a:pPr>
+                        <a:defRPr sz="950">
+                          <a:solidFill>
+                            <a:srgbClr val="CBD5E1"/>
+                          </a:solidFill>
+                        </a:defRPr>
+                      </a:pPr>
+                      <a:r>
+                        <a:t>Insecure Design (Diseño Inseguro)</a:t>
+                      </a:r>
+                    </a:p>
+                  </a:txBody>
+                  <a:tcPr>
+                    <a:solidFill>
+                      <a:srgbClr val="131D33"/>
+                    </a:solidFill>
+                  </a:tcPr>
+                </a:tc>
+                <a:tc>
+                  <a:txBody>
+                    <a:bodyPr/>
+                    <a:lstStyle/>
+                    <a:p>
+                      <a:pPr>
+                        <a:defRPr sz="950">
+                          <a:solidFill>
+                            <a:srgbClr val="CBD5E1"/>
+                          </a:solidFill>
+                        </a:defRPr>
+                      </a:pPr>
+                      <a:r>
+                        <a:t>Bajó del puesto 4 al 6</a:t>
+                      </a:r>
+                    </a:p>
+                  </a:txBody>
+                  <a:tcPr>
+                    <a:solidFill>
+                      <a:srgbClr val="131D33"/>
+                    </a:solidFill>
+                  </a:tcPr>
+                </a:tc>
+                <a:tc>
+                  <a:txBody>
+                    <a:bodyPr/>
+                    <a:lstStyle/>
+                    <a:p>
+                      <a:pPr>
+                        <a:defRPr sz="950">
+                          <a:solidFill>
+                            <a:srgbClr val="3B82F6"/>
+                          </a:solidFill>
+                        </a:defRPr>
+                      </a:pPr>
+                      <a:r>
+                        <a:t>Lógica de negocio y modelos</a:t>
+                      </a:r>
+                    </a:p>
+                  </a:txBody>
+                  <a:tcPr>
+                    <a:solidFill>
+                      <a:srgbClr val="131D33"/>
+                    </a:solidFill>
+                  </a:tcPr>
+                </a:tc>
+              </a:tr>
+              <a:tr h="423949">
+                <a:tc>
+                  <a:txBody>
+                    <a:bodyPr/>
+                    <a:lstStyle/>
+                    <a:p>
+                      <a:pPr>
+                        <a:defRPr sz="950" b="1">
+                          <a:solidFill>
+                            <a:srgbClr val="F59E0B"/>
+                          </a:solidFill>
+                        </a:defRPr>
+                      </a:pPr>
+                      <a:r>
+                        <a:t>A07</a:t>
+                      </a:r>
+                    </a:p>
+                  </a:txBody>
+                  <a:tcPr>
+                    <a:solidFill>
+                      <a:srgbClr val="131D33"/>
+                    </a:solidFill>
+                  </a:tcPr>
+                </a:tc>
+                <a:tc>
+                  <a:txBody>
+                    <a:bodyPr/>
+                    <a:lstStyle/>
+                    <a:p>
+                      <a:pPr>
+                        <a:defRPr sz="950">
+                          <a:solidFill>
+                            <a:srgbClr val="CBD5E1"/>
+                          </a:solidFill>
+                        </a:defRPr>
+                      </a:pPr>
+                      <a:r>
+                        <a:t>Authentication Failures (Autenticación)</a:t>
+                      </a:r>
+                    </a:p>
+                  </a:txBody>
+                  <a:tcPr>
+                    <a:solidFill>
+                      <a:srgbClr val="131D33"/>
+                    </a:solidFill>
+                  </a:tcPr>
+                </a:tc>
+                <a:tc>
+                  <a:txBody>
+                    <a:bodyPr/>
+                    <a:lstStyle/>
+                    <a:p>
+                      <a:pPr>
+                        <a:defRPr sz="950">
+                          <a:solidFill>
+                            <a:srgbClr val="CBD5E1"/>
+                          </a:solidFill>
+                        </a:defRPr>
+                      </a:pPr>
+                      <a:r>
+                        <a:t>Mismo puesto (7), cambió nombre</a:t>
+                      </a:r>
+                    </a:p>
+                  </a:txBody>
+                  <a:tcPr>
+                    <a:solidFill>
+                      <a:srgbClr val="131D33"/>
+                    </a:solidFill>
+                  </a:tcPr>
+                </a:tc>
+                <a:tc>
+                  <a:txBody>
+                    <a:bodyPr/>
+                    <a:lstStyle/>
+                    <a:p>
+                      <a:pPr>
+                        <a:defRPr sz="950">
+                          <a:solidFill>
+                            <a:srgbClr val="F59E0B"/>
+                          </a:solidFill>
+                        </a:defRPr>
+                      </a:pPr>
+                      <a:r>
+                        <a:t>Credential Stuffing / MFA</a:t>
+                      </a:r>
+                    </a:p>
+                  </a:txBody>
+                  <a:tcPr>
+                    <a:solidFill>
+                      <a:srgbClr val="131D33"/>
+                    </a:solidFill>
+                  </a:tcPr>
+                </a:tc>
+              </a:tr>
+              <a:tr h="423949">
+                <a:tc>
+                  <a:txBody>
+                    <a:bodyPr/>
+                    <a:lstStyle/>
+                    <a:p>
+                      <a:pPr>
+                        <a:defRPr sz="950" b="1">
+                          <a:solidFill>
+                            <a:srgbClr val="3B82F6"/>
+                          </a:solidFill>
+                        </a:defRPr>
+                      </a:pPr>
+                      <a:r>
+                        <a:t>A08</a:t>
+                      </a:r>
+                    </a:p>
+                  </a:txBody>
+                  <a:tcPr>
+                    <a:solidFill>
+                      <a:srgbClr val="131D33"/>
+                    </a:solidFill>
+                  </a:tcPr>
+                </a:tc>
+                <a:tc>
+                  <a:txBody>
+                    <a:bodyPr/>
+                    <a:lstStyle/>
+                    <a:p>
+                      <a:pPr>
+                        <a:defRPr sz="950">
+                          <a:solidFill>
+                            <a:srgbClr val="CBD5E1"/>
+                          </a:solidFill>
+                        </a:defRPr>
+                      </a:pPr>
+                      <a:r>
+                        <a:t>Software or Data Integrity Failures</a:t>
+                      </a:r>
+                    </a:p>
+                  </a:txBody>
+                  <a:tcPr>
+                    <a:solidFill>
+                      <a:srgbClr val="131D33"/>
+                    </a:solidFill>
+                  </a:tcPr>
+                </a:tc>
+                <a:tc>
+                  <a:txBody>
+                    <a:bodyPr/>
+                    <a:lstStyle/>
+                    <a:p>
+                      <a:pPr>
+                        <a:defRPr sz="950">
+                          <a:solidFill>
+                            <a:srgbClr val="CBD5E1"/>
+                          </a:solidFill>
+                        </a:defRPr>
+                      </a:pPr>
+                      <a:r>
+                        <a:t>Mismo puesto (8), cambió nombre</a:t>
+                      </a:r>
+                    </a:p>
+                  </a:txBody>
+                  <a:tcPr>
+                    <a:solidFill>
+                      <a:srgbClr val="131D33"/>
+                    </a:solidFill>
+                  </a:tcPr>
+                </a:tc>
+                <a:tc>
+                  <a:txBody>
+                    <a:bodyPr/>
+                    <a:lstStyle/>
+                    <a:p>
+                      <a:pPr>
+                        <a:defRPr sz="950">
+                          <a:solidFill>
+                            <a:srgbClr val="3B82F6"/>
+                          </a:solidFill>
+                        </a:defRPr>
+                      </a:pPr>
+                      <a:r>
+                        <a:t>Firmas / Deserialización</a:t>
+                      </a:r>
+                    </a:p>
+                  </a:txBody>
+                  <a:tcPr>
+                    <a:solidFill>
+                      <a:srgbClr val="131D33"/>
+                    </a:solidFill>
+                  </a:tcPr>
+                </a:tc>
+              </a:tr>
+              <a:tr h="423949">
+                <a:tc>
+                  <a:txBody>
+                    <a:bodyPr/>
+                    <a:lstStyle/>
+                    <a:p>
+                      <a:pPr>
+                        <a:defRPr sz="950" b="1">
+                          <a:solidFill>
+                            <a:srgbClr val="3B82F6"/>
+                          </a:solidFill>
+                        </a:defRPr>
+                      </a:pPr>
+                      <a:r>
+                        <a:t>A09</a:t>
+                      </a:r>
+                    </a:p>
+                  </a:txBody>
+                  <a:tcPr>
+                    <a:solidFill>
+                      <a:srgbClr val="131D33"/>
+                    </a:solidFill>
+                  </a:tcPr>
+                </a:tc>
+                <a:tc>
+                  <a:txBody>
+                    <a:bodyPr/>
+                    <a:lstStyle/>
+                    <a:p>
+                      <a:pPr>
+                        <a:defRPr sz="950">
+                          <a:solidFill>
+                            <a:srgbClr val="CBD5E1"/>
+                          </a:solidFill>
+                        </a:defRPr>
+                      </a:pPr>
+                      <a:r>
+                        <a:t>Security Logging and Alerting Failures</a:t>
+                      </a:r>
+                    </a:p>
+                  </a:txBody>
+                  <a:tcPr>
+                    <a:solidFill>
+                      <a:srgbClr val="131D33"/>
+                    </a:solidFill>
+                  </a:tcPr>
+                </a:tc>
+                <a:tc>
+                  <a:txBody>
+                    <a:bodyPr/>
+                    <a:lstStyle/>
+                    <a:p>
+                      <a:pPr>
+                        <a:defRPr sz="950">
+                          <a:solidFill>
+                            <a:srgbClr val="CBD5E1"/>
+                          </a:solidFill>
+                        </a:defRPr>
+                      </a:pPr>
+                      <a:r>
+                        <a:t>Mismo puesto (9), foco en Alertas</a:t>
+                      </a:r>
+                    </a:p>
+                  </a:txBody>
+                  <a:tcPr>
+                    <a:solidFill>
+                      <a:srgbClr val="131D33"/>
+                    </a:solidFill>
+                  </a:tcPr>
+                </a:tc>
+                <a:tc>
+                  <a:txBody>
+                    <a:bodyPr/>
+                    <a:lstStyle/>
+                    <a:p>
+                      <a:pPr>
+                        <a:defRPr sz="950">
+                          <a:solidFill>
+                            <a:srgbClr val="3B82F6"/>
+                          </a:solidFill>
+                        </a:defRPr>
+                      </a:pPr>
+                      <a:r>
+                        <a:t>Detección temprana</a:t>
+                      </a:r>
+                    </a:p>
+                  </a:txBody>
+                  <a:tcPr>
+                    <a:solidFill>
+                      <a:srgbClr val="131D33"/>
+                    </a:solidFill>
+                  </a:tcPr>
+                </a:tc>
+              </a:tr>
+              <a:tr h="423950">
+                <a:tc>
+                  <a:txBody>
+                    <a:bodyPr/>
+                    <a:lstStyle/>
+                    <a:p>
+                      <a:pPr>
+                        <a:defRPr sz="950" b="1">
+                          <a:solidFill>
+                            <a:srgbClr val="F59E0B"/>
+                          </a:solidFill>
+                        </a:defRPr>
+                      </a:pPr>
+                      <a:r>
+                        <a:t>A10</a:t>
+                      </a:r>
+                    </a:p>
+                  </a:txBody>
+                  <a:tcPr>
+                    <a:solidFill>
+                      <a:srgbClr val="131D33"/>
+                    </a:solidFill>
+                  </a:tcPr>
+                </a:tc>
+                <a:tc>
+                  <a:txBody>
+                    <a:bodyPr/>
+                    <a:lstStyle/>
+                    <a:p>
+                      <a:pPr>
+                        <a:defRPr sz="950">
+                          <a:solidFill>
+                            <a:srgbClr val="CBD5E1"/>
+                          </a:solidFill>
+                        </a:defRPr>
+                      </a:pPr>
+                      <a:r>
+                        <a:t>Mishandling of Exceptional Conditions</a:t>
+                      </a:r>
+                    </a:p>
+                  </a:txBody>
+                  <a:tcPr>
+                    <a:solidFill>
+                      <a:srgbClr val="131D33"/>
+                    </a:solidFill>
+                  </a:tcPr>
+                </a:tc>
+                <a:tc>
+                  <a:txBody>
+                    <a:bodyPr/>
+                    <a:lstStyle/>
+                    <a:p>
+                      <a:pPr>
+                        <a:defRPr sz="950">
+                          <a:solidFill>
+                            <a:srgbClr val="CBD5E1"/>
+                          </a:solidFill>
+                        </a:defRPr>
+                      </a:pPr>
+                      <a:r>
+                        <a:t>NUEVA en 2025 (24 debilidades)</a:t>
+                      </a:r>
+                    </a:p>
+                  </a:txBody>
+                  <a:tcPr>
+                    <a:solidFill>
+                      <a:srgbClr val="131D33"/>
+                    </a:solidFill>
+                  </a:tcPr>
+                </a:tc>
+                <a:tc>
+                  <a:txBody>
+                    <a:bodyPr/>
+                    <a:lstStyle/>
+                    <a:p>
+                      <a:pPr>
+                        <a:defRPr sz="950">
+                          <a:solidFill>
+                            <a:srgbClr val="F59E0B"/>
+                          </a:solidFill>
+                        </a:defRPr>
+                      </a:pPr>
+                      <a:r>
+                        <a:t>Falla abierta / Rollback</a:t>
+                      </a:r>
+                    </a:p>
+                  </a:txBody>
+                  <a:tcPr>
+                    <a:solidFill>
+                      <a:srgbClr val="131D33"/>
+                    </a:solidFill>
+                  </a:tcPr>
+                </a:tc>
+              </a:tr>
+            </a:tbl>
+          </a:graphicData>
+        </a:graphic>
+      </p:graphicFrame>
     </p:spTree>
   </p:cSld>
   <p:clrMapOvr>
@@ -7551,8 +7421,8 @@
         </p:nvSpPr>
         <p:spPr>
           <a:xfrm>
-            <a:off x="731520" y="365760"/>
-            <a:ext cx="2926080" cy="365760"/>
+            <a:off x="731520" y="384048"/>
+            <a:ext cx="3108960" cy="320040"/>
           </a:xfrm>
           <a:prstGeom prst="roundRect">
             <a:avLst/>
@@ -7581,32 +7451,67 @@
           </a:fontRef>
         </p:style>
         <p:txBody>
-          <a:bodyPr rtlCol="0" anchor="ctr" wrap="square"/>
+          <a:bodyPr rtlCol="0" anchor="ctr"/>
           <a:lstStyle/>
           <a:p>
             <a:pPr algn="ctr">
-              <a:defRPr sz="1050" b="1">
+              <a:defRPr sz="1000" b="1">
                 <a:solidFill>
                   <a:srgbClr val="EF4444"/>
                 </a:solidFill>
               </a:defRPr>
             </a:pPr>
             <a:r>
-              <a:t>ORADOR 2</a:t>
-            </a:r>
-          </a:p>
-        </p:txBody>
-      </p:sp>
-      <p:sp>
-        <p:nvSpPr>
-          <p:cNvPr id="4" name="Rounded Rectangle 3"/>
+              <a:t>PUESTO #1 — RIESGO MÁXIMO</a:t>
+            </a:r>
+          </a:p>
+        </p:txBody>
+      </p:sp>
+      <p:sp>
+        <p:nvSpPr>
+          <p:cNvPr id="4" name="TextBox 3"/>
+          <p:cNvSpPr txBox="1"/>
+          <p:nvPr/>
+        </p:nvSpPr>
+        <p:spPr>
+          <a:xfrm>
+            <a:off x="731520" y="749808"/>
+            <a:ext cx="10698480" cy="685800"/>
+          </a:xfrm>
+          <a:prstGeom prst="rect">
+            <a:avLst/>
+          </a:prstGeom>
+          <a:noFill/>
+        </p:spPr>
+        <p:txBody>
+          <a:bodyPr wrap="square">
+            <a:spAutoFit/>
+          </a:bodyPr>
+          <a:lstStyle/>
+          <a:p>
+            <a:pPr>
+              <a:defRPr sz="2200" b="1">
+                <a:solidFill>
+                  <a:srgbClr val="F1F5F9"/>
+                </a:solidFill>
+              </a:defRPr>
+            </a:pPr>
+            <a:r>
+              <a:t>A01: Control de Acceso Defectuoso (Broken Access Control)</a:t>
+            </a:r>
+          </a:p>
+        </p:txBody>
+      </p:sp>
+      <p:sp>
+        <p:nvSpPr>
+          <p:cNvPr id="5" name="Rounded Rectangle 4"/>
           <p:cNvSpPr/>
           <p:nvPr/>
         </p:nvSpPr>
         <p:spPr>
           <a:xfrm>
-            <a:off x="3840480" y="365760"/>
-            <a:ext cx="3200400" cy="365760"/>
+            <a:off x="731520" y="1645920"/>
+            <a:ext cx="6217920" cy="4480560"/>
           </a:xfrm>
           <a:prstGeom prst="roundRect">
             <a:avLst/>
@@ -7614,7 +7519,7 @@
           <a:solidFill>
             <a:srgbClr val="131D33"/>
           </a:solidFill>
-          <a:ln w="12700">
+          <a:ln>
             <a:solidFill>
               <a:srgbClr val="24324D"/>
             </a:solidFill>
@@ -7635,53 +7540,96 @@
           </a:fontRef>
         </p:style>
         <p:txBody>
-          <a:bodyPr rtlCol="0" anchor="ctr"/>
+          <a:bodyPr rtlCol="0" anchor="ctr" lIns="320040" tIns="274320"/>
           <a:lstStyle/>
           <a:p>
             <a:pPr algn="ctr">
-              <a:defRPr sz="1000" b="1">
-                <a:solidFill>
-                  <a:srgbClr val="94A3B8"/>
-                </a:solidFill>
-              </a:defRPr>
-            </a:pPr>
-            <a:r>
-              <a:t>PUESTO #1 EN OWASP 2025</a:t>
-            </a:r>
-          </a:p>
-        </p:txBody>
-      </p:sp>
-      <p:sp>
-        <p:nvSpPr>
-          <p:cNvPr id="5" name="TextBox 4"/>
-          <p:cNvSpPr txBox="1"/>
-          <p:nvPr/>
-        </p:nvSpPr>
-        <p:spPr>
-          <a:xfrm>
-            <a:off x="731520" y="777240"/>
-            <a:ext cx="10698480" cy="731520"/>
-          </a:xfrm>
-          <a:prstGeom prst="rect">
-            <a:avLst/>
-          </a:prstGeom>
-          <a:noFill/>
-        </p:spPr>
-        <p:txBody>
-          <a:bodyPr wrap="square">
-            <a:spAutoFit/>
-          </a:bodyPr>
-          <a:lstStyle/>
-          <a:p>
-            <a:pPr>
-              <a:defRPr sz="2400" b="1">
-                <a:solidFill>
-                  <a:srgbClr val="F1F5F9"/>
-                </a:solidFill>
-              </a:defRPr>
-            </a:pPr>
-            <a:r>
-              <a:t>A01: Control de Acceso Defectuoso (Broken Access Control)</a:t>
+              <a:spcAft>
+                <a:spcPts val="1000"/>
+              </a:spcAft>
+              <a:defRPr sz="1300" b="1">
+                <a:solidFill>
+                  <a:srgbClr val="EF4444"/>
+                </a:solidFill>
+              </a:defRPr>
+            </a:pPr>
+            <a:r>
+              <a:t>¿POR QUÉ SIGUE LIDERANDO EL TOP 10?</a:t>
+            </a:r>
+          </a:p>
+          <a:p>
+            <a:pPr>
+              <a:spcAft>
+                <a:spcPts val="800"/>
+              </a:spcAft>
+              <a:defRPr sz="1150">
+                <a:solidFill>
+                  <a:srgbClr val="CBD5E1"/>
+                </a:solidFill>
+              </a:defRPr>
+            </a:pPr>
+            <a:r>
+              <a:t>• Prevalencia Absoluta: El 100% de las aplicaciones analizadas registró fallas en esta categoría.</a:t>
+            </a:r>
+          </a:p>
+          <a:p>
+            <a:pPr>
+              <a:spcAft>
+                <a:spcPts val="800"/>
+              </a:spcAft>
+              <a:defRPr sz="1150">
+                <a:solidFill>
+                  <a:srgbClr val="CBD5E1"/>
+                </a:solidFill>
+              </a:defRPr>
+            </a:pPr>
+            <a:r>
+              <a:t>• Absorción de SSRF: En 2025, Server-Side Request Forgery se integró como defecto de acceso.</a:t>
+            </a:r>
+          </a:p>
+          <a:p>
+            <a:pPr>
+              <a:spcAft>
+                <a:spcPts val="800"/>
+              </a:spcAft>
+              <a:defRPr sz="1150">
+                <a:solidFill>
+                  <a:srgbClr val="CBD5E1"/>
+                </a:solidFill>
+              </a:defRPr>
+            </a:pPr>
+            <a:r>
+              <a:t>• Causa Fundamental: Falta de validación en los verbos POST, PUT y DELETE en APIs REST.</a:t>
+            </a:r>
+          </a:p>
+          <a:p>
+            <a:pPr>
+              <a:spcAft>
+                <a:spcPts val="800"/>
+              </a:spcAft>
+              <a:defRPr sz="1150">
+                <a:solidFill>
+                  <a:srgbClr val="CBD5E1"/>
+                </a:solidFill>
+              </a:defRPr>
+            </a:pPr>
+            <a:r>
+              <a:t>• El Error Clave: Confiar ciegamente en comprobaciones hechas en el navegador o enviar identificadores directos.</a:t>
+            </a:r>
+          </a:p>
+          <a:p>
+            <a:pPr>
+              <a:spcAft>
+                <a:spcPts val="800"/>
+              </a:spcAft>
+              <a:defRPr sz="1150">
+                <a:solidFill>
+                  <a:srgbClr val="CBD5E1"/>
+                </a:solidFill>
+              </a:defRPr>
+            </a:pPr>
+            <a:r>
+              <a:t>• Principio de Menor Privilegio: Si no se deniega el acceso por defecto, la aplicación es vulnerable.</a:t>
             </a:r>
           </a:p>
         </p:txBody>
@@ -7694,18 +7642,18 @@
         </p:nvSpPr>
         <p:spPr>
           <a:xfrm>
-            <a:off x="731520" y="1645920"/>
-            <a:ext cx="3383280" cy="4572000"/>
+            <a:off x="7223760" y="1645920"/>
+            <a:ext cx="4206240" cy="4480560"/>
           </a:xfrm>
           <a:prstGeom prst="roundRect">
             <a:avLst/>
           </a:prstGeom>
           <a:solidFill>
-            <a:srgbClr val="131D33"/>
+            <a:srgbClr val="080C14"/>
           </a:solidFill>
           <a:ln w="12700">
             <a:solidFill>
-              <a:srgbClr val="24324D"/>
+              <a:srgbClr val="EF4444"/>
             </a:solidFill>
           </a:ln>
         </p:spPr>
@@ -7724,375 +7672,83 @@
           </a:fontRef>
         </p:style>
         <p:txBody>
-          <a:bodyPr rtlCol="0" anchor="ctr" wrap="square" lIns="228600" rIns="228600" tIns="201168" bIns="201168"/>
+          <a:bodyPr rtlCol="0" anchor="ctr" lIns="274320" tIns="228600"/>
           <a:lstStyle/>
           <a:p>
             <a:pPr algn="ctr">
               <a:spcAft>
                 <a:spcPts val="800"/>
               </a:spcAft>
-              <a:defRPr sz="1500" b="1">
-                <a:solidFill>
-                  <a:srgbClr val="EF4444"/>
-                </a:solidFill>
-              </a:defRPr>
-            </a:pPr>
-            <a:r>
-              <a:t>Contexto y Alcance</a:t>
-            </a:r>
-          </a:p>
-          <a:p>
-            <a:pPr>
-              <a:spcAft>
-                <a:spcPts val="800"/>
-              </a:spcAft>
-              <a:defRPr sz="950" b="1">
-                <a:solidFill>
-                  <a:srgbClr val="94A3B8"/>
-                </a:solidFill>
-              </a:defRPr>
-            </a:pPr>
-            <a:r>
-              <a:t>[100% de Incidencia]</a:t>
-            </a:r>
-          </a:p>
-          <a:p>
-            <a:pPr>
-              <a:spcAft>
-                <a:spcPts val="600"/>
-              </a:spcAft>
-              <a:defRPr sz="1200">
-                <a:solidFill>
-                  <a:srgbClr val="CBD5E1"/>
-                </a:solidFill>
-              </a:defRPr>
-            </a:pPr>
-            <a:r>
-              <a:t>• Mantiene el 1er puesto de forma absoluta.</a:t>
-            </a:r>
-          </a:p>
-          <a:p>
-            <a:pPr>
-              <a:spcAft>
-                <a:spcPts val="600"/>
-              </a:spcAft>
-              <a:defRPr sz="1200">
-                <a:solidFill>
-                  <a:srgbClr val="CBD5E1"/>
-                </a:solidFill>
-              </a:defRPr>
-            </a:pPr>
-            <a:r>
-              <a:t>• El 100% de las aplicaciones analizadas tuvo alguna vulnerabilidad de control de acceso.</a:t>
-            </a:r>
-          </a:p>
-          <a:p>
-            <a:pPr>
-              <a:spcAft>
-                <a:spcPts val="600"/>
-              </a:spcAft>
-              <a:defRPr sz="1200">
-                <a:solidFill>
-                  <a:srgbClr val="CBD5E1"/>
-                </a:solidFill>
-              </a:defRPr>
-            </a:pPr>
-            <a:r>
-              <a:t>• Ocurre cuando un usuario puede actuar fuera de los límites de sus permisos asignados.</a:t>
-            </a:r>
-          </a:p>
-          <a:p>
-            <a:pPr>
-              <a:spcAft>
-                <a:spcPts val="600"/>
-              </a:spcAft>
-              <a:defRPr sz="1200">
-                <a:solidFill>
-                  <a:srgbClr val="CBD5E1"/>
-                </a:solidFill>
-              </a:defRPr>
-            </a:pPr>
-            <a:r>
-              <a:t>• En 2025 absorbe SSRF (Server-Side Request Forgery).</a:t>
-            </a:r>
-          </a:p>
-        </p:txBody>
-      </p:sp>
-      <p:sp>
-        <p:nvSpPr>
-          <p:cNvPr id="7" name="Rounded Rectangle 6"/>
-          <p:cNvSpPr/>
-          <p:nvPr/>
-        </p:nvSpPr>
-        <p:spPr>
-          <a:xfrm>
-            <a:off x="4389120" y="1645920"/>
-            <a:ext cx="3383280" cy="4572000"/>
-          </a:xfrm>
-          <a:prstGeom prst="roundRect">
-            <a:avLst/>
-          </a:prstGeom>
-          <a:solidFill>
-            <a:srgbClr val="131D33"/>
-          </a:solidFill>
-          <a:ln w="12700">
-            <a:solidFill>
-              <a:srgbClr val="24324D"/>
-            </a:solidFill>
-          </a:ln>
-        </p:spPr>
-        <p:style>
-          <a:lnRef idx="1">
-            <a:schemeClr val="accent1"/>
-          </a:lnRef>
-          <a:fillRef idx="3">
-            <a:schemeClr val="accent1"/>
-          </a:fillRef>
-          <a:effectRef idx="2">
-            <a:schemeClr val="accent1"/>
-          </a:effectRef>
-          <a:fontRef idx="minor">
-            <a:schemeClr val="lt1"/>
-          </a:fontRef>
-        </p:style>
-        <p:txBody>
-          <a:bodyPr rtlCol="0" anchor="ctr" wrap="square" lIns="228600" rIns="228600" tIns="201168" bIns="201168"/>
-          <a:lstStyle/>
-          <a:p>
-            <a:pPr algn="ctr">
-              <a:spcAft>
-                <a:spcPts val="800"/>
-              </a:spcAft>
-              <a:defRPr sz="1500" b="1">
+              <a:defRPr sz="1200" b="1">
                 <a:solidFill>
                   <a:srgbClr val="F59E0B"/>
                 </a:solidFill>
               </a:defRPr>
             </a:pPr>
             <a:r>
-              <a:t>Causas Frecuentes &amp; IDOR</a:t>
-            </a:r>
-          </a:p>
-          <a:p>
-            <a:pPr>
-              <a:spcAft>
-                <a:spcPts val="800"/>
-              </a:spcAft>
-              <a:defRPr sz="950" b="1">
-                <a:solidFill>
-                  <a:srgbClr val="94A3B8"/>
-                </a:solidFill>
-              </a:defRPr>
-            </a:pPr>
-            <a:r>
-              <a:t>[Vectores Típicos]</a:t>
-            </a:r>
-          </a:p>
-          <a:p>
-            <a:pPr>
-              <a:spcAft>
-                <a:spcPts val="600"/>
-              </a:spcAft>
-              <a:defRPr sz="1200">
-                <a:solidFill>
-                  <a:srgbClr val="CBD5E1"/>
-                </a:solidFill>
-              </a:defRPr>
-            </a:pPr>
-            <a:r>
-              <a:t>• Insecure Direct Object References (IDOR): cambiar un ID en la URL (?acct=102).</a:t>
-            </a:r>
-          </a:p>
-          <a:p>
-            <a:pPr>
-              <a:spcAft>
-                <a:spcPts val="600"/>
-              </a:spcAft>
-              <a:defRPr sz="1200">
-                <a:solidFill>
-                  <a:srgbClr val="CBD5E1"/>
-                </a:solidFill>
-              </a:defRPr>
-            </a:pPr>
-            <a:r>
-              <a:t>• APIs sin validación en verbos POST, PUT y DELETE.</a:t>
-            </a:r>
-          </a:p>
-          <a:p>
-            <a:pPr>
-              <a:spcAft>
-                <a:spcPts val="600"/>
-              </a:spcAft>
-              <a:defRPr sz="1200">
-                <a:solidFill>
-                  <a:srgbClr val="CBD5E1"/>
-                </a:solidFill>
-              </a:defRPr>
-            </a:pPr>
-            <a:r>
-              <a:t>• Violación del Principio de Mínimo Privilegio.</a:t>
-            </a:r>
-          </a:p>
-          <a:p>
-            <a:pPr>
-              <a:spcAft>
-                <a:spcPts val="600"/>
-              </a:spcAft>
-              <a:defRPr sz="1200">
-                <a:solidFill>
-                  <a:srgbClr val="CBD5E1"/>
-                </a:solidFill>
-              </a:defRPr>
-            </a:pPr>
-            <a:r>
-              <a:t>• Tokens JWT o cookies manipuladas para elevar privilegios.</a:t>
-            </a:r>
-          </a:p>
-          <a:p>
-            <a:pPr>
-              <a:spcAft>
-                <a:spcPts val="600"/>
-              </a:spcAft>
-              <a:defRPr sz="1200">
-                <a:solidFill>
-                  <a:srgbClr val="CBD5E1"/>
-                </a:solidFill>
-              </a:defRPr>
-            </a:pPr>
-            <a:r>
-              <a:t>• Controles delegados únicamente al navegador/frontend.</a:t>
-            </a:r>
-          </a:p>
-        </p:txBody>
-      </p:sp>
-      <p:sp>
-        <p:nvSpPr>
-          <p:cNvPr id="8" name="Rounded Rectangle 7"/>
-          <p:cNvSpPr/>
-          <p:nvPr/>
-        </p:nvSpPr>
-        <p:spPr>
-          <a:xfrm>
-            <a:off x="8046720" y="1645920"/>
-            <a:ext cx="3383280" cy="4572000"/>
-          </a:xfrm>
-          <a:prstGeom prst="roundRect">
-            <a:avLst/>
-          </a:prstGeom>
-          <a:solidFill>
-            <a:srgbClr val="131D33"/>
-          </a:solidFill>
-          <a:ln w="12700">
-            <a:solidFill>
-              <a:srgbClr val="24324D"/>
-            </a:solidFill>
-          </a:ln>
-        </p:spPr>
-        <p:style>
-          <a:lnRef idx="1">
-            <a:schemeClr val="accent1"/>
-          </a:lnRef>
-          <a:fillRef idx="3">
-            <a:schemeClr val="accent1"/>
-          </a:fillRef>
-          <a:effectRef idx="2">
-            <a:schemeClr val="accent1"/>
-          </a:effectRef>
-          <a:fontRef idx="minor">
-            <a:schemeClr val="lt1"/>
-          </a:fontRef>
-        </p:style>
-        <p:txBody>
-          <a:bodyPr rtlCol="0" anchor="ctr" wrap="square" lIns="228600" rIns="228600" tIns="201168" bIns="201168"/>
-          <a:lstStyle/>
-          <a:p>
-            <a:pPr algn="ctr">
-              <a:spcAft>
-                <a:spcPts val="800"/>
-              </a:spcAft>
-              <a:defRPr sz="1500" b="1">
-                <a:solidFill>
-                  <a:srgbClr val="10B981"/>
-                </a:solidFill>
-              </a:defRPr>
-            </a:pPr>
-            <a:r>
-              <a:t>Estrategia de Mitigación</a:t>
-            </a:r>
-          </a:p>
-          <a:p>
-            <a:pPr>
-              <a:spcAft>
-                <a:spcPts val="800"/>
-              </a:spcAft>
-              <a:defRPr sz="950" b="1">
-                <a:solidFill>
-                  <a:srgbClr val="94A3B8"/>
-                </a:solidFill>
-              </a:defRPr>
-            </a:pPr>
-            <a:r>
-              <a:t>[Defensa en Profundidad]</a:t>
-            </a:r>
-          </a:p>
-          <a:p>
-            <a:pPr>
-              <a:spcAft>
-                <a:spcPts val="600"/>
-              </a:spcAft>
-              <a:defRPr sz="1200">
-                <a:solidFill>
-                  <a:srgbClr val="CBD5E1"/>
-                </a:solidFill>
-              </a:defRPr>
-            </a:pPr>
-            <a:r>
-              <a:t>• Validación estricta de propiedad de recursos en el backend (RBAC / ABAC).</a:t>
-            </a:r>
-          </a:p>
-          <a:p>
-            <a:pPr>
-              <a:spcAft>
-                <a:spcPts val="600"/>
-              </a:spcAft>
-              <a:defRPr sz="1200">
-                <a:solidFill>
-                  <a:srgbClr val="CBD5E1"/>
-                </a:solidFill>
-              </a:defRPr>
-            </a:pPr>
-            <a:r>
-              <a:t>• Deshabilitar navegación de directorios y forzar denegación por defecto.</a:t>
-            </a:r>
-          </a:p>
-          <a:p>
-            <a:pPr>
-              <a:spcAft>
-                <a:spcPts val="600"/>
-              </a:spcAft>
-              <a:defRPr sz="1200">
-                <a:solidFill>
-                  <a:srgbClr val="CBD5E1"/>
-                </a:solidFill>
-              </a:defRPr>
-            </a:pPr>
-            <a:r>
-              <a:t>• Pruebas unitarias e integración de control de acceso en pipelines CI/CD.</a:t>
-            </a:r>
-          </a:p>
-          <a:p>
-            <a:pPr>
-              <a:spcAft>
-                <a:spcPts val="600"/>
-              </a:spcAft>
-              <a:defRPr sz="1200">
-                <a:solidFill>
-                  <a:srgbClr val="CBD5E1"/>
-                </a:solidFill>
-              </a:defRPr>
-            </a:pPr>
-            <a:r>
-              <a:t>• Registro de auditoría ante cualquier intento de elevación de privilegios.</a:t>
+              <a:t>ANATOMÍA DE UN ATAQUE IDOR</a:t>
+            </a:r>
+          </a:p>
+          <a:p>
+            <a:pPr>
+              <a:defRPr sz="1050">
+                <a:solidFill>
+                  <a:srgbClr val="06B6D4"/>
+                </a:solidFill>
+              </a:defRPr>
+            </a:pPr>
+            <a:r>
+              <a:t>// 1. Petición del Cliente Manipulada:</a:t>
+            </a:r>
+            <a:br/>
+            <a:r>
+              <a:t>GET /api/v1/cuenta?acct=102 HTTP/1.1</a:t>
+            </a:r>
+            <a:br/>
+            <a:r>
+              <a:t>Cookie: user_session_id=101 (Juan)</a:t>
+            </a:r>
+            <a:br/>
+            <a:br/>
+            <a:r>
+              <a:t>// 2. Falla del Backend Vulnerable:</a:t>
+            </a:r>
+            <a:br/>
+            <a:r>
+              <a:t>const id = req.query.acct; // Lee 102 directo</a:t>
+            </a:r>
+            <a:br/>
+            <a:r>
+              <a:t>const data = db.find({ id }); // ¡Sin check!</a:t>
+            </a:r>
+            <a:br/>
+            <a:r>
+              <a:t>return res.json(data); // HTTP 200 (Fuga)</a:t>
+            </a:r>
+            <a:br/>
+            <a:br/>
+            <a:r>
+              <a:t>// 3. Mitigación Obligatoria (RBAC):</a:t>
+            </a:r>
+            <a:br/>
+            <a:r>
+              <a:t>if (req.user.acctId !== requestedId) {</a:t>
+            </a:r>
+            <a:br/>
+            <a:r>
+              <a:t>  return res.status(403).json({</a:t>
+            </a:r>
+            <a:br/>
+            <a:r>
+              <a:t>    error: 'Acceso Denegado'</a:t>
+            </a:r>
+            <a:br/>
+            <a:r>
+              <a:t>  });</a:t>
+            </a:r>
+            <a:br/>
+            <a:r>
+              <a:t>}</a:t>
             </a:r>
           </a:p>
         </p:txBody>
@@ -8166,8 +7822,8 @@
         </p:nvSpPr>
         <p:spPr>
           <a:xfrm>
-            <a:off x="731520" y="365760"/>
-            <a:ext cx="2926080" cy="365760"/>
+            <a:off x="731520" y="384048"/>
+            <a:ext cx="3108960" cy="320040"/>
           </a:xfrm>
           <a:prstGeom prst="roundRect">
             <a:avLst/>
@@ -8196,32 +7852,67 @@
           </a:fontRef>
         </p:style>
         <p:txBody>
-          <a:bodyPr rtlCol="0" anchor="ctr" wrap="square"/>
+          <a:bodyPr rtlCol="0" anchor="ctr"/>
           <a:lstStyle/>
           <a:p>
             <a:pPr algn="ctr">
-              <a:defRPr sz="1050" b="1">
+              <a:defRPr sz="1000" b="1">
                 <a:solidFill>
                   <a:srgbClr val="EF4444"/>
                 </a:solidFill>
               </a:defRPr>
             </a:pPr>
             <a:r>
-              <a:t>ORADOR 2</a:t>
-            </a:r>
-          </a:p>
-        </p:txBody>
-      </p:sp>
-      <p:sp>
-        <p:nvSpPr>
-          <p:cNvPr id="4" name="Rounded Rectangle 3"/>
+              <a:t>ASCENSO AL PUESTO #2 — FALLA ESTRUCTURAL</a:t>
+            </a:r>
+          </a:p>
+        </p:txBody>
+      </p:sp>
+      <p:sp>
+        <p:nvSpPr>
+          <p:cNvPr id="4" name="TextBox 3"/>
+          <p:cNvSpPr txBox="1"/>
+          <p:nvPr/>
+        </p:nvSpPr>
+        <p:spPr>
+          <a:xfrm>
+            <a:off x="731520" y="749808"/>
+            <a:ext cx="10698480" cy="685800"/>
+          </a:xfrm>
+          <a:prstGeom prst="rect">
+            <a:avLst/>
+          </a:prstGeom>
+          <a:noFill/>
+        </p:spPr>
+        <p:txBody>
+          <a:bodyPr wrap="square">
+            <a:spAutoFit/>
+          </a:bodyPr>
+          <a:lstStyle/>
+          <a:p>
+            <a:pPr>
+              <a:defRPr sz="2200" b="1">
+                <a:solidFill>
+                  <a:srgbClr val="F1F5F9"/>
+                </a:solidFill>
+              </a:defRPr>
+            </a:pPr>
+            <a:r>
+              <a:t>A02: Configuración de Seguridad Incorrecta</a:t>
+            </a:r>
+          </a:p>
+        </p:txBody>
+      </p:sp>
+      <p:sp>
+        <p:nvSpPr>
+          <p:cNvPr id="5" name="Rounded Rectangle 4"/>
           <p:cNvSpPr/>
           <p:nvPr/>
         </p:nvSpPr>
         <p:spPr>
           <a:xfrm>
-            <a:off x="3840480" y="365760"/>
-            <a:ext cx="3200400" cy="365760"/>
+            <a:off x="731520" y="1645920"/>
+            <a:ext cx="3383280" cy="4480560"/>
           </a:xfrm>
           <a:prstGeom prst="roundRect">
             <a:avLst/>
@@ -8229,7 +7920,7 @@
           <a:solidFill>
             <a:srgbClr val="131D33"/>
           </a:solidFill>
-          <a:ln w="12700">
+          <a:ln>
             <a:solidFill>
               <a:srgbClr val="24324D"/>
             </a:solidFill>
@@ -8250,53 +7941,66 @@
           </a:fontRef>
         </p:style>
         <p:txBody>
-          <a:bodyPr rtlCol="0" anchor="ctr"/>
+          <a:bodyPr rtlCol="0" anchor="ctr" lIns="228600" tIns="228600"/>
           <a:lstStyle/>
           <a:p>
             <a:pPr algn="ctr">
-              <a:defRPr sz="1000" b="1">
-                <a:solidFill>
-                  <a:srgbClr val="94A3B8"/>
-                </a:solidFill>
-              </a:defRPr>
-            </a:pPr>
-            <a:r>
-              <a:t>ASCENSO AL PUESTO #2</a:t>
-            </a:r>
-          </a:p>
-        </p:txBody>
-      </p:sp>
-      <p:sp>
-        <p:nvSpPr>
-          <p:cNvPr id="5" name="TextBox 4"/>
-          <p:cNvSpPr txBox="1"/>
-          <p:nvPr/>
-        </p:nvSpPr>
-        <p:spPr>
-          <a:xfrm>
-            <a:off x="731520" y="777240"/>
-            <a:ext cx="10698480" cy="731520"/>
-          </a:xfrm>
-          <a:prstGeom prst="rect">
-            <a:avLst/>
-          </a:prstGeom>
-          <a:noFill/>
-        </p:spPr>
-        <p:txBody>
-          <a:bodyPr wrap="square">
-            <a:spAutoFit/>
-          </a:bodyPr>
-          <a:lstStyle/>
-          <a:p>
-            <a:pPr>
-              <a:defRPr sz="2400" b="1">
-                <a:solidFill>
-                  <a:srgbClr val="F1F5F9"/>
-                </a:solidFill>
-              </a:defRPr>
-            </a:pPr>
-            <a:r>
-              <a:t>A02: Configuración de Seguridad Incorrecta</a:t>
+              <a:spcAft>
+                <a:spcPts val="800"/>
+              </a:spcAft>
+              <a:defRPr sz="1300" b="1">
+                <a:solidFill>
+                  <a:srgbClr val="EF4444"/>
+                </a:solidFill>
+              </a:defRPr>
+            </a:pPr>
+            <a:r>
+              <a:t>EL SALTO DEL PUESTO 5 AL 2</a:t>
+            </a:r>
+          </a:p>
+          <a:p>
+            <a:pPr>
+              <a:spcAft>
+                <a:spcPts val="600"/>
+              </a:spcAft>
+              <a:defRPr sz="1100">
+                <a:solidFill>
+                  <a:srgbClr val="CBD5E1"/>
+                </a:solidFill>
+              </a:defRPr>
+            </a:pPr>
+            <a:r>
+              <a:t>• 100% de prevalencia en los sistemas analizados.</a:t>
+            </a:r>
+          </a:p>
+          <a:p>
+            <a:pPr>
+              <a:spcAft>
+                <a:spcPts val="600"/>
+              </a:spcAft>
+              <a:defRPr sz="1100">
+                <a:solidFill>
+                  <a:srgbClr val="CBD5E1"/>
+                </a:solidFill>
+              </a:defRPr>
+            </a:pPr>
+            <a:r>
+              <a:t>• Cambio de paradigma: El comportamiento real depende más de la infraestructura y cloud que del código.</a:t>
+            </a:r>
+          </a:p>
+          <a:p>
+            <a:pPr>
+              <a:spcAft>
+                <a:spcPts val="600"/>
+              </a:spcAft>
+              <a:defRPr sz="1100">
+                <a:solidFill>
+                  <a:srgbClr val="CBD5E1"/>
+                </a:solidFill>
+              </a:defRPr>
+            </a:pPr>
+            <a:r>
+              <a:t>• La proliferación de servicios nube y microservicios multiplica los errores humanos en settings.</a:t>
             </a:r>
           </a:p>
         </p:txBody>
@@ -8309,8 +8013,8 @@
         </p:nvSpPr>
         <p:spPr>
           <a:xfrm>
-            <a:off x="731520" y="1645920"/>
-            <a:ext cx="3383280" cy="4572000"/>
+            <a:off x="4389120" y="1645920"/>
+            <a:ext cx="3383280" cy="4480560"/>
           </a:xfrm>
           <a:prstGeom prst="roundRect">
             <a:avLst/>
@@ -8318,7 +8022,7 @@
           <a:solidFill>
             <a:srgbClr val="131D33"/>
           </a:solidFill>
-          <a:ln w="12700">
+          <a:ln>
             <a:solidFill>
               <a:srgbClr val="24324D"/>
             </a:solidFill>
@@ -8339,36 +8043,21 @@
           </a:fontRef>
         </p:style>
         <p:txBody>
-          <a:bodyPr rtlCol="0" anchor="ctr" wrap="square" lIns="228600" rIns="228600" tIns="201168" bIns="201168"/>
+          <a:bodyPr rtlCol="0" anchor="ctr" lIns="228600" tIns="228600"/>
           <a:lstStyle/>
           <a:p>
             <a:pPr algn="ctr">
               <a:spcAft>
                 <a:spcPts val="800"/>
               </a:spcAft>
-              <a:defRPr sz="1500" b="1">
-                <a:solidFill>
-                  <a:srgbClr val="EF4444"/>
-                </a:solidFill>
-              </a:defRPr>
-            </a:pPr>
-            <a:r>
-              <a:t>¿Por qué subió al Puesto #2?</a:t>
-            </a:r>
-          </a:p>
-          <a:p>
-            <a:pPr>
-              <a:spcAft>
-                <a:spcPts val="800"/>
-              </a:spcAft>
-              <a:defRPr sz="950" b="1">
-                <a:solidFill>
-                  <a:srgbClr val="94A3B8"/>
-                </a:solidFill>
-              </a:defRPr>
-            </a:pPr>
-            <a:r>
-              <a:t>[Falla Estructural]</a:t>
+              <a:defRPr sz="1300" b="1">
+                <a:solidFill>
+                  <a:srgbClr val="F59E0B"/>
+                </a:solidFill>
+              </a:defRPr>
+            </a:pPr>
+            <a:r>
+              <a:t>ERRORES MÁS FRECUENTES</a:t>
             </a:r>
           </a:p>
           <a:p>
@@ -8376,14 +8065,14 @@
               <a:spcAft>
                 <a:spcPts val="600"/>
               </a:spcAft>
-              <a:defRPr sz="1200">
+              <a:defRPr sz="1100">
                 <a:solidFill>
                   <a:srgbClr val="CBD5E1"/>
                 </a:solidFill>
               </a:defRPr>
             </a:pPr>
             <a:r>
-              <a:t>• Estaba en el puesto #5 en 2021; su escalada refleja la complejidad cloud.</a:t>
+              <a:t>• Cuentas y claves por defecto jamás modificadas.</a:t>
             </a:r>
           </a:p>
           <a:p>
@@ -8391,14 +8080,14 @@
               <a:spcAft>
                 <a:spcPts val="600"/>
               </a:spcAft>
-              <a:defRPr sz="1200">
+              <a:defRPr sz="1100">
                 <a:solidFill>
                   <a:srgbClr val="CBD5E1"/>
                 </a:solidFill>
               </a:defRPr>
             </a:pPr>
             <a:r>
-              <a:t>• 100% de aplicaciones evaluadas tenían configuraciones inseguras.</a:t>
+              <a:t>• Consolas de administración o endpoints de prueba habilitados en producción.</a:t>
             </a:r>
           </a:p>
           <a:p>
@@ -8406,14 +8095,14 @@
               <a:spcAft>
                 <a:spcPts val="600"/>
               </a:spcAft>
-              <a:defRPr sz="1200">
+              <a:defRPr sz="1100">
                 <a:solidFill>
                   <a:srgbClr val="CBD5E1"/>
                 </a:solidFill>
               </a:defRPr>
             </a:pPr>
             <a:r>
-              <a:t>• El comportamiento real del sistema depende más de su configuración que de su código fuente.</a:t>
+              <a:t>• Ausencia de cabeceras HTTP de seguridad (CSP, HSTS, X-Content-Type).</a:t>
             </a:r>
           </a:p>
           <a:p>
@@ -8421,14 +8110,14 @@
               <a:spcAft>
                 <a:spcPts val="600"/>
               </a:spcAft>
-              <a:defRPr sz="1200">
+              <a:defRPr sz="1100">
                 <a:solidFill>
                   <a:srgbClr val="CBD5E1"/>
                 </a:solidFill>
               </a:defRPr>
             </a:pPr>
             <a:r>
-              <a:t>• Los entornos de nube multiplican la posibilidad de configuraciones erróneas.</a:t>
+              <a:t>• Stack traces y versiones de frameworks expuestas en mensajes de error públicos.</a:t>
             </a:r>
           </a:p>
         </p:txBody>
@@ -8441,8 +8130,8 @@
         </p:nvSpPr>
         <p:spPr>
           <a:xfrm>
-            <a:off x="4389120" y="1645920"/>
-            <a:ext cx="3383280" cy="4572000"/>
+            <a:off x="8046720" y="1645920"/>
+            <a:ext cx="3383280" cy="4480560"/>
           </a:xfrm>
           <a:prstGeom prst="roundRect">
             <a:avLst/>
@@ -8450,7 +8139,7 @@
           <a:solidFill>
             <a:srgbClr val="131D33"/>
           </a:solidFill>
-          <a:ln w="12700">
+          <a:ln>
             <a:solidFill>
               <a:srgbClr val="24324D"/>
             </a:solidFill>
@@ -8471,36 +8160,21 @@
           </a:fontRef>
         </p:style>
         <p:txBody>
-          <a:bodyPr rtlCol="0" anchor="ctr" wrap="square" lIns="228600" rIns="228600" tIns="201168" bIns="201168"/>
+          <a:bodyPr rtlCol="0" anchor="ctr" lIns="228600" tIns="228600"/>
           <a:lstStyle/>
           <a:p>
             <a:pPr algn="ctr">
               <a:spcAft>
                 <a:spcPts val="800"/>
               </a:spcAft>
-              <a:defRPr sz="1500" b="1">
-                <a:solidFill>
-                  <a:srgbClr val="F59E0B"/>
-                </a:solidFill>
-              </a:defRPr>
-            </a:pPr>
-            <a:r>
-              <a:t>Causas Frecuentes</a:t>
-            </a:r>
-          </a:p>
-          <a:p>
-            <a:pPr>
-              <a:spcAft>
-                <a:spcPts val="800"/>
-              </a:spcAft>
-              <a:defRPr sz="950" b="1">
-                <a:solidFill>
-                  <a:srgbClr val="94A3B8"/>
-                </a:solidFill>
-              </a:defRPr>
-            </a:pPr>
-            <a:r>
-              <a:t>[Errores Comunes]</a:t>
+              <a:defRPr sz="1300" b="1">
+                <a:solidFill>
+                  <a:srgbClr val="10B981"/>
+                </a:solidFill>
+              </a:defRPr>
+            </a:pPr>
+            <a:r>
+              <a:t>HARDENING Y MITIGACIÓN</a:t>
             </a:r>
           </a:p>
           <a:p>
@@ -8508,14 +8182,14 @@
               <a:spcAft>
                 <a:spcPts val="600"/>
               </a:spcAft>
-              <a:defRPr sz="1200">
+              <a:defRPr sz="1100">
                 <a:solidFill>
                   <a:srgbClr val="CBD5E1"/>
                 </a:solidFill>
               </a:defRPr>
             </a:pPr>
             <a:r>
-              <a:t>• Cuentas y contraseñas predeterminadas sin modificar.</a:t>
+              <a:t>• Adopción de guías de endurecimiento oficiales de NIST y CIS Benchmarks.</a:t>
             </a:r>
           </a:p>
           <a:p>
@@ -8523,14 +8197,14 @@
               <a:spcAft>
                 <a:spcPts val="600"/>
               </a:spcAft>
-              <a:defRPr sz="1200">
+              <a:defRPr sz="1100">
                 <a:solidFill>
                   <a:srgbClr val="CBD5E1"/>
                 </a:solidFill>
               </a:defRPr>
             </a:pPr>
             <a:r>
-              <a:t>• Puertos, consolas de administración o páginas de prueba habilitadas.</a:t>
+              <a:t>• Infraestructura como Código (IaC) inmutable y auditada antes del deploy.</a:t>
             </a:r>
           </a:p>
           <a:p>
@@ -8538,14 +8212,14 @@
               <a:spcAft>
                 <a:spcPts val="600"/>
               </a:spcAft>
-              <a:defRPr sz="1200">
+              <a:defRPr sz="1100">
                 <a:solidFill>
                   <a:srgbClr val="CBD5E1"/>
                 </a:solidFill>
               </a:defRPr>
             </a:pPr>
             <a:r>
-              <a:t>• Headers de seguridad HTTP ausentes (CSP, HSTS, X-Content-Type).</a:t>
+              <a:t>• Deshabilitar funciones y módulos innecesarios en imágenes de contenedores.</a:t>
             </a:r>
           </a:p>
           <a:p>
@@ -8553,161 +8227,14 @@
               <a:spcAft>
                 <a:spcPts val="600"/>
               </a:spcAft>
-              <a:defRPr sz="1200">
+              <a:defRPr sz="1100">
                 <a:solidFill>
                   <a:srgbClr val="CBD5E1"/>
                 </a:solidFill>
               </a:defRPr>
             </a:pPr>
             <a:r>
-              <a:t>• Permisos excesivos en buckets y servicios cloud.</a:t>
-            </a:r>
-          </a:p>
-          <a:p>
-            <a:pPr>
-              <a:spcAft>
-                <a:spcPts val="600"/>
-              </a:spcAft>
-              <a:defRPr sz="1200">
-                <a:solidFill>
-                  <a:srgbClr val="CBD5E1"/>
-                </a:solidFill>
-              </a:defRPr>
-            </a:pPr>
-            <a:r>
-              <a:t>• Mensajes de error verbosos que exponen stack traces y versiones.</a:t>
-            </a:r>
-          </a:p>
-        </p:txBody>
-      </p:sp>
-      <p:sp>
-        <p:nvSpPr>
-          <p:cNvPr id="8" name="Rounded Rectangle 7"/>
-          <p:cNvSpPr/>
-          <p:nvPr/>
-        </p:nvSpPr>
-        <p:spPr>
-          <a:xfrm>
-            <a:off x="8046720" y="1645920"/>
-            <a:ext cx="3383280" cy="4572000"/>
-          </a:xfrm>
-          <a:prstGeom prst="roundRect">
-            <a:avLst/>
-          </a:prstGeom>
-          <a:solidFill>
-            <a:srgbClr val="131D33"/>
-          </a:solidFill>
-          <a:ln w="12700">
-            <a:solidFill>
-              <a:srgbClr val="24324D"/>
-            </a:solidFill>
-          </a:ln>
-        </p:spPr>
-        <p:style>
-          <a:lnRef idx="1">
-            <a:schemeClr val="accent1"/>
-          </a:lnRef>
-          <a:fillRef idx="3">
-            <a:schemeClr val="accent1"/>
-          </a:fillRef>
-          <a:effectRef idx="2">
-            <a:schemeClr val="accent1"/>
-          </a:effectRef>
-          <a:fontRef idx="minor">
-            <a:schemeClr val="lt1"/>
-          </a:fontRef>
-        </p:style>
-        <p:txBody>
-          <a:bodyPr rtlCol="0" anchor="ctr" wrap="square" lIns="228600" rIns="228600" tIns="201168" bIns="201168"/>
-          <a:lstStyle/>
-          <a:p>
-            <a:pPr algn="ctr">
-              <a:spcAft>
-                <a:spcPts val="800"/>
-              </a:spcAft>
-              <a:defRPr sz="1500" b="1">
-                <a:solidFill>
-                  <a:srgbClr val="10B981"/>
-                </a:solidFill>
-              </a:defRPr>
-            </a:pPr>
-            <a:r>
-              <a:t>Mitigación y Detección</a:t>
-            </a:r>
-          </a:p>
-          <a:p>
-            <a:pPr>
-              <a:spcAft>
-                <a:spcPts val="800"/>
-              </a:spcAft>
-              <a:defRPr sz="950" b="1">
-                <a:solidFill>
-                  <a:srgbClr val="94A3B8"/>
-                </a:solidFill>
-              </a:defRPr>
-            </a:pPr>
-            <a:r>
-              <a:t>[Línea Base Segura]</a:t>
-            </a:r>
-          </a:p>
-          <a:p>
-            <a:pPr>
-              <a:spcAft>
-                <a:spcPts val="600"/>
-              </a:spcAft>
-              <a:defRPr sz="1200">
-                <a:solidFill>
-                  <a:srgbClr val="CBD5E1"/>
-                </a:solidFill>
-              </a:defRPr>
-            </a:pPr>
-            <a:r>
-              <a:t>• Guías de endurecimiento (Hardening) basadas en estándares NIST y CIS.</a:t>
-            </a:r>
-          </a:p>
-          <a:p>
-            <a:pPr>
-              <a:spcAft>
-                <a:spcPts val="600"/>
-              </a:spcAft>
-              <a:defRPr sz="1200">
-                <a:solidFill>
-                  <a:srgbClr val="CBD5E1"/>
-                </a:solidFill>
-              </a:defRPr>
-            </a:pPr>
-            <a:r>
-              <a:t>• Infraestructura como Código (IaC) auditada de forma reproducible.</a:t>
-            </a:r>
-          </a:p>
-          <a:p>
-            <a:pPr>
-              <a:spcAft>
-                <a:spcPts val="600"/>
-              </a:spcAft>
-              <a:defRPr sz="1200">
-                <a:solidFill>
-                  <a:srgbClr val="CBD5E1"/>
-                </a:solidFill>
-              </a:defRPr>
-            </a:pPr>
-            <a:r>
-              <a:t>• Deshabilitar características y servicios innecesarios en imágenes Docker.</a:t>
-            </a:r>
-          </a:p>
-          <a:p>
-            <a:pPr>
-              <a:spcAft>
-                <a:spcPts val="600"/>
-              </a:spcAft>
-              <a:defRPr sz="1200">
-                <a:solidFill>
-                  <a:srgbClr val="CBD5E1"/>
-                </a:solidFill>
-              </a:defRPr>
-            </a:pPr>
-            <a:r>
-              <a:t>• Verificaciones automatizadas comparando contra una línea base segura.</a:t>
+              <a:t>• Auditoría continua automatizada comparando contra líneas base.</a:t>
             </a:r>
           </a:p>
         </p:txBody>
@@ -8781,8 +8308,8 @@
         </p:nvSpPr>
         <p:spPr>
           <a:xfrm>
-            <a:off x="731520" y="365760"/>
-            <a:ext cx="2926080" cy="365760"/>
+            <a:off x="731520" y="384048"/>
+            <a:ext cx="3108960" cy="320040"/>
           </a:xfrm>
           <a:prstGeom prst="roundRect">
             <a:avLst/>
@@ -8811,32 +8338,139 @@
           </a:fontRef>
         </p:style>
         <p:txBody>
-          <a:bodyPr rtlCol="0" anchor="ctr" wrap="square"/>
+          <a:bodyPr rtlCol="0" anchor="ctr"/>
           <a:lstStyle/>
           <a:p>
             <a:pPr algn="ctr">
-              <a:defRPr sz="1050" b="1">
+              <a:defRPr sz="1000" b="1">
                 <a:solidFill>
                   <a:srgbClr val="F59E0B"/>
                 </a:solidFill>
               </a:defRPr>
             </a:pPr>
             <a:r>
-              <a:t>ORADOR 3</a:t>
-            </a:r>
-          </a:p>
-        </p:txBody>
-      </p:sp>
-      <p:sp>
-        <p:nvSpPr>
-          <p:cNvPr id="4" name="Rounded Rectangle 3"/>
+              <a:t>NUEVA CATEGORÍA 2025 (#3)</a:t>
+            </a:r>
+          </a:p>
+        </p:txBody>
+      </p:sp>
+      <p:sp>
+        <p:nvSpPr>
+          <p:cNvPr id="4" name="TextBox 3"/>
+          <p:cNvSpPr txBox="1"/>
+          <p:nvPr/>
+        </p:nvSpPr>
+        <p:spPr>
+          <a:xfrm>
+            <a:off x="731520" y="749808"/>
+            <a:ext cx="10698480" cy="685800"/>
+          </a:xfrm>
+          <a:prstGeom prst="rect">
+            <a:avLst/>
+          </a:prstGeom>
+          <a:noFill/>
+        </p:spPr>
+        <p:txBody>
+          <a:bodyPr wrap="square">
+            <a:spAutoFit/>
+          </a:bodyPr>
+          <a:lstStyle/>
+          <a:p>
+            <a:pPr>
+              <a:defRPr sz="2200" b="1">
+                <a:solidFill>
+                  <a:srgbClr val="F1F5F9"/>
+                </a:solidFill>
+              </a:defRPr>
+            </a:pPr>
+            <a:r>
+              <a:t>A03: Fallas en la Cadena de Suministro de Software</a:t>
+            </a:r>
+          </a:p>
+        </p:txBody>
+      </p:sp>
+      <p:sp>
+        <p:nvSpPr>
+          <p:cNvPr id="5" name="Rounded Rectangle 4"/>
           <p:cNvSpPr/>
           <p:nvPr/>
         </p:nvSpPr>
         <p:spPr>
           <a:xfrm>
-            <a:off x="3840480" y="365760"/>
-            <a:ext cx="3200400" cy="365760"/>
+            <a:off x="731520" y="1645920"/>
+            <a:ext cx="10698480" cy="2011680"/>
+          </a:xfrm>
+          <a:prstGeom prst="roundRect">
+            <a:avLst/>
+          </a:prstGeom>
+          <a:solidFill>
+            <a:srgbClr val="182541"/>
+          </a:solidFill>
+          <a:ln w="12700">
+            <a:solidFill>
+              <a:srgbClr val="F59E0B"/>
+            </a:solidFill>
+          </a:ln>
+        </p:spPr>
+        <p:style>
+          <a:lnRef idx="1">
+            <a:schemeClr val="accent1"/>
+          </a:lnRef>
+          <a:fillRef idx="3">
+            <a:schemeClr val="accent1"/>
+          </a:fillRef>
+          <a:effectRef idx="2">
+            <a:schemeClr val="accent1"/>
+          </a:effectRef>
+          <a:fontRef idx="minor">
+            <a:schemeClr val="lt1"/>
+          </a:fontRef>
+        </p:style>
+        <p:txBody>
+          <a:bodyPr rtlCol="0" anchor="ctr" lIns="320040" tIns="182880"/>
+          <a:lstStyle/>
+          <a:p>
+            <a:pPr algn="ctr">
+              <a:spcAft>
+                <a:spcPts val="600"/>
+              </a:spcAft>
+              <a:defRPr sz="1300" b="1">
+                <a:solidFill>
+                  <a:srgbClr val="F59E0B"/>
+                </a:solidFill>
+              </a:defRPr>
+            </a:pPr>
+            <a:r>
+              <a:t>CASO EMBLEMÁTICO: ATAQUE A SOLARWINDS (2019 - 2020)</a:t>
+            </a:r>
+          </a:p>
+          <a:p>
+            <a:pPr>
+              <a:lnSpc>
+                <a:spcPct val="125000"/>
+              </a:lnSpc>
+              <a:defRPr sz="1150">
+                <a:solidFill>
+                  <a:srgbClr val="F1F5F9"/>
+                </a:solidFill>
+              </a:defRPr>
+            </a:pPr>
+            <a:r>
+              <a:t>Los atacantes no vulneraron la aplicación final del cliente: comprometieron el pipeline de compilación (build system) del proveedor. El software malicioso fue firmado con certificados legítimos y distribuido como actualización oficial, infectando a más de 18.000 organizaciones (incluyendo ministerios de EEUU y gigantes tecnológicos).</a:t>
+            </a:r>
+          </a:p>
+        </p:txBody>
+      </p:sp>
+      <p:sp>
+        <p:nvSpPr>
+          <p:cNvPr id="6" name="Rounded Rectangle 5"/>
+          <p:cNvSpPr/>
+          <p:nvPr/>
+        </p:nvSpPr>
+        <p:spPr>
+          <a:xfrm>
+            <a:off x="731520" y="3931920"/>
+            <a:ext cx="5212080" cy="2286000"/>
           </a:xfrm>
           <a:prstGeom prst="roundRect">
             <a:avLst/>
@@ -8844,7 +8478,7 @@
           <a:solidFill>
             <a:srgbClr val="131D33"/>
           </a:solidFill>
-          <a:ln w="12700">
+          <a:ln>
             <a:solidFill>
               <a:srgbClr val="24324D"/>
             </a:solidFill>
@@ -8865,67 +8499,68 @@
           </a:fontRef>
         </p:style>
         <p:txBody>
-          <a:bodyPr rtlCol="0" anchor="ctr"/>
+          <a:bodyPr rtlCol="0" anchor="ctr" lIns="274320" tIns="182880"/>
           <a:lstStyle/>
           <a:p>
             <a:pPr algn="ctr">
-              <a:defRPr sz="1000" b="1">
-                <a:solidFill>
-                  <a:srgbClr val="94A3B8"/>
-                </a:solidFill>
-              </a:defRPr>
-            </a:pPr>
-            <a:r>
-              <a:t>NUEVA CATEGORÍA 2025 (#3)</a:t>
-            </a:r>
-          </a:p>
-        </p:txBody>
-      </p:sp>
-      <p:sp>
-        <p:nvSpPr>
-          <p:cNvPr id="5" name="TextBox 4"/>
-          <p:cNvSpPr txBox="1"/>
+              <a:defRPr sz="1200" b="1">
+                <a:solidFill>
+                  <a:srgbClr val="EF4444"/>
+                </a:solidFill>
+              </a:defRPr>
+            </a:pPr>
+            <a:r>
+              <a:t>Puntos Ciegos de la Cadena de Suministro</a:t>
+            </a:r>
+          </a:p>
+          <a:p>
+            <a:pPr>
+              <a:defRPr sz="1050">
+                <a:solidFill>
+                  <a:srgbClr val="CBD5E1"/>
+                </a:solidFill>
+              </a:defRPr>
+            </a:pPr>
+            <a:r>
+              <a:t>• No escanear dependencias transitivas ('las dependencias de las dependencias').</a:t>
+            </a:r>
+          </a:p>
+          <a:p>
+            <a:pPr>
+              <a:defRPr sz="1050">
+                <a:solidFill>
+                  <a:srgbClr val="CBD5E1"/>
+                </a:solidFill>
+              </a:defRPr>
+            </a:pPr>
+            <a:r>
+              <a:t>• Pipelines de CI/CD con menos protección que los servidores de producción.</a:t>
+            </a:r>
+          </a:p>
+          <a:p>
+            <a:pPr>
+              <a:defRPr sz="1050">
+                <a:solidFill>
+                  <a:srgbClr val="CBD5E1"/>
+                </a:solidFill>
+              </a:defRPr>
+            </a:pPr>
+            <a:r>
+              <a:t>• Parches aplicados con meses de demora tras publicarse los CVEs.</a:t>
+            </a:r>
+          </a:p>
+        </p:txBody>
+      </p:sp>
+      <p:sp>
+        <p:nvSpPr>
+          <p:cNvPr id="7" name="Rounded Rectangle 6"/>
+          <p:cNvSpPr/>
           <p:nvPr/>
         </p:nvSpPr>
         <p:spPr>
           <a:xfrm>
-            <a:off x="731520" y="777240"/>
-            <a:ext cx="10698480" cy="731520"/>
-          </a:xfrm>
-          <a:prstGeom prst="rect">
-            <a:avLst/>
-          </a:prstGeom>
-          <a:noFill/>
-        </p:spPr>
-        <p:txBody>
-          <a:bodyPr wrap="square">
-            <a:spAutoFit/>
-          </a:bodyPr>
-          <a:lstStyle/>
-          <a:p>
-            <a:pPr>
-              <a:defRPr sz="2400" b="1">
-                <a:solidFill>
-                  <a:srgbClr val="F1F5F9"/>
-                </a:solidFill>
-              </a:defRPr>
-            </a:pPr>
-            <a:r>
-              <a:t>A03: Fallas en la Cadena de Suministro de Software</a:t>
-            </a:r>
-          </a:p>
-        </p:txBody>
-      </p:sp>
-      <p:sp>
-        <p:nvSpPr>
-          <p:cNvPr id="6" name="Rounded Rectangle 5"/>
-          <p:cNvSpPr/>
-          <p:nvPr/>
-        </p:nvSpPr>
-        <p:spPr>
-          <a:xfrm>
-            <a:off x="731520" y="1645920"/>
-            <a:ext cx="3383280" cy="4572000"/>
+            <a:off x="6217920" y="3931920"/>
+            <a:ext cx="5212080" cy="2286000"/>
           </a:xfrm>
           <a:prstGeom prst="roundRect">
             <a:avLst/>
@@ -8933,7 +8568,7 @@
           <a:solidFill>
             <a:srgbClr val="131D33"/>
           </a:solidFill>
-          <a:ln w="12700">
+          <a:ln>
             <a:solidFill>
               <a:srgbClr val="24324D"/>
             </a:solidFill>
@@ -8954,360 +8589,54 @@
           </a:fontRef>
         </p:style>
         <p:txBody>
-          <a:bodyPr rtlCol="0" anchor="ctr" wrap="square" lIns="228600" rIns="228600" tIns="201168" bIns="201168"/>
+          <a:bodyPr rtlCol="0" anchor="ctr" lIns="274320" tIns="182880"/>
           <a:lstStyle/>
           <a:p>
             <a:pPr algn="ctr">
-              <a:spcAft>
-                <a:spcPts val="800"/>
-              </a:spcAft>
-              <a:defRPr sz="1500" b="1">
-                <a:solidFill>
-                  <a:srgbClr val="F59E0B"/>
-                </a:solidFill>
-              </a:defRPr>
-            </a:pPr>
-            <a:r>
-              <a:t>Evolución de la Amenaza</a:t>
-            </a:r>
-          </a:p>
-          <a:p>
-            <a:pPr>
-              <a:spcAft>
-                <a:spcPts val="800"/>
-              </a:spcAft>
-              <a:defRPr sz="950" b="1">
-                <a:solidFill>
-                  <a:srgbClr val="94A3B8"/>
-                </a:solidFill>
-              </a:defRPr>
-            </a:pPr>
-            <a:r>
-              <a:t>[Nueva Categoría]</a:t>
-            </a:r>
-          </a:p>
-          <a:p>
-            <a:pPr>
-              <a:spcAft>
-                <a:spcPts val="600"/>
-              </a:spcAft>
-              <a:defRPr sz="1200">
+              <a:defRPr sz="1200" b="1">
+                <a:solidFill>
+                  <a:srgbClr val="10B981"/>
+                </a:solidFill>
+              </a:defRPr>
+            </a:pPr>
+            <a:r>
+              <a:t>Controles Defensivos Requeridos</a:t>
+            </a:r>
+          </a:p>
+          <a:p>
+            <a:pPr>
+              <a:defRPr sz="1050">
                 <a:solidFill>
                   <a:srgbClr val="CBD5E1"/>
                 </a:solidFill>
               </a:defRPr>
             </a:pPr>
             <a:r>
-              <a:t>• Reemplaza y amplía 'componentes vulnerables y desactualizados'.</a:t>
-            </a:r>
-          </a:p>
-          <a:p>
-            <a:pPr>
-              <a:spcAft>
-                <a:spcPts val="600"/>
-              </a:spcAft>
-              <a:defRPr sz="1200">
+              <a:t>• SBOM (Software Bill of Materials) automatizado en cada release.</a:t>
+            </a:r>
+          </a:p>
+          <a:p>
+            <a:pPr>
+              <a:defRPr sz="1050">
                 <a:solidFill>
                   <a:srgbClr val="CBD5E1"/>
                 </a:solidFill>
               </a:defRPr>
             </a:pPr>
             <a:r>
-              <a:t>• Abarca todo el ciclo: herramientas de build, repositorios, dependencias y CI/CD.</a:t>
-            </a:r>
-          </a:p>
-          <a:p>
-            <a:pPr>
-              <a:spcAft>
-                <a:spcPts val="600"/>
-              </a:spcAft>
-              <a:defRPr sz="1200">
+              <a:t>• OWASP Dependency-Track y Dependency-Check integrados en CI/CD.</a:t>
+            </a:r>
+          </a:p>
+          <a:p>
+            <a:pPr>
+              <a:defRPr sz="1050">
                 <a:solidFill>
                   <a:srgbClr val="CBD5E1"/>
                 </a:solidFill>
               </a:defRPr>
             </a:pPr>
             <a:r>
-              <a:t>• Top #1 en la votación comunitaria de expertos por su impacto devastador.</a:t>
-            </a:r>
-          </a:p>
-          <a:p>
-            <a:pPr>
-              <a:spcAft>
-                <a:spcPts val="600"/>
-              </a:spcAft>
-              <a:defRPr sz="1200">
-                <a:solidFill>
-                  <a:srgbClr val="CBD5E1"/>
-                </a:solidFill>
-              </a:defRPr>
-            </a:pPr>
-            <a:r>
-              <a:t>• Los atacantes ya no atacan tu app: atacan las dependencias de tus dependencias.</a:t>
-            </a:r>
-          </a:p>
-        </p:txBody>
-      </p:sp>
-      <p:sp>
-        <p:nvSpPr>
-          <p:cNvPr id="7" name="Rounded Rectangle 6"/>
-          <p:cNvSpPr/>
-          <p:nvPr/>
-        </p:nvSpPr>
-        <p:spPr>
-          <a:xfrm>
-            <a:off x="4389120" y="1645920"/>
-            <a:ext cx="3383280" cy="4572000"/>
-          </a:xfrm>
-          <a:prstGeom prst="roundRect">
-            <a:avLst/>
-          </a:prstGeom>
-          <a:solidFill>
-            <a:srgbClr val="131D33"/>
-          </a:solidFill>
-          <a:ln w="12700">
-            <a:solidFill>
-              <a:srgbClr val="24324D"/>
-            </a:solidFill>
-          </a:ln>
-        </p:spPr>
-        <p:style>
-          <a:lnRef idx="1">
-            <a:schemeClr val="accent1"/>
-          </a:lnRef>
-          <a:fillRef idx="3">
-            <a:schemeClr val="accent1"/>
-          </a:fillRef>
-          <a:effectRef idx="2">
-            <a:schemeClr val="accent1"/>
-          </a:effectRef>
-          <a:fontRef idx="minor">
-            <a:schemeClr val="lt1"/>
-          </a:fontRef>
-        </p:style>
-        <p:txBody>
-          <a:bodyPr rtlCol="0" anchor="ctr" wrap="square" lIns="228600" rIns="228600" tIns="201168" bIns="201168"/>
-          <a:lstStyle/>
-          <a:p>
-            <a:pPr algn="ctr">
-              <a:spcAft>
-                <a:spcPts val="800"/>
-              </a:spcAft>
-              <a:defRPr sz="1500" b="1">
-                <a:solidFill>
-                  <a:srgbClr val="EF4444"/>
-                </a:solidFill>
-              </a:defRPr>
-            </a:pPr>
-            <a:r>
-              <a:t>Caso Real: SolarWinds (2019)</a:t>
-            </a:r>
-          </a:p>
-          <a:p>
-            <a:pPr>
-              <a:spcAft>
-                <a:spcPts val="800"/>
-              </a:spcAft>
-              <a:defRPr sz="950" b="1">
-                <a:solidFill>
-                  <a:srgbClr val="94A3B8"/>
-                </a:solidFill>
-              </a:defRPr>
-            </a:pPr>
-            <a:r>
-              <a:t>[Impacto Sistémico]</a:t>
-            </a:r>
-          </a:p>
-          <a:p>
-            <a:pPr>
-              <a:spcAft>
-                <a:spcPts val="600"/>
-              </a:spcAft>
-              <a:defRPr sz="1200">
-                <a:solidFill>
-                  <a:srgbClr val="CBD5E1"/>
-                </a:solidFill>
-              </a:defRPr>
-            </a:pPr>
-            <a:r>
-              <a:t>• Atacantes comprometieron el pipeline de compilación de la empresa.</a:t>
-            </a:r>
-          </a:p>
-          <a:p>
-            <a:pPr>
-              <a:spcAft>
-                <a:spcPts val="600"/>
-              </a:spcAft>
-              <a:defRPr sz="1200">
-                <a:solidFill>
-                  <a:srgbClr val="CBD5E1"/>
-                </a:solidFill>
-              </a:defRPr>
-            </a:pPr>
-            <a:r>
-              <a:t>• El malware se distribuyó firmado y certificado a clientes legítimos.</a:t>
-            </a:r>
-          </a:p>
-          <a:p>
-            <a:pPr>
-              <a:spcAft>
-                <a:spcPts val="600"/>
-              </a:spcAft>
-              <a:defRPr sz="1200">
-                <a:solidFill>
-                  <a:srgbClr val="CBD5E1"/>
-                </a:solidFill>
-              </a:defRPr>
-            </a:pPr>
-            <a:r>
-              <a:t>• Afectó a más de 18.000 organizaciones globales, incluyendo el gobierno de EEUU y Microsoft.</a:t>
-            </a:r>
-          </a:p>
-          <a:p>
-            <a:pPr>
-              <a:spcAft>
-                <a:spcPts val="600"/>
-              </a:spcAft>
-              <a:defRPr sz="1200">
-                <a:solidFill>
-                  <a:srgbClr val="CBD5E1"/>
-                </a:solidFill>
-              </a:defRPr>
-            </a:pPr>
-            <a:r>
-              <a:t>• Demostró que una sola dependencia comprometida vulnera todo un ecosistema.</a:t>
-            </a:r>
-          </a:p>
-        </p:txBody>
-      </p:sp>
-      <p:sp>
-        <p:nvSpPr>
-          <p:cNvPr id="8" name="Rounded Rectangle 7"/>
-          <p:cNvSpPr/>
-          <p:nvPr/>
-        </p:nvSpPr>
-        <p:spPr>
-          <a:xfrm>
-            <a:off x="8046720" y="1645920"/>
-            <a:ext cx="3383280" cy="4572000"/>
-          </a:xfrm>
-          <a:prstGeom prst="roundRect">
-            <a:avLst/>
-          </a:prstGeom>
-          <a:solidFill>
-            <a:srgbClr val="131D33"/>
-          </a:solidFill>
-          <a:ln w="12700">
-            <a:solidFill>
-              <a:srgbClr val="24324D"/>
-            </a:solidFill>
-          </a:ln>
-        </p:spPr>
-        <p:style>
-          <a:lnRef idx="1">
-            <a:schemeClr val="accent1"/>
-          </a:lnRef>
-          <a:fillRef idx="3">
-            <a:schemeClr val="accent1"/>
-          </a:fillRef>
-          <a:effectRef idx="2">
-            <a:schemeClr val="accent1"/>
-          </a:effectRef>
-          <a:fontRef idx="minor">
-            <a:schemeClr val="lt1"/>
-          </a:fontRef>
-        </p:style>
-        <p:txBody>
-          <a:bodyPr rtlCol="0" anchor="ctr" wrap="square" lIns="228600" rIns="228600" tIns="201168" bIns="201168"/>
-          <a:lstStyle/>
-          <a:p>
-            <a:pPr algn="ctr">
-              <a:spcAft>
-                <a:spcPts val="800"/>
-              </a:spcAft>
-              <a:defRPr sz="1500" b="1">
-                <a:solidFill>
-                  <a:srgbClr val="10B981"/>
-                </a:solidFill>
-              </a:defRPr>
-            </a:pPr>
-            <a:r>
-              <a:t>Controles y Mitigación</a:t>
-            </a:r>
-          </a:p>
-          <a:p>
-            <a:pPr>
-              <a:spcAft>
-                <a:spcPts val="800"/>
-              </a:spcAft>
-              <a:defRPr sz="950" b="1">
-                <a:solidFill>
-                  <a:srgbClr val="94A3B8"/>
-                </a:solidFill>
-              </a:defRPr>
-            </a:pPr>
-            <a:r>
-              <a:t>[Visibilidad de Código]</a:t>
-            </a:r>
-          </a:p>
-          <a:p>
-            <a:pPr>
-              <a:spcAft>
-                <a:spcPts val="600"/>
-              </a:spcAft>
-              <a:defRPr sz="1200">
-                <a:solidFill>
-                  <a:srgbClr val="CBD5E1"/>
-                </a:solidFill>
-              </a:defRPr>
-            </a:pPr>
-            <a:r>
-              <a:t>• Generación y monitoreo continuo de SBOM (Software Bill of Materials).</a:t>
-            </a:r>
-          </a:p>
-          <a:p>
-            <a:pPr>
-              <a:spcAft>
-                <a:spcPts val="600"/>
-              </a:spcAft>
-              <a:defRPr sz="1200">
-                <a:solidFill>
-                  <a:srgbClr val="CBD5E1"/>
-                </a:solidFill>
-              </a:defRPr>
-            </a:pPr>
-            <a:r>
-              <a:t>• Herramientas activas: OWASP Dependency-Track y Dependency-Check.</a:t>
-            </a:r>
-          </a:p>
-          <a:p>
-            <a:pPr>
-              <a:spcAft>
-                <a:spcPts val="600"/>
-              </a:spcAft>
-              <a:defRPr sz="1200">
-                <a:solidFill>
-                  <a:srgbClr val="CBD5E1"/>
-                </a:solidFill>
-              </a:defRPr>
-            </a:pPr>
-            <a:r>
-              <a:t>• Consultas periódicas a bases de vulnerabilidades (NVD y OSV).</a:t>
-            </a:r>
-          </a:p>
-          <a:p>
-            <a:pPr>
-              <a:spcAft>
-                <a:spcPts val="600"/>
-              </a:spcAft>
-              <a:defRPr sz="1200">
-                <a:solidFill>
-                  <a:srgbClr val="CBD5E1"/>
-                </a:solidFill>
-              </a:defRPr>
-            </a:pPr>
-            <a:r>
-              <a:t>• Segregación estricta de funciones y protección del pipeline de CI/CD.</a:t>
+              <a:t>• Monitoreo continuo contra bases públicas de vulnerabilidades (NVD y OSV).</a:t>
             </a:r>
           </a:p>
         </p:txBody>
@@ -9381,8 +8710,8 @@
         </p:nvSpPr>
         <p:spPr>
           <a:xfrm>
-            <a:off x="731520" y="365760"/>
-            <a:ext cx="2926080" cy="365760"/>
+            <a:off x="731520" y="384048"/>
+            <a:ext cx="3108960" cy="320040"/>
           </a:xfrm>
           <a:prstGeom prst="roundRect">
             <a:avLst/>
@@ -9392,7 +8721,7 @@
           </a:solidFill>
           <a:ln w="12700">
             <a:solidFill>
-              <a:srgbClr val="F59E0B"/>
+              <a:srgbClr val="3B82F6"/>
             </a:solidFill>
           </a:ln>
         </p:spPr>
@@ -9411,32 +8740,67 @@
           </a:fontRef>
         </p:style>
         <p:txBody>
-          <a:bodyPr rtlCol="0" anchor="ctr" wrap="square"/>
+          <a:bodyPr rtlCol="0" anchor="ctr"/>
           <a:lstStyle/>
           <a:p>
             <a:pPr algn="ctr">
-              <a:defRPr sz="1050" b="1">
-                <a:solidFill>
-                  <a:srgbClr val="F59E0B"/>
-                </a:solidFill>
-              </a:defRPr>
-            </a:pPr>
-            <a:r>
-              <a:t>ORADOR 3</a:t>
-            </a:r>
-          </a:p>
-        </p:txBody>
-      </p:sp>
-      <p:sp>
-        <p:nvSpPr>
-          <p:cNvPr id="4" name="Rounded Rectangle 3"/>
+              <a:defRPr sz="1000" b="1">
+                <a:solidFill>
+                  <a:srgbClr val="3B82F6"/>
+                </a:solidFill>
+              </a:defRPr>
+            </a:pPr>
+            <a:r>
+              <a:t>PUESTO #4 — PROTECCIÓN DE DATOS SENSIBLES</a:t>
+            </a:r>
+          </a:p>
+        </p:txBody>
+      </p:sp>
+      <p:sp>
+        <p:nvSpPr>
+          <p:cNvPr id="4" name="TextBox 3"/>
+          <p:cNvSpPr txBox="1"/>
+          <p:nvPr/>
+        </p:nvSpPr>
+        <p:spPr>
+          <a:xfrm>
+            <a:off x="731520" y="749808"/>
+            <a:ext cx="10698480" cy="685800"/>
+          </a:xfrm>
+          <a:prstGeom prst="rect">
+            <a:avLst/>
+          </a:prstGeom>
+          <a:noFill/>
+        </p:spPr>
+        <p:txBody>
+          <a:bodyPr wrap="square">
+            <a:spAutoFit/>
+          </a:bodyPr>
+          <a:lstStyle/>
+          <a:p>
+            <a:pPr>
+              <a:defRPr sz="2200" b="1">
+                <a:solidFill>
+                  <a:srgbClr val="F1F5F9"/>
+                </a:solidFill>
+              </a:defRPr>
+            </a:pPr>
+            <a:r>
+              <a:t>A04: Fallas Criptográficas</a:t>
+            </a:r>
+          </a:p>
+        </p:txBody>
+      </p:sp>
+      <p:sp>
+        <p:nvSpPr>
+          <p:cNvPr id="5" name="Rounded Rectangle 4"/>
           <p:cNvSpPr/>
           <p:nvPr/>
         </p:nvSpPr>
         <p:spPr>
           <a:xfrm>
-            <a:off x="3840480" y="365760"/>
-            <a:ext cx="3200400" cy="365760"/>
+            <a:off x="731520" y="1645920"/>
+            <a:ext cx="5212080" cy="4480560"/>
           </a:xfrm>
           <a:prstGeom prst="roundRect">
             <a:avLst/>
@@ -9446,7 +8810,7 @@
           </a:solidFill>
           <a:ln w="12700">
             <a:solidFill>
-              <a:srgbClr val="24324D"/>
+              <a:srgbClr val="EF4444"/>
             </a:solidFill>
           </a:ln>
         </p:spPr>
@@ -9465,53 +8829,96 @@
           </a:fontRef>
         </p:style>
         <p:txBody>
-          <a:bodyPr rtlCol="0" anchor="ctr"/>
+          <a:bodyPr rtlCol="0" anchor="ctr" lIns="320040" tIns="228600"/>
           <a:lstStyle/>
           <a:p>
             <a:pPr algn="ctr">
-              <a:defRPr sz="1000" b="1">
-                <a:solidFill>
-                  <a:srgbClr val="94A3B8"/>
-                </a:solidFill>
-              </a:defRPr>
-            </a:pPr>
-            <a:r>
-              <a:t>PUESTO #4 EN OWASP 2025</a:t>
-            </a:r>
-          </a:p>
-        </p:txBody>
-      </p:sp>
-      <p:sp>
-        <p:nvSpPr>
-          <p:cNvPr id="5" name="TextBox 4"/>
-          <p:cNvSpPr txBox="1"/>
-          <p:nvPr/>
-        </p:nvSpPr>
-        <p:spPr>
-          <a:xfrm>
-            <a:off x="731520" y="777240"/>
-            <a:ext cx="10698480" cy="731520"/>
-          </a:xfrm>
-          <a:prstGeom prst="rect">
-            <a:avLst/>
-          </a:prstGeom>
-          <a:noFill/>
-        </p:spPr>
-        <p:txBody>
-          <a:bodyPr wrap="square">
-            <a:spAutoFit/>
-          </a:bodyPr>
-          <a:lstStyle/>
-          <a:p>
-            <a:pPr>
-              <a:defRPr sz="2400" b="1">
-                <a:solidFill>
-                  <a:srgbClr val="F1F5F9"/>
-                </a:solidFill>
-              </a:defRPr>
-            </a:pPr>
-            <a:r>
-              <a:t>A04: Fallas Criptográficas</a:t>
+              <a:spcAft>
+                <a:spcPts val="1000"/>
+              </a:spcAft>
+              <a:defRPr sz="1400" b="1">
+                <a:solidFill>
+                  <a:srgbClr val="EF4444"/>
+                </a:solidFill>
+              </a:defRPr>
+            </a:pPr>
+            <a:r>
+              <a:t>PRÁCTICAS INSEGURAS COMUNES</a:t>
+            </a:r>
+          </a:p>
+          <a:p>
+            <a:pPr>
+              <a:spcAft>
+                <a:spcPts val="600"/>
+              </a:spcAft>
+              <a:defRPr sz="1100">
+                <a:solidFill>
+                  <a:srgbClr val="CBD5E1"/>
+                </a:solidFill>
+              </a:defRPr>
+            </a:pPr>
+            <a:r>
+              <a:t>• Uso de algoritmos obsoletos o quebrados (MD5, SHA1, DES).</a:t>
+            </a:r>
+          </a:p>
+          <a:p>
+            <a:pPr>
+              <a:spcAft>
+                <a:spcPts val="600"/>
+              </a:spcAft>
+              <a:defRPr sz="1100">
+                <a:solidFill>
+                  <a:srgbClr val="CBD5E1"/>
+                </a:solidFill>
+              </a:defRPr>
+            </a:pPr>
+            <a:r>
+              <a:t>• Generadores de números pseudoaleatorios inadecuados (predictibilidad en tokens de sesión o reset de contraseña).</a:t>
+            </a:r>
+          </a:p>
+          <a:p>
+            <a:pPr>
+              <a:spcAft>
+                <a:spcPts val="600"/>
+              </a:spcAft>
+              <a:defRPr sz="1100">
+                <a:solidFill>
+                  <a:srgbClr val="CBD5E1"/>
+                </a:solidFill>
+              </a:defRPr>
+            </a:pPr>
+            <a:r>
+              <a:t>• Tráfico sensible transmitido en HTTP texto plano sin forzar TLS.</a:t>
+            </a:r>
+          </a:p>
+          <a:p>
+            <a:pPr>
+              <a:spcAft>
+                <a:spcPts val="600"/>
+              </a:spcAft>
+              <a:defRPr sz="1100">
+                <a:solidFill>
+                  <a:srgbClr val="CBD5E1"/>
+                </a:solidFill>
+              </a:defRPr>
+            </a:pPr>
+            <a:r>
+              <a:t>• Contraseñas hasheadas sin salt o con algoritmos ultrarrápidos vulnerables a fuerza bruta GPU.</a:t>
+            </a:r>
+          </a:p>
+          <a:p>
+            <a:pPr>
+              <a:spcAft>
+                <a:spcPts val="600"/>
+              </a:spcAft>
+              <a:defRPr sz="1100">
+                <a:solidFill>
+                  <a:srgbClr val="CBD5E1"/>
+                </a:solidFill>
+              </a:defRPr>
+            </a:pPr>
+            <a:r>
+              <a:t>• Claves y secretos guardados en código fuente o repositorios de control de versiones.</a:t>
             </a:r>
           </a:p>
         </p:txBody>
@@ -9524,8 +8931,8 @@
         </p:nvSpPr>
         <p:spPr>
           <a:xfrm>
-            <a:off x="731520" y="1645920"/>
-            <a:ext cx="3383280" cy="4572000"/>
+            <a:off x="6217920" y="1645920"/>
+            <a:ext cx="5212080" cy="4480560"/>
           </a:xfrm>
           <a:prstGeom prst="roundRect">
             <a:avLst/>
@@ -9535,7 +8942,7 @@
           </a:solidFill>
           <a:ln w="12700">
             <a:solidFill>
-              <a:srgbClr val="24324D"/>
+              <a:srgbClr val="10B981"/>
             </a:solidFill>
           </a:ln>
         </p:spPr>
@@ -9554,36 +8961,21 @@
           </a:fontRef>
         </p:style>
         <p:txBody>
-          <a:bodyPr rtlCol="0" anchor="ctr" wrap="square" lIns="228600" rIns="228600" tIns="201168" bIns="201168"/>
+          <a:bodyPr rtlCol="0" anchor="ctr" lIns="320040" tIns="228600"/>
           <a:lstStyle/>
           <a:p>
             <a:pPr algn="ctr">
               <a:spcAft>
-                <a:spcPts val="800"/>
+                <a:spcPts val="1000"/>
               </a:spcAft>
-              <a:defRPr sz="1500" b="1">
-                <a:solidFill>
-                  <a:srgbClr val="F59E0B"/>
-                </a:solidFill>
-              </a:defRPr>
-            </a:pPr>
-            <a:r>
-              <a:t>Alcance del Problema</a:t>
-            </a:r>
-          </a:p>
-          <a:p>
-            <a:pPr>
-              <a:spcAft>
-                <a:spcPts val="800"/>
-              </a:spcAft>
-              <a:defRPr sz="950" b="1">
-                <a:solidFill>
-                  <a:srgbClr val="94A3B8"/>
-                </a:solidFill>
-              </a:defRPr>
-            </a:pPr>
-            <a:r>
-              <a:t>[Protección de Datos]</a:t>
+              <a:defRPr sz="1400" b="1">
+                <a:solidFill>
+                  <a:srgbClr val="10B981"/>
+                </a:solidFill>
+              </a:defRPr>
+            </a:pPr>
+            <a:r>
+              <a:t>ESTÁNDAR CRIPTOGRÁFICO EXIGIDO</a:t>
             </a:r>
           </a:p>
           <a:p>
@@ -9591,14 +8983,14 @@
               <a:spcAft>
                 <a:spcPts val="600"/>
               </a:spcAft>
-              <a:defRPr sz="1200">
+              <a:defRPr sz="1100">
                 <a:solidFill>
                   <a:srgbClr val="CBD5E1"/>
                 </a:solidFill>
               </a:defRPr>
             </a:pPr>
             <a:r>
-              <a:t>• Anteriormente conocida como Exposición de Datos Sensibles.</a:t>
+              <a:t>• Forzar TLS 1.3 en el 100% de los endpoints con cabecera HSTS activa.</a:t>
             </a:r>
           </a:p>
           <a:p>
@@ -9606,14 +8998,14 @@
               <a:spcAft>
                 <a:spcPts val="600"/>
               </a:spcAft>
-              <a:defRPr sz="1200">
+              <a:defRPr sz="1100">
                 <a:solidFill>
                   <a:srgbClr val="CBD5E1"/>
                 </a:solidFill>
               </a:defRPr>
             </a:pPr>
             <a:r>
-              <a:t>• Agrupa problemas de ausencia de cifrado, cifrado débil o filtración de claves.</a:t>
+              <a:t>• Generadores de números pseudoaleatorios criptográficamente seguros (CSPRNG).</a:t>
             </a:r>
           </a:p>
           <a:p>
@@ -9621,14 +9013,14 @@
               <a:spcAft>
                 <a:spcPts val="600"/>
               </a:spcAft>
-              <a:defRPr sz="1200">
+              <a:defRPr sz="1100">
                 <a:solidFill>
                   <a:srgbClr val="CBD5E1"/>
                 </a:solidFill>
               </a:defRPr>
             </a:pPr>
             <a:r>
-              <a:t>• Punto crítico: generadores de números pseudoaleatorios inadecuados.</a:t>
+              <a:t>• Funciones de derivación de claves diseñadas para passwords: Argon2id, bcrypt o PBKDF2.</a:t>
             </a:r>
           </a:p>
           <a:p>
@@ -9636,86 +9028,14 @@
               <a:spcAft>
                 <a:spcPts val="600"/>
               </a:spcAft>
-              <a:defRPr sz="1200">
+              <a:defRPr sz="1100">
                 <a:solidFill>
                   <a:srgbClr val="CBD5E1"/>
                 </a:solidFill>
               </a:defRPr>
             </a:pPr>
             <a:r>
-              <a:t>• Resultado habitual: compromiso total de confidencialidad de datos.</a:t>
-            </a:r>
-          </a:p>
-        </p:txBody>
-      </p:sp>
-      <p:sp>
-        <p:nvSpPr>
-          <p:cNvPr id="7" name="Rounded Rectangle 6"/>
-          <p:cNvSpPr/>
-          <p:nvPr/>
-        </p:nvSpPr>
-        <p:spPr>
-          <a:xfrm>
-            <a:off x="4389120" y="1645920"/>
-            <a:ext cx="3383280" cy="4572000"/>
-          </a:xfrm>
-          <a:prstGeom prst="roundRect">
-            <a:avLst/>
-          </a:prstGeom>
-          <a:solidFill>
-            <a:srgbClr val="131D33"/>
-          </a:solidFill>
-          <a:ln w="12700">
-            <a:solidFill>
-              <a:srgbClr val="24324D"/>
-            </a:solidFill>
-          </a:ln>
-        </p:spPr>
-        <p:style>
-          <a:lnRef idx="1">
-            <a:schemeClr val="accent1"/>
-          </a:lnRef>
-          <a:fillRef idx="3">
-            <a:schemeClr val="accent1"/>
-          </a:fillRef>
-          <a:effectRef idx="2">
-            <a:schemeClr val="accent1"/>
-          </a:effectRef>
-          <a:fontRef idx="minor">
-            <a:schemeClr val="lt1"/>
-          </a:fontRef>
-        </p:style>
-        <p:txBody>
-          <a:bodyPr rtlCol="0" anchor="ctr" wrap="square" lIns="228600" rIns="228600" tIns="201168" bIns="201168"/>
-          <a:lstStyle/>
-          <a:p>
-            <a:pPr algn="ctr">
-              <a:spcAft>
-                <a:spcPts val="800"/>
-              </a:spcAft>
-              <a:defRPr sz="1500" b="1">
-                <a:solidFill>
-                  <a:srgbClr val="EF4444"/>
-                </a:solidFill>
-              </a:defRPr>
-            </a:pPr>
-            <a:r>
-              <a:t>Causas Frecuentes</a:t>
-            </a:r>
-          </a:p>
-          <a:p>
-            <a:pPr>
-              <a:spcAft>
-                <a:spcPts val="800"/>
-              </a:spcAft>
-              <a:defRPr sz="950" b="1">
-                <a:solidFill>
-                  <a:srgbClr val="94A3B8"/>
-                </a:solidFill>
-              </a:defRPr>
-            </a:pPr>
-            <a:r>
-              <a:t>[Errores Clave]</a:t>
+              <a:t>• Gestores de secretos dedicados (HashiCorp Vault, AWS KMS) con rotación automática.</a:t>
             </a:r>
           </a:p>
           <a:p>
@@ -9723,206 +9043,14 @@
               <a:spcAft>
                 <a:spcPts val="600"/>
               </a:spcAft>
-              <a:defRPr sz="1200">
+              <a:defRPr sz="1100">
                 <a:solidFill>
                   <a:srgbClr val="CBD5E1"/>
                 </a:solidFill>
               </a:defRPr>
             </a:pPr>
             <a:r>
-              <a:t>• Uso de algoritmos obsoletos o rotos (ej: MD5, SHA1).</a:t>
-            </a:r>
-          </a:p>
-          <a:p>
-            <a:pPr>
-              <a:spcAft>
-                <a:spcPts val="600"/>
-              </a:spcAft>
-              <a:defRPr sz="1200">
-                <a:solidFill>
-                  <a:srgbClr val="CBD5E1"/>
-                </a:solidFill>
-              </a:defRPr>
-            </a:pPr>
-            <a:r>
-              <a:t>• Tráfico en texto plano sin forzar HTTPS/TLS en toda la aplicación.</a:t>
-            </a:r>
-          </a:p>
-          <a:p>
-            <a:pPr>
-              <a:spcAft>
-                <a:spcPts val="600"/>
-              </a:spcAft>
-              <a:defRPr sz="1200">
-                <a:solidFill>
-                  <a:srgbClr val="CBD5E1"/>
-                </a:solidFill>
-              </a:defRPr>
-            </a:pPr>
-            <a:r>
-              <a:t>• Almacenamiento de contraseñas con algoritmos simples o sin salt.</a:t>
-            </a:r>
-          </a:p>
-          <a:p>
-            <a:pPr>
-              <a:spcAft>
-                <a:spcPts val="600"/>
-              </a:spcAft>
-              <a:defRPr sz="1200">
-                <a:solidFill>
-                  <a:srgbClr val="CBD5E1"/>
-                </a:solidFill>
-              </a:defRPr>
-            </a:pPr>
-            <a:r>
-              <a:t>• Claves de cifrado harcodeadas en repositorios de Git públicos o privados.</a:t>
-            </a:r>
-          </a:p>
-          <a:p>
-            <a:pPr>
-              <a:spcAft>
-                <a:spcPts val="600"/>
-              </a:spcAft>
-              <a:defRPr sz="1200">
-                <a:solidFill>
-                  <a:srgbClr val="CBD5E1"/>
-                </a:solidFill>
-              </a:defRPr>
-            </a:pPr>
-            <a:r>
-              <a:t>• Falta de políticas de rotación de claves criptográficas.</a:t>
-            </a:r>
-          </a:p>
-        </p:txBody>
-      </p:sp>
-      <p:sp>
-        <p:nvSpPr>
-          <p:cNvPr id="8" name="Rounded Rectangle 7"/>
-          <p:cNvSpPr/>
-          <p:nvPr/>
-        </p:nvSpPr>
-        <p:spPr>
-          <a:xfrm>
-            <a:off x="8046720" y="1645920"/>
-            <a:ext cx="3383280" cy="4572000"/>
-          </a:xfrm>
-          <a:prstGeom prst="roundRect">
-            <a:avLst/>
-          </a:prstGeom>
-          <a:solidFill>
-            <a:srgbClr val="131D33"/>
-          </a:solidFill>
-          <a:ln w="12700">
-            <a:solidFill>
-              <a:srgbClr val="24324D"/>
-            </a:solidFill>
-          </a:ln>
-        </p:spPr>
-        <p:style>
-          <a:lnRef idx="1">
-            <a:schemeClr val="accent1"/>
-          </a:lnRef>
-          <a:fillRef idx="3">
-            <a:schemeClr val="accent1"/>
-          </a:fillRef>
-          <a:effectRef idx="2">
-            <a:schemeClr val="accent1"/>
-          </a:effectRef>
-          <a:fontRef idx="minor">
-            <a:schemeClr val="lt1"/>
-          </a:fontRef>
-        </p:style>
-        <p:txBody>
-          <a:bodyPr rtlCol="0" anchor="ctr" wrap="square" lIns="228600" rIns="228600" tIns="201168" bIns="201168"/>
-          <a:lstStyle/>
-          <a:p>
-            <a:pPr algn="ctr">
-              <a:spcAft>
-                <a:spcPts val="800"/>
-              </a:spcAft>
-              <a:defRPr sz="1500" b="1">
-                <a:solidFill>
-                  <a:srgbClr val="10B981"/>
-                </a:solidFill>
-              </a:defRPr>
-            </a:pPr>
-            <a:r>
-              <a:t>Recomendaciones Técnicas</a:t>
-            </a:r>
-          </a:p>
-          <a:p>
-            <a:pPr>
-              <a:spcAft>
-                <a:spcPts val="800"/>
-              </a:spcAft>
-              <a:defRPr sz="950" b="1">
-                <a:solidFill>
-                  <a:srgbClr val="94A3B8"/>
-                </a:solidFill>
-              </a:defRPr>
-            </a:pPr>
-            <a:r>
-              <a:t>[Buenas Prácticas]</a:t>
-            </a:r>
-          </a:p>
-          <a:p>
-            <a:pPr>
-              <a:spcAft>
-                <a:spcPts val="600"/>
-              </a:spcAft>
-              <a:defRPr sz="1200">
-                <a:solidFill>
-                  <a:srgbClr val="CBD5E1"/>
-                </a:solidFill>
-              </a:defRPr>
-            </a:pPr>
-            <a:r>
-              <a:t>• TLS configurado y forzado en todas las rutas con certificados válidos.</a:t>
-            </a:r>
-          </a:p>
-          <a:p>
-            <a:pPr>
-              <a:spcAft>
-                <a:spcPts val="600"/>
-              </a:spcAft>
-              <a:defRPr sz="1200">
-                <a:solidFill>
-                  <a:srgbClr val="CBD5E1"/>
-                </a:solidFill>
-              </a:defRPr>
-            </a:pPr>
-            <a:r>
-              <a:t>• Clasificación formal de datos según su sensibilidad en reposo y en tránsito.</a:t>
-            </a:r>
-          </a:p>
-          <a:p>
-            <a:pPr>
-              <a:spcAft>
-                <a:spcPts val="600"/>
-              </a:spcAft>
-              <a:defRPr sz="1200">
-                <a:solidFill>
-                  <a:srgbClr val="CBD5E1"/>
-                </a:solidFill>
-              </a:defRPr>
-            </a:pPr>
-            <a:r>
-              <a:t>• Funciones de hash diseñadas para contraseñas: Argon2, bcrypt o PBKDF2.</a:t>
-            </a:r>
-          </a:p>
-          <a:p>
-            <a:pPr>
-              <a:spcAft>
-                <a:spcPts val="600"/>
-              </a:spcAft>
-              <a:defRPr sz="1200">
-                <a:solidFill>
-                  <a:srgbClr val="CBD5E1"/>
-                </a:solidFill>
-              </a:defRPr>
-            </a:pPr>
-            <a:r>
-              <a:t>• Gestores de secretos corporativos (HashiCorp Vault, AWS Secrets Manager).</a:t>
+              <a:t>• Clasificación formal de datos según su sensibilidad en tránsito y reposo.</a:t>
             </a:r>
           </a:p>
         </p:txBody>
@@ -9996,8 +9124,8 @@
         </p:nvSpPr>
         <p:spPr>
           <a:xfrm>
-            <a:off x="731520" y="365760"/>
-            <a:ext cx="2926080" cy="365760"/>
+            <a:off x="731520" y="384048"/>
+            <a:ext cx="3108960" cy="320040"/>
           </a:xfrm>
           <a:prstGeom prst="roundRect">
             <a:avLst/>
@@ -10026,32 +9154,67 @@
           </a:fontRef>
         </p:style>
         <p:txBody>
-          <a:bodyPr rtlCol="0" anchor="ctr" wrap="square"/>
+          <a:bodyPr rtlCol="0" anchor="ctr"/>
           <a:lstStyle/>
           <a:p>
             <a:pPr algn="ctr">
-              <a:defRPr sz="1050" b="1">
+              <a:defRPr sz="1000" b="1">
                 <a:solidFill>
                   <a:srgbClr val="8B5CF6"/>
                 </a:solidFill>
               </a:defRPr>
             </a:pPr>
             <a:r>
-              <a:t>ORADOR 4</a:t>
-            </a:r>
-          </a:p>
-        </p:txBody>
-      </p:sp>
-      <p:sp>
-        <p:nvSpPr>
-          <p:cNvPr id="4" name="Rounded Rectangle 3"/>
+              <a:t>PUESTO #5 — MAYOR VOLUMEN DE CVES</a:t>
+            </a:r>
+          </a:p>
+        </p:txBody>
+      </p:sp>
+      <p:sp>
+        <p:nvSpPr>
+          <p:cNvPr id="4" name="TextBox 3"/>
+          <p:cNvSpPr txBox="1"/>
+          <p:nvPr/>
+        </p:nvSpPr>
+        <p:spPr>
+          <a:xfrm>
+            <a:off x="731520" y="749808"/>
+            <a:ext cx="10698480" cy="685800"/>
+          </a:xfrm>
+          <a:prstGeom prst="rect">
+            <a:avLst/>
+          </a:prstGeom>
+          <a:noFill/>
+        </p:spPr>
+        <p:txBody>
+          <a:bodyPr wrap="square">
+            <a:spAutoFit/>
+          </a:bodyPr>
+          <a:lstStyle/>
+          <a:p>
+            <a:pPr>
+              <a:defRPr sz="2200" b="1">
+                <a:solidFill>
+                  <a:srgbClr val="F1F5F9"/>
+                </a:solidFill>
+              </a:defRPr>
+            </a:pPr>
+            <a:r>
+              <a:t>A05: Inyección (SQLi, XSS y Comandos)</a:t>
+            </a:r>
+          </a:p>
+        </p:txBody>
+      </p:sp>
+      <p:sp>
+        <p:nvSpPr>
+          <p:cNvPr id="5" name="Rounded Rectangle 4"/>
           <p:cNvSpPr/>
           <p:nvPr/>
         </p:nvSpPr>
         <p:spPr>
           <a:xfrm>
-            <a:off x="3840480" y="365760"/>
-            <a:ext cx="3200400" cy="365760"/>
+            <a:off x="731520" y="1645920"/>
+            <a:ext cx="4572000" cy="4480560"/>
           </a:xfrm>
           <a:prstGeom prst="roundRect">
             <a:avLst/>
@@ -10059,7 +9222,7 @@
           <a:solidFill>
             <a:srgbClr val="131D33"/>
           </a:solidFill>
-          <a:ln w="12700">
+          <a:ln>
             <a:solidFill>
               <a:srgbClr val="24324D"/>
             </a:solidFill>
@@ -10080,53 +9243,93 @@
           </a:fontRef>
         </p:style>
         <p:txBody>
-          <a:bodyPr rtlCol="0" anchor="ctr"/>
+          <a:bodyPr rtlCol="0" anchor="ctr" lIns="274320" tIns="274320"/>
           <a:lstStyle/>
           <a:p>
             <a:pPr algn="ctr">
-              <a:defRPr sz="1000" b="1">
-                <a:solidFill>
-                  <a:srgbClr val="94A3B8"/>
-                </a:solidFill>
-              </a:defRPr>
-            </a:pPr>
-            <a:r>
-              <a:t>PUESTO #5 — RÉCORD DE CVES</a:t>
-            </a:r>
-          </a:p>
-        </p:txBody>
-      </p:sp>
-      <p:sp>
-        <p:nvSpPr>
-          <p:cNvPr id="5" name="TextBox 4"/>
-          <p:cNvSpPr txBox="1"/>
-          <p:nvPr/>
-        </p:nvSpPr>
-        <p:spPr>
-          <a:xfrm>
-            <a:off x="731520" y="777240"/>
-            <a:ext cx="10698480" cy="731520"/>
-          </a:xfrm>
-          <a:prstGeom prst="rect">
-            <a:avLst/>
-          </a:prstGeom>
-          <a:noFill/>
-        </p:spPr>
-        <p:txBody>
-          <a:bodyPr wrap="square">
-            <a:spAutoFit/>
-          </a:bodyPr>
-          <a:lstStyle/>
-          <a:p>
-            <a:pPr>
-              <a:defRPr sz="2400" b="1">
+              <a:defRPr sz="3800" b="1">
+                <a:solidFill>
+                  <a:srgbClr val="8B5CF6"/>
+                </a:solidFill>
+              </a:defRPr>
+            </a:pPr>
+            <a:r>
+              <a:t>+44.000</a:t>
+            </a:r>
+          </a:p>
+          <a:p>
+            <a:pPr>
+              <a:spcAft>
+                <a:spcPts val="1200"/>
+              </a:spcAft>
+              <a:defRPr sz="1200" b="1">
                 <a:solidFill>
                   <a:srgbClr val="F1F5F9"/>
                 </a:solidFill>
               </a:defRPr>
             </a:pPr>
             <a:r>
-              <a:t>A05: Inyección (SQL Injection &amp; XSS)</a:t>
+              <a:t>CVEs Registrados Históricamente</a:t>
+            </a:r>
+          </a:p>
+          <a:p>
+            <a:pPr>
+              <a:spcAft>
+                <a:spcPts val="600"/>
+              </a:spcAft>
+              <a:defRPr sz="1080">
+                <a:solidFill>
+                  <a:srgbClr val="CBD5E1"/>
+                </a:solidFill>
+              </a:defRPr>
+            </a:pPr>
+            <a:r>
+              <a:t>• XSS (Cross-Site Scripting): Alta frecuencia, baja barrera (+30.000 registros).</a:t>
+            </a:r>
+          </a:p>
+          <a:p>
+            <a:pPr>
+              <a:spcAft>
+                <a:spcPts val="600"/>
+              </a:spcAft>
+              <a:defRPr sz="1080">
+                <a:solidFill>
+                  <a:srgbClr val="CBD5E1"/>
+                </a:solidFill>
+              </a:defRPr>
+            </a:pPr>
+            <a:r>
+              <a:t>• SQL Injection: Menor frecuencia pero con impacto de compromiso total (+14.000 registros).</a:t>
+            </a:r>
+          </a:p>
+          <a:p>
+            <a:pPr>
+              <a:spcAft>
+                <a:spcPts val="600"/>
+              </a:spcAft>
+              <a:defRPr sz="1080">
+                <a:solidFill>
+                  <a:srgbClr val="CBD5E1"/>
+                </a:solidFill>
+              </a:defRPr>
+            </a:pPr>
+            <a:r>
+              <a:t>• Causa Raíz: Enviar datos no confiables directamente a un intérprete (SQL, shell, DOM) sin separar código de datos.</a:t>
+            </a:r>
+          </a:p>
+          <a:p>
+            <a:pPr>
+              <a:spcAft>
+                <a:spcPts val="600"/>
+              </a:spcAft>
+              <a:defRPr sz="1080">
+                <a:solidFill>
+                  <a:srgbClr val="CBD5E1"/>
+                </a:solidFill>
+              </a:defRPr>
+            </a:pPr>
+            <a:r>
+              <a:t>• Variantes: SQL, NoSQL, comandos OS, LDAP y lenguajes de expresión.</a:t>
             </a:r>
           </a:p>
         </p:txBody>
@@ -10139,16 +9342,16 @@
         </p:nvSpPr>
         <p:spPr>
           <a:xfrm>
-            <a:off x="731520" y="1645920"/>
-            <a:ext cx="3383280" cy="4572000"/>
+            <a:off x="5577840" y="1645920"/>
+            <a:ext cx="5852160" cy="4480560"/>
           </a:xfrm>
           <a:prstGeom prst="roundRect">
             <a:avLst/>
           </a:prstGeom>
           <a:solidFill>
-            <a:srgbClr val="131D33"/>
+            <a:srgbClr val="080C14"/>
           </a:solidFill>
-          <a:ln w="12700">
+          <a:ln>
             <a:solidFill>
               <a:srgbClr val="24324D"/>
             </a:solidFill>
@@ -10169,360 +9372,81 @@
           </a:fontRef>
         </p:style>
         <p:txBody>
-          <a:bodyPr rtlCol="0" anchor="ctr" wrap="square" lIns="228600" rIns="228600" tIns="201168" bIns="201168"/>
+          <a:bodyPr rtlCol="0" anchor="ctr" lIns="274320" tIns="228600"/>
           <a:lstStyle/>
           <a:p>
             <a:pPr algn="ctr">
               <a:spcAft>
-                <a:spcPts val="800"/>
+                <a:spcPts val="1000"/>
               </a:spcAft>
-              <a:defRPr sz="1500" b="1">
-                <a:solidFill>
-                  <a:srgbClr val="8B5CF6"/>
-                </a:solidFill>
-              </a:defRPr>
-            </a:pPr>
-            <a:r>
-              <a:t>Magnitud de la Inyección</a:t>
-            </a:r>
-          </a:p>
-          <a:p>
-            <a:pPr>
-              <a:spcAft>
-                <a:spcPts val="800"/>
-              </a:spcAft>
-              <a:defRPr sz="950" b="1">
-                <a:solidFill>
-                  <a:srgbClr val="94A3B8"/>
-                </a:solidFill>
-              </a:defRPr>
-            </a:pPr>
-            <a:r>
-              <a:t>[+44k CVEs]</a:t>
-            </a:r>
-          </a:p>
-          <a:p>
-            <a:pPr>
-              <a:spcAft>
-                <a:spcPts val="600"/>
-              </a:spcAft>
-              <a:defRPr sz="1200">
+              <a:defRPr sz="1200" b="1">
+                <a:solidFill>
+                  <a:srgbClr val="06B6D4"/>
+                </a:solidFill>
+              </a:defRPr>
+            </a:pPr>
+            <a:r>
+              <a:t>CONCATENACIÓN INSEGURA vs PREPARED STATEMENTS</a:t>
+            </a:r>
+          </a:p>
+          <a:p>
+            <a:pPr>
+              <a:defRPr sz="1000">
                 <a:solidFill>
                   <a:srgbClr val="CBD5E1"/>
                 </a:solidFill>
               </a:defRPr>
             </a:pPr>
             <a:r>
-              <a:t>• Mayor volumen histórico de CVEs: más de 44.000 vulnerabilidades reportadas.</a:t>
-            </a:r>
-          </a:p>
-          <a:p>
-            <a:pPr>
-              <a:spcAft>
-                <a:spcPts val="600"/>
-              </a:spcAft>
-              <a:defRPr sz="1200">
-                <a:solidFill>
-                  <a:srgbClr val="CBD5E1"/>
-                </a:solidFill>
-              </a:defRPr>
-            </a:pPr>
-            <a:r>
-              <a:t>• XSS (Cross-Site Scripting): Alta frecuencia, más de 30.000 casos.</a:t>
-            </a:r>
-          </a:p>
-          <a:p>
-            <a:pPr>
-              <a:spcAft>
-                <a:spcPts val="600"/>
-              </a:spcAft>
-              <a:defRPr sz="1200">
-                <a:solidFill>
-                  <a:srgbClr val="CBD5E1"/>
-                </a:solidFill>
-              </a:defRPr>
-            </a:pPr>
-            <a:r>
-              <a:t>• SQLi (Inyección SQL): Menor frecuencia pero con impacto devastador (14.000 casos).</a:t>
-            </a:r>
-          </a:p>
-          <a:p>
-            <a:pPr>
-              <a:spcAft>
-                <a:spcPts val="600"/>
-              </a:spcAft>
-              <a:defRPr sz="1200">
-                <a:solidFill>
-                  <a:srgbClr val="CBD5E1"/>
-                </a:solidFill>
-              </a:defRPr>
-            </a:pPr>
-            <a:r>
-              <a:t>• Ocurre cuando datos no confiables se ejecutan como instrucciones de código.</a:t>
-            </a:r>
-          </a:p>
-        </p:txBody>
-      </p:sp>
-      <p:sp>
-        <p:nvSpPr>
-          <p:cNvPr id="7" name="Rounded Rectangle 6"/>
-          <p:cNvSpPr/>
-          <p:nvPr/>
-        </p:nvSpPr>
-        <p:spPr>
-          <a:xfrm>
-            <a:off x="4389120" y="1645920"/>
-            <a:ext cx="3383280" cy="4572000"/>
-          </a:xfrm>
-          <a:prstGeom prst="roundRect">
-            <a:avLst/>
-          </a:prstGeom>
-          <a:solidFill>
-            <a:srgbClr val="131D33"/>
-          </a:solidFill>
-          <a:ln w="12700">
-            <a:solidFill>
-              <a:srgbClr val="24324D"/>
-            </a:solidFill>
-          </a:ln>
-        </p:spPr>
-        <p:style>
-          <a:lnRef idx="1">
-            <a:schemeClr val="accent1"/>
-          </a:lnRef>
-          <a:fillRef idx="3">
-            <a:schemeClr val="accent1"/>
-          </a:fillRef>
-          <a:effectRef idx="2">
-            <a:schemeClr val="accent1"/>
-          </a:effectRef>
-          <a:fontRef idx="minor">
-            <a:schemeClr val="lt1"/>
-          </a:fontRef>
-        </p:style>
-        <p:txBody>
-          <a:bodyPr rtlCol="0" anchor="ctr" wrap="square" lIns="228600" rIns="228600" tIns="201168" bIns="201168"/>
-          <a:lstStyle/>
-          <a:p>
-            <a:pPr algn="ctr">
-              <a:spcAft>
-                <a:spcPts val="800"/>
-              </a:spcAft>
-              <a:defRPr sz="1500" b="1">
-                <a:solidFill>
-                  <a:srgbClr val="EF4444"/>
-                </a:solidFill>
-              </a:defRPr>
-            </a:pPr>
-            <a:r>
-              <a:t>Causa Raíz: Concatenación</a:t>
-            </a:r>
-          </a:p>
-          <a:p>
-            <a:pPr>
-              <a:spcAft>
-                <a:spcPts val="800"/>
-              </a:spcAft>
-              <a:defRPr sz="950" b="1">
-                <a:solidFill>
-                  <a:srgbClr val="94A3B8"/>
-                </a:solidFill>
-              </a:defRPr>
-            </a:pPr>
-            <a:r>
-              <a:t>[Mecanismo del Ataque]</a:t>
-            </a:r>
-          </a:p>
-          <a:p>
-            <a:pPr>
-              <a:spcAft>
-                <a:spcPts val="600"/>
-              </a:spcAft>
-              <a:defRPr sz="1200">
-                <a:solidFill>
-                  <a:srgbClr val="CBD5E1"/>
-                </a:solidFill>
-              </a:defRPr>
-            </a:pPr>
-            <a:r>
-              <a:t>• Construcción de consultas SQL mediante concatenación directa de strings.</a:t>
-            </a:r>
-          </a:p>
-          <a:p>
-            <a:pPr>
-              <a:spcAft>
-                <a:spcPts val="600"/>
-              </a:spcAft>
-              <a:defRPr sz="1200">
-                <a:solidFill>
-                  <a:srgbClr val="CBD5E1"/>
-                </a:solidFill>
-              </a:defRPr>
-            </a:pPr>
-            <a:r>
-              <a:t>• Ejemplo: 'SELECT * FROM users WHERE user = ' + input + ...</a:t>
-            </a:r>
-          </a:p>
-          <a:p>
-            <a:pPr>
-              <a:spcAft>
-                <a:spcPts val="600"/>
-              </a:spcAft>
-              <a:defRPr sz="1200">
-                <a:solidFill>
-                  <a:srgbClr val="CBD5E1"/>
-                </a:solidFill>
-              </a:defRPr>
-            </a:pPr>
-            <a:r>
-              <a:t>• Payloads booleanos como ' OR '1'='1 alteran el AST del intérprete SQL.</a:t>
-            </a:r>
-          </a:p>
-          <a:p>
-            <a:pPr>
-              <a:spcAft>
-                <a:spcPts val="600"/>
-              </a:spcAft>
-              <a:defRPr sz="1200">
-                <a:solidFill>
-                  <a:srgbClr val="CBD5E1"/>
-                </a:solidFill>
-              </a:defRPr>
-            </a:pPr>
-            <a:r>
-              <a:t>• Se anulan las condiciones de autenticación, otorgando acceso como administrador.</a:t>
-            </a:r>
-          </a:p>
-        </p:txBody>
-      </p:sp>
-      <p:sp>
-        <p:nvSpPr>
-          <p:cNvPr id="8" name="Rounded Rectangle 7"/>
-          <p:cNvSpPr/>
-          <p:nvPr/>
-        </p:nvSpPr>
-        <p:spPr>
-          <a:xfrm>
-            <a:off x="8046720" y="1645920"/>
-            <a:ext cx="3383280" cy="4572000"/>
-          </a:xfrm>
-          <a:prstGeom prst="roundRect">
-            <a:avLst/>
-          </a:prstGeom>
-          <a:solidFill>
-            <a:srgbClr val="131D33"/>
-          </a:solidFill>
-          <a:ln w="12700">
-            <a:solidFill>
-              <a:srgbClr val="24324D"/>
-            </a:solidFill>
-          </a:ln>
-        </p:spPr>
-        <p:style>
-          <a:lnRef idx="1">
-            <a:schemeClr val="accent1"/>
-          </a:lnRef>
-          <a:fillRef idx="3">
-            <a:schemeClr val="accent1"/>
-          </a:fillRef>
-          <a:effectRef idx="2">
-            <a:schemeClr val="accent1"/>
-          </a:effectRef>
-          <a:fontRef idx="minor">
-            <a:schemeClr val="lt1"/>
-          </a:fontRef>
-        </p:style>
-        <p:txBody>
-          <a:bodyPr rtlCol="0" anchor="ctr" wrap="square" lIns="228600" rIns="228600" tIns="201168" bIns="201168"/>
-          <a:lstStyle/>
-          <a:p>
-            <a:pPr algn="ctr">
-              <a:spcAft>
-                <a:spcPts val="800"/>
-              </a:spcAft>
-              <a:defRPr sz="1500" b="1">
-                <a:solidFill>
-                  <a:srgbClr val="10B981"/>
-                </a:solidFill>
-              </a:defRPr>
-            </a:pPr>
-            <a:r>
-              <a:t>Solución: Prepared Statements</a:t>
-            </a:r>
-          </a:p>
-          <a:p>
-            <a:pPr>
-              <a:spcAft>
-                <a:spcPts val="800"/>
-              </a:spcAft>
-              <a:defRPr sz="950" b="1">
-                <a:solidFill>
-                  <a:srgbClr val="94A3B8"/>
-                </a:solidFill>
-              </a:defRPr>
-            </a:pPr>
-            <a:r>
-              <a:t>[Mitigación Definitiva]</a:t>
-            </a:r>
-          </a:p>
-          <a:p>
-            <a:pPr>
-              <a:spcAft>
-                <a:spcPts val="600"/>
-              </a:spcAft>
-              <a:defRPr sz="1200">
-                <a:solidFill>
-                  <a:srgbClr val="CBD5E1"/>
-                </a:solidFill>
-              </a:defRPr>
-            </a:pPr>
-            <a:r>
-              <a:t>• Consultas parametrizadas obligatorias (los parámetros viajan como datos, no código).</a:t>
-            </a:r>
-          </a:p>
-          <a:p>
-            <a:pPr>
-              <a:spcAft>
-                <a:spcPts val="600"/>
-              </a:spcAft>
-              <a:defRPr sz="1200">
-                <a:solidFill>
-                  <a:srgbClr val="CBD5E1"/>
-                </a:solidFill>
-              </a:defRPr>
-            </a:pPr>
-            <a:r>
-              <a:t>• Validación y saneamiento de entradas con esquemas estrictos (Zod, Joi).</a:t>
-            </a:r>
-          </a:p>
-          <a:p>
-            <a:pPr>
-              <a:spcAft>
-                <a:spcPts val="600"/>
-              </a:spcAft>
-              <a:defRPr sz="1200">
-                <a:solidFill>
-                  <a:srgbClr val="CBD5E1"/>
-                </a:solidFill>
-              </a:defRPr>
-            </a:pPr>
-            <a:r>
-              <a:t>• Integración de análisis estático y dinámico (SAST, DAST, IAST) en CI/CD.</a:t>
-            </a:r>
-          </a:p>
-          <a:p>
-            <a:pPr>
-              <a:spcAft>
-                <a:spcPts val="600"/>
-              </a:spcAft>
-              <a:defRPr sz="1200">
-                <a:solidFill>
-                  <a:srgbClr val="CBD5E1"/>
-                </a:solidFill>
-              </a:defRPr>
-            </a:pPr>
-            <a:r>
-              <a:t>• Evitar consultas 'raw' dinámicas incluso al utilizar frameworks u ORMs.</a:t>
+              <a:t>// ❌ CÓDIGO VULNERABLE (Concatenación Dinámica):</a:t>
+            </a:r>
+            <a:br/>
+            <a:r>
+              <a:t>const query = 'SELECT * FROM users WHERE user = \'' </a:t>
+            </a:r>
+            <a:br/>
+            <a:r>
+              <a:t>              + userInput + '\' AND pass = \'' + passInput + '\'';</a:t>
+            </a:r>
+            <a:br/>
+            <a:br/>
+            <a:r>
+              <a:t>// Si el atacante envía: ' OR '1'='1</a:t>
+            </a:r>
+            <a:br/>
+            <a:r>
+              <a:t>// La consulta se transforma en:</a:t>
+            </a:r>
+            <a:br/>
+            <a:r>
+              <a:t>// WHERE user = '' OR '1'='1' (¡Verdadero para todas las filas!)</a:t>
+            </a:r>
+            <a:br/>
+            <a:br/>
+            <a:r>
+              <a:t>// --------------------------------------------------</a:t>
+            </a:r>
+            <a:br/>
+            <a:br/>
+            <a:r>
+              <a:t>// ✅ CÓDIGO SEGURO (Sentencia Parametrizada):</a:t>
+            </a:r>
+            <a:br/>
+            <a:r>
+              <a:t>const sql = 'SELECT * FROM users WHERE user = ? AND pass = ?';</a:t>
+            </a:r>
+            <a:br/>
+            <a:r>
+              <a:t>const [rows] = await db.execute(sql, [userInput, passInput]);</a:t>
+            </a:r>
+            <a:br/>
+            <a:br/>
+            <a:r>
+              <a:t>// El motor compila el árbol sintáctico ANTES de recibir los datos.</a:t>
+            </a:r>
+            <a:br/>
+            <a:r>
+              <a:t>// El payload es tratado como texto literal inofensivo.</a:t>
             </a:r>
           </a:p>
         </p:txBody>
